--- a/exports/pptx/lessons/middle-module-09-subtraction-nikhilam/day-02-complement-100.pptx
+++ b/exports/pptx/lessons/middle-module-09-subtraction-nikhilam/day-02-complement-100.pptx
@@ -5032,8 +5032,8 @@
         </p:nvSpPr>
         <p:spPr>
           <a:xfrm>
-            <a:off x="634901" y="6167884"/>
-            <a:ext cx="8102798" cy="712291"/>
+            <a:off x="406301" y="4688979"/>
+            <a:ext cx="8498026" cy="213271"/>
           </a:xfrm>
           <a:prstGeom prst="rect">
             <a:avLst/>
@@ -5045,131 +5045,13 @@
           <a:bodyPr wrap="square" lIns="0" tIns="0" rIns="0" bIns="0" rtlCol="0" anchor="t"/>
           <a:lstStyle/>
           <a:p>
-            <a:pPr algn="l" marL="342900" indent="-342900">
-              <a:lnSpc>
-                <a:spcPts val="1620"/>
-              </a:lnSpc>
-              <a:spcAft>
-                <a:spcPts val="300"/>
-              </a:spcAft>
-              <a:buSzPct val="100000"/>
-              <a:buChar char="•"/>
-            </a:pPr>
-            <a:r>
-              <a:rPr lang="en-US" sz="1200" b="1" dirty="0">
-                <a:solidFill>
-                  <a:srgbClr val="1C2833"/>
-                </a:solidFill>
-                <a:latin typeface="Arial" pitchFamily="34" charset="0"/>
-                <a:ea typeface="Arial" pitchFamily="34" charset="-122"/>
-                <a:cs typeface="Arial" pitchFamily="34" charset="-120"/>
-              </a:rPr>
-              <a:t>Edge case: trailing zero.</a:t>
-            </a:r>
-            <a:pPr algn="l" indent="0" marL="0">
-              <a:lnSpc>
-                <a:spcPts val="1620"/>
-              </a:lnSpc>
-              <a:spcAft>
-                <a:spcPts val="300"/>
-              </a:spcAft>
-              <a:buNone/>
-            </a:pPr>
-            <a:r>
-              <a:rPr lang="en-US" sz="1200" dirty="0">
-                <a:solidFill>
-                  <a:srgbClr val="1C2833"/>
-                </a:solidFill>
-                <a:latin typeface="Arial" pitchFamily="34" charset="0"/>
-                <a:ea typeface="Arial" pitchFamily="34" charset="-122"/>
-                <a:cs typeface="Arial" pitchFamily="34" charset="-120"/>
-              </a:rPr>
-              <a:t> What is the complement of 30? Apply the rule: 9 − 3 = 6 (for tens), 10 − 0 = 10 (for units). But 10 isn't a digit — it carries. So you get </a:t>
-            </a:r>
-            <a:pPr algn="l" indent="0" marL="0">
-              <a:lnSpc>
-                <a:spcPts val="1620"/>
-              </a:lnSpc>
-              <a:spcAft>
-                <a:spcPts val="300"/>
-              </a:spcAft>
-              <a:buNone/>
-            </a:pPr>
-            <a:r>
-              <a:rPr lang="en-US" sz="1200" dirty="0">
-                <a:solidFill>
-                  <a:srgbClr val="1C2833"/>
-                </a:solidFill>
-                <a:latin typeface="Arial" pitchFamily="34" charset="0"/>
-                <a:ea typeface="Arial" pitchFamily="34" charset="-122"/>
-                <a:cs typeface="Arial" pitchFamily="34" charset="-120"/>
-              </a:rPr>
-              <a:t>6 | 10</a:t>
-            </a:r>
-            <a:pPr algn="l" indent="0" marL="0">
-              <a:lnSpc>
-                <a:spcPts val="1620"/>
-              </a:lnSpc>
-              <a:spcAft>
-                <a:spcPts val="300"/>
-              </a:spcAft>
-              <a:buNone/>
-            </a:pPr>
-            <a:r>
-              <a:rPr lang="en-US" sz="1200" dirty="0">
-                <a:solidFill>
-                  <a:srgbClr val="1C2833"/>
-                </a:solidFill>
-                <a:latin typeface="Arial" pitchFamily="34" charset="0"/>
-                <a:ea typeface="Arial" pitchFamily="34" charset="-122"/>
-                <a:cs typeface="Arial" pitchFamily="34" charset="-120"/>
-              </a:rPr>
-              <a:t> → </a:t>
-            </a:r>
-            <a:pPr algn="l" indent="0" marL="0">
-              <a:lnSpc>
-                <a:spcPts val="1620"/>
-              </a:lnSpc>
-              <a:spcAft>
-                <a:spcPts val="300"/>
-              </a:spcAft>
-              <a:buNone/>
-            </a:pPr>
-            <a:r>
-              <a:rPr lang="en-US" sz="1200" dirty="0">
-                <a:solidFill>
-                  <a:srgbClr val="1C2833"/>
-                </a:solidFill>
-                <a:latin typeface="Arial" pitchFamily="34" charset="0"/>
-                <a:ea typeface="Arial" pitchFamily="34" charset="-122"/>
-                <a:cs typeface="Arial" pitchFamily="34" charset="-120"/>
-              </a:rPr>
-              <a:t>70</a:t>
-            </a:r>
-            <a:pPr algn="l" indent="0" marL="0">
-              <a:lnSpc>
-                <a:spcPts val="1620"/>
-              </a:lnSpc>
-              <a:spcAft>
-                <a:spcPts val="300"/>
-              </a:spcAft>
-              <a:buNone/>
-            </a:pPr>
-            <a:r>
-              <a:rPr lang="en-US" sz="1200" dirty="0">
-                <a:solidFill>
-                  <a:srgbClr val="1C2833"/>
-                </a:solidFill>
-                <a:latin typeface="Arial" pitchFamily="34" charset="0"/>
-                <a:ea typeface="Arial" pitchFamily="34" charset="-122"/>
-                <a:cs typeface="Arial" pitchFamily="34" charset="-120"/>
-              </a:rPr>
-              <a:t>. Easier: notice that the last </a:t>
-            </a:r>
-            <a:pPr algn="l" indent="0" marL="0">
-              <a:lnSpc>
-                <a:spcPts val="1620"/>
-              </a:lnSpc>
+            <a:pPr algn="l" indent="0" marL="0">
+              <a:lnSpc>
+                <a:spcPts val="1680"/>
+              </a:lnSpc>
+              <a:spcBef>
+                <a:spcPts val="300"/>
+              </a:spcBef>
               <a:spcAft>
                 <a:spcPts val="300"/>
               </a:spcAft>
@@ -5184,27 +5066,7 @@
                 <a:ea typeface="Arial" pitchFamily="34" charset="-122"/>
                 <a:cs typeface="Arial" pitchFamily="34" charset="-120"/>
               </a:rPr>
-              <a:t>non-zero</a:t>
-            </a:r>
-            <a:pPr algn="l" indent="0" marL="0">
-              <a:lnSpc>
-                <a:spcPts val="1620"/>
-              </a:lnSpc>
-              <a:spcAft>
-                <a:spcPts val="300"/>
-              </a:spcAft>
-              <a:buNone/>
-            </a:pPr>
-            <a:r>
-              <a:rPr lang="en-US" sz="1200" dirty="0">
-                <a:solidFill>
-                  <a:srgbClr val="1C2833"/>
-                </a:solidFill>
-                <a:latin typeface="Arial" pitchFamily="34" charset="0"/>
-                <a:ea typeface="Arial" pitchFamily="34" charset="-122"/>
-                <a:cs typeface="Arial" pitchFamily="34" charset="-120"/>
-              </a:rPr>
-              <a:t> digit gets the "from 10" treatment; trailing zeros stay as zeros.</a:t>
+              <a:t>Each row: Number · First digit · Last digit · Complement · Check.</a:t>
             </a:r>
             <a:endParaRPr lang="en-US" sz="1200" dirty="0"/>
           </a:p>
@@ -5218,8 +5080,8 @@
         </p:nvSpPr>
         <p:spPr>
           <a:xfrm>
-            <a:off x="406301" y="6969026"/>
-            <a:ext cx="8498026" cy="213271"/>
+            <a:off x="634901" y="4991100"/>
+            <a:ext cx="8102798" cy="1013222"/>
           </a:xfrm>
           <a:prstGeom prst="rect">
             <a:avLst/>
@@ -5231,13 +5093,31 @@
           <a:bodyPr wrap="square" lIns="0" tIns="0" rIns="0" bIns="0" rtlCol="0" anchor="t"/>
           <a:lstStyle/>
           <a:p>
-            <a:pPr algn="l" indent="0" marL="0">
-              <a:lnSpc>
-                <a:spcPts val="1680"/>
-              </a:lnSpc>
-              <a:spcBef>
-                <a:spcPts val="300"/>
-              </a:spcBef>
+            <a:pPr algn="l" marL="342900" indent="-342900">
+              <a:lnSpc>
+                <a:spcPts val="1620"/>
+              </a:lnSpc>
+              <a:spcAft>
+                <a:spcPts val="300"/>
+              </a:spcAft>
+              <a:buSzPct val="100000"/>
+              <a:buChar char="•"/>
+            </a:pPr>
+            <a:r>
+              <a:rPr lang="en-US" sz="1200" b="1" dirty="0">
+                <a:solidFill>
+                  <a:srgbClr val="1C2833"/>
+                </a:solidFill>
+                <a:latin typeface="Arial" pitchFamily="34" charset="0"/>
+                <a:ea typeface="Arial" pitchFamily="34" charset="-122"/>
+                <a:cs typeface="Arial" pitchFamily="34" charset="-120"/>
+              </a:rPr>
+              <a:t>41</a:t>
+            </a:r>
+            <a:pPr algn="l" indent="0" marL="0">
+              <a:lnSpc>
+                <a:spcPts val="1620"/>
+              </a:lnSpc>
               <a:spcAft>
                 <a:spcPts val="300"/>
               </a:spcAft>
@@ -5252,7 +5132,299 @@
                 <a:ea typeface="Arial" pitchFamily="34" charset="-122"/>
                 <a:cs typeface="Arial" pitchFamily="34" charset="-120"/>
               </a:rPr>
-              <a:t>Or more simply: 30 + 70 = 100, so complement of 30 is 70. The rule still works, you just respect place value.</a:t>
+              <a:t> — 9 − 4 = 5 · 10 − 1 = 9 · </a:t>
+            </a:r>
+            <a:pPr algn="l" indent="0" marL="0">
+              <a:lnSpc>
+                <a:spcPts val="1620"/>
+              </a:lnSpc>
+              <a:spcAft>
+                <a:spcPts val="300"/>
+              </a:spcAft>
+              <a:buNone/>
+            </a:pPr>
+            <a:r>
+              <a:rPr lang="en-US" sz="1200" b="1" dirty="0">
+                <a:solidFill>
+                  <a:srgbClr val="1C2833"/>
+                </a:solidFill>
+                <a:latin typeface="Arial" pitchFamily="34" charset="0"/>
+                <a:ea typeface="Arial" pitchFamily="34" charset="-122"/>
+                <a:cs typeface="Arial" pitchFamily="34" charset="-120"/>
+              </a:rPr>
+              <a:t>59</a:t>
+            </a:r>
+            <a:pPr algn="l" indent="0" marL="0">
+              <a:lnSpc>
+                <a:spcPts val="1620"/>
+              </a:lnSpc>
+              <a:spcAft>
+                <a:spcPts val="300"/>
+              </a:spcAft>
+              <a:buNone/>
+            </a:pPr>
+            <a:r>
+              <a:rPr lang="en-US" sz="1200" dirty="0">
+                <a:solidFill>
+                  <a:srgbClr val="1C2833"/>
+                </a:solidFill>
+                <a:latin typeface="Arial" pitchFamily="34" charset="0"/>
+                <a:ea typeface="Arial" pitchFamily="34" charset="-122"/>
+                <a:cs typeface="Arial" pitchFamily="34" charset="-120"/>
+              </a:rPr>
+              <a:t> · 41 + 59 = 100 ✓</a:t>
+            </a:r>
+            <a:endParaRPr lang="en-US" sz="1200" dirty="0"/>
+          </a:p>
+          <a:p>
+            <a:pPr algn="l" marL="342900" indent="-342900">
+              <a:lnSpc>
+                <a:spcPts val="1620"/>
+              </a:lnSpc>
+              <a:spcAft>
+                <a:spcPts val="300"/>
+              </a:spcAft>
+              <a:buSzPct val="100000"/>
+              <a:buChar char="•"/>
+            </a:pPr>
+            <a:r>
+              <a:rPr lang="en-US" sz="1200" b="1" dirty="0">
+                <a:solidFill>
+                  <a:srgbClr val="1C2833"/>
+                </a:solidFill>
+                <a:latin typeface="Arial" pitchFamily="34" charset="0"/>
+                <a:ea typeface="Arial" pitchFamily="34" charset="-122"/>
+                <a:cs typeface="Arial" pitchFamily="34" charset="-120"/>
+              </a:rPr>
+              <a:t>28</a:t>
+            </a:r>
+            <a:pPr algn="l" indent="0" marL="0">
+              <a:lnSpc>
+                <a:spcPts val="1620"/>
+              </a:lnSpc>
+              <a:spcAft>
+                <a:spcPts val="300"/>
+              </a:spcAft>
+              <a:buNone/>
+            </a:pPr>
+            <a:r>
+              <a:rPr lang="en-US" sz="1200" dirty="0">
+                <a:solidFill>
+                  <a:srgbClr val="1C2833"/>
+                </a:solidFill>
+                <a:latin typeface="Arial" pitchFamily="34" charset="0"/>
+                <a:ea typeface="Arial" pitchFamily="34" charset="-122"/>
+                <a:cs typeface="Arial" pitchFamily="34" charset="-120"/>
+              </a:rPr>
+              <a:t> — 9 − 2 = 7 · 10 − 8 = 2 · </a:t>
+            </a:r>
+            <a:pPr algn="l" indent="0" marL="0">
+              <a:lnSpc>
+                <a:spcPts val="1620"/>
+              </a:lnSpc>
+              <a:spcAft>
+                <a:spcPts val="300"/>
+              </a:spcAft>
+              <a:buNone/>
+            </a:pPr>
+            <a:r>
+              <a:rPr lang="en-US" sz="1200" b="1" dirty="0">
+                <a:solidFill>
+                  <a:srgbClr val="1C2833"/>
+                </a:solidFill>
+                <a:latin typeface="Arial" pitchFamily="34" charset="0"/>
+                <a:ea typeface="Arial" pitchFamily="34" charset="-122"/>
+                <a:cs typeface="Arial" pitchFamily="34" charset="-120"/>
+              </a:rPr>
+              <a:t>72</a:t>
+            </a:r>
+            <a:pPr algn="l" indent="0" marL="0">
+              <a:lnSpc>
+                <a:spcPts val="1620"/>
+              </a:lnSpc>
+              <a:spcAft>
+                <a:spcPts val="300"/>
+              </a:spcAft>
+              <a:buNone/>
+            </a:pPr>
+            <a:r>
+              <a:rPr lang="en-US" sz="1200" dirty="0">
+                <a:solidFill>
+                  <a:srgbClr val="1C2833"/>
+                </a:solidFill>
+                <a:latin typeface="Arial" pitchFamily="34" charset="0"/>
+                <a:ea typeface="Arial" pitchFamily="34" charset="-122"/>
+                <a:cs typeface="Arial" pitchFamily="34" charset="-120"/>
+              </a:rPr>
+              <a:t> · 28 + 72 = 100 ✓</a:t>
+            </a:r>
+            <a:endParaRPr lang="en-US" sz="1200" dirty="0"/>
+          </a:p>
+          <a:p>
+            <a:pPr algn="l" marL="342900" indent="-342900">
+              <a:lnSpc>
+                <a:spcPts val="1620"/>
+              </a:lnSpc>
+              <a:spcAft>
+                <a:spcPts val="300"/>
+              </a:spcAft>
+              <a:buSzPct val="100000"/>
+              <a:buChar char="•"/>
+            </a:pPr>
+            <a:r>
+              <a:rPr lang="en-US" sz="1200" b="1" dirty="0">
+                <a:solidFill>
+                  <a:srgbClr val="1C2833"/>
+                </a:solidFill>
+                <a:latin typeface="Arial" pitchFamily="34" charset="0"/>
+                <a:ea typeface="Arial" pitchFamily="34" charset="-122"/>
+                <a:cs typeface="Arial" pitchFamily="34" charset="-120"/>
+              </a:rPr>
+              <a:t>86</a:t>
+            </a:r>
+            <a:pPr algn="l" indent="0" marL="0">
+              <a:lnSpc>
+                <a:spcPts val="1620"/>
+              </a:lnSpc>
+              <a:spcAft>
+                <a:spcPts val="300"/>
+              </a:spcAft>
+              <a:buNone/>
+            </a:pPr>
+            <a:r>
+              <a:rPr lang="en-US" sz="1200" dirty="0">
+                <a:solidFill>
+                  <a:srgbClr val="1C2833"/>
+                </a:solidFill>
+                <a:latin typeface="Arial" pitchFamily="34" charset="0"/>
+                <a:ea typeface="Arial" pitchFamily="34" charset="-122"/>
+                <a:cs typeface="Arial" pitchFamily="34" charset="-120"/>
+              </a:rPr>
+              <a:t> — 9 − 8 = 1 · 10 − 6 = 4 · </a:t>
+            </a:r>
+            <a:pPr algn="l" indent="0" marL="0">
+              <a:lnSpc>
+                <a:spcPts val="1620"/>
+              </a:lnSpc>
+              <a:spcAft>
+                <a:spcPts val="300"/>
+              </a:spcAft>
+              <a:buNone/>
+            </a:pPr>
+            <a:r>
+              <a:rPr lang="en-US" sz="1200" b="1" dirty="0">
+                <a:solidFill>
+                  <a:srgbClr val="1C2833"/>
+                </a:solidFill>
+                <a:latin typeface="Arial" pitchFamily="34" charset="0"/>
+                <a:ea typeface="Arial" pitchFamily="34" charset="-122"/>
+                <a:cs typeface="Arial" pitchFamily="34" charset="-120"/>
+              </a:rPr>
+              <a:t>14</a:t>
+            </a:r>
+            <a:pPr algn="l" indent="0" marL="0">
+              <a:lnSpc>
+                <a:spcPts val="1620"/>
+              </a:lnSpc>
+              <a:spcAft>
+                <a:spcPts val="300"/>
+              </a:spcAft>
+              <a:buNone/>
+            </a:pPr>
+            <a:r>
+              <a:rPr lang="en-US" sz="1200" dirty="0">
+                <a:solidFill>
+                  <a:srgbClr val="1C2833"/>
+                </a:solidFill>
+                <a:latin typeface="Arial" pitchFamily="34" charset="0"/>
+                <a:ea typeface="Arial" pitchFamily="34" charset="-122"/>
+                <a:cs typeface="Arial" pitchFamily="34" charset="-120"/>
+              </a:rPr>
+              <a:t> · 86 + 14 = 100 ✓</a:t>
+            </a:r>
+            <a:endParaRPr lang="en-US" sz="1200" dirty="0"/>
+          </a:p>
+          <a:p>
+            <a:pPr algn="l" marL="342900" indent="-342900">
+              <a:lnSpc>
+                <a:spcPts val="1620"/>
+              </a:lnSpc>
+              <a:spcAft>
+                <a:spcPts val="300"/>
+              </a:spcAft>
+              <a:buSzPct val="100000"/>
+              <a:buChar char="•"/>
+            </a:pPr>
+            <a:r>
+              <a:rPr lang="en-US" sz="1200" b="1" dirty="0">
+                <a:solidFill>
+                  <a:srgbClr val="1C2833"/>
+                </a:solidFill>
+                <a:latin typeface="Arial" pitchFamily="34" charset="0"/>
+                <a:ea typeface="Arial" pitchFamily="34" charset="-122"/>
+                <a:cs typeface="Arial" pitchFamily="34" charset="-120"/>
+              </a:rPr>
+              <a:t>95</a:t>
+            </a:r>
+            <a:pPr algn="l" indent="0" marL="0">
+              <a:lnSpc>
+                <a:spcPts val="1620"/>
+              </a:lnSpc>
+              <a:spcAft>
+                <a:spcPts val="300"/>
+              </a:spcAft>
+              <a:buNone/>
+            </a:pPr>
+            <a:r>
+              <a:rPr lang="en-US" sz="1200" dirty="0">
+                <a:solidFill>
+                  <a:srgbClr val="1C2833"/>
+                </a:solidFill>
+                <a:latin typeface="Arial" pitchFamily="34" charset="0"/>
+                <a:ea typeface="Arial" pitchFamily="34" charset="-122"/>
+                <a:cs typeface="Arial" pitchFamily="34" charset="-120"/>
+              </a:rPr>
+              <a:t> — 9 − 9 = 0 · 10 − 5 = 5 · </a:t>
+            </a:r>
+            <a:pPr algn="l" indent="0" marL="0">
+              <a:lnSpc>
+                <a:spcPts val="1620"/>
+              </a:lnSpc>
+              <a:spcAft>
+                <a:spcPts val="300"/>
+              </a:spcAft>
+              <a:buNone/>
+            </a:pPr>
+            <a:r>
+              <a:rPr lang="en-US" sz="1200" b="1" dirty="0">
+                <a:solidFill>
+                  <a:srgbClr val="1C2833"/>
+                </a:solidFill>
+                <a:latin typeface="Arial" pitchFamily="34" charset="0"/>
+                <a:ea typeface="Arial" pitchFamily="34" charset="-122"/>
+                <a:cs typeface="Arial" pitchFamily="34" charset="-120"/>
+              </a:rPr>
+              <a:t>05</a:t>
+            </a:r>
+            <a:pPr algn="l" indent="0" marL="0">
+              <a:lnSpc>
+                <a:spcPts val="1620"/>
+              </a:lnSpc>
+              <a:spcAft>
+                <a:spcPts val="300"/>
+              </a:spcAft>
+              <a:buNone/>
+            </a:pPr>
+            <a:r>
+              <a:rPr lang="en-US" sz="1200" dirty="0">
+                <a:solidFill>
+                  <a:srgbClr val="1C2833"/>
+                </a:solidFill>
+                <a:latin typeface="Arial" pitchFamily="34" charset="0"/>
+                <a:ea typeface="Arial" pitchFamily="34" charset="-122"/>
+                <a:cs typeface="Arial" pitchFamily="34" charset="-120"/>
+              </a:rPr>
+              <a:t> = 5 · 95 + 5 = 100 ✓</a:t>
             </a:r>
             <a:endParaRPr lang="en-US" sz="1200" dirty="0"/>
           </a:p>
@@ -5266,7 +5438,241 @@
         </p:nvSpPr>
         <p:spPr>
           <a:xfrm>
-            <a:off x="406301" y="7334696"/>
+            <a:off x="634901" y="6105823"/>
+            <a:ext cx="8102798" cy="712291"/>
+          </a:xfrm>
+          <a:prstGeom prst="rect">
+            <a:avLst/>
+          </a:prstGeom>
+          <a:noFill/>
+          <a:ln/>
+        </p:spPr>
+        <p:txBody>
+          <a:bodyPr wrap="square" lIns="0" tIns="0" rIns="0" bIns="0" rtlCol="0" anchor="t"/>
+          <a:lstStyle/>
+          <a:p>
+            <a:pPr algn="l" marL="342900" indent="-342900">
+              <a:lnSpc>
+                <a:spcPts val="1620"/>
+              </a:lnSpc>
+              <a:spcAft>
+                <a:spcPts val="300"/>
+              </a:spcAft>
+              <a:buSzPct val="100000"/>
+              <a:buChar char="•"/>
+            </a:pPr>
+            <a:r>
+              <a:rPr lang="en-US" sz="1200" b="1" dirty="0">
+                <a:solidFill>
+                  <a:srgbClr val="1C2833"/>
+                </a:solidFill>
+                <a:latin typeface="Arial" pitchFamily="34" charset="0"/>
+                <a:ea typeface="Arial" pitchFamily="34" charset="-122"/>
+                <a:cs typeface="Arial" pitchFamily="34" charset="-120"/>
+              </a:rPr>
+              <a:t>Edge case: trailing zero.</a:t>
+            </a:r>
+            <a:pPr algn="l" indent="0" marL="0">
+              <a:lnSpc>
+                <a:spcPts val="1620"/>
+              </a:lnSpc>
+              <a:spcAft>
+                <a:spcPts val="300"/>
+              </a:spcAft>
+              <a:buNone/>
+            </a:pPr>
+            <a:r>
+              <a:rPr lang="en-US" sz="1200" dirty="0">
+                <a:solidFill>
+                  <a:srgbClr val="1C2833"/>
+                </a:solidFill>
+                <a:latin typeface="Arial" pitchFamily="34" charset="0"/>
+                <a:ea typeface="Arial" pitchFamily="34" charset="-122"/>
+                <a:cs typeface="Arial" pitchFamily="34" charset="-120"/>
+              </a:rPr>
+              <a:t> What is the complement of 30? Apply the rule: 9 − 3 = 6 (for tens), 10 − 0 = 10 (for units). But 10 isn't a digit — it carries. So you get </a:t>
+            </a:r>
+            <a:pPr algn="l" indent="0" marL="0">
+              <a:lnSpc>
+                <a:spcPts val="1620"/>
+              </a:lnSpc>
+              <a:spcAft>
+                <a:spcPts val="300"/>
+              </a:spcAft>
+              <a:buNone/>
+            </a:pPr>
+            <a:r>
+              <a:rPr lang="en-US" sz="1200" dirty="0">
+                <a:solidFill>
+                  <a:srgbClr val="1C2833"/>
+                </a:solidFill>
+                <a:latin typeface="Arial" pitchFamily="34" charset="0"/>
+                <a:ea typeface="Arial" pitchFamily="34" charset="-122"/>
+                <a:cs typeface="Arial" pitchFamily="34" charset="-120"/>
+              </a:rPr>
+              <a:t>6 | 10</a:t>
+            </a:r>
+            <a:pPr algn="l" indent="0" marL="0">
+              <a:lnSpc>
+                <a:spcPts val="1620"/>
+              </a:lnSpc>
+              <a:spcAft>
+                <a:spcPts val="300"/>
+              </a:spcAft>
+              <a:buNone/>
+            </a:pPr>
+            <a:r>
+              <a:rPr lang="en-US" sz="1200" dirty="0">
+                <a:solidFill>
+                  <a:srgbClr val="1C2833"/>
+                </a:solidFill>
+                <a:latin typeface="Arial" pitchFamily="34" charset="0"/>
+                <a:ea typeface="Arial" pitchFamily="34" charset="-122"/>
+                <a:cs typeface="Arial" pitchFamily="34" charset="-120"/>
+              </a:rPr>
+              <a:t> → </a:t>
+            </a:r>
+            <a:pPr algn="l" indent="0" marL="0">
+              <a:lnSpc>
+                <a:spcPts val="1620"/>
+              </a:lnSpc>
+              <a:spcAft>
+                <a:spcPts val="300"/>
+              </a:spcAft>
+              <a:buNone/>
+            </a:pPr>
+            <a:r>
+              <a:rPr lang="en-US" sz="1200" dirty="0">
+                <a:solidFill>
+                  <a:srgbClr val="1C2833"/>
+                </a:solidFill>
+                <a:latin typeface="Arial" pitchFamily="34" charset="0"/>
+                <a:ea typeface="Arial" pitchFamily="34" charset="-122"/>
+                <a:cs typeface="Arial" pitchFamily="34" charset="-120"/>
+              </a:rPr>
+              <a:t>70</a:t>
+            </a:r>
+            <a:pPr algn="l" indent="0" marL="0">
+              <a:lnSpc>
+                <a:spcPts val="1620"/>
+              </a:lnSpc>
+              <a:spcAft>
+                <a:spcPts val="300"/>
+              </a:spcAft>
+              <a:buNone/>
+            </a:pPr>
+            <a:r>
+              <a:rPr lang="en-US" sz="1200" dirty="0">
+                <a:solidFill>
+                  <a:srgbClr val="1C2833"/>
+                </a:solidFill>
+                <a:latin typeface="Arial" pitchFamily="34" charset="0"/>
+                <a:ea typeface="Arial" pitchFamily="34" charset="-122"/>
+                <a:cs typeface="Arial" pitchFamily="34" charset="-120"/>
+              </a:rPr>
+              <a:t>. Easier: notice that the last </a:t>
+            </a:r>
+            <a:pPr algn="l" indent="0" marL="0">
+              <a:lnSpc>
+                <a:spcPts val="1620"/>
+              </a:lnSpc>
+              <a:spcAft>
+                <a:spcPts val="300"/>
+              </a:spcAft>
+              <a:buNone/>
+            </a:pPr>
+            <a:r>
+              <a:rPr lang="en-US" sz="1200" i="1" dirty="0">
+                <a:solidFill>
+                  <a:srgbClr val="1C2833"/>
+                </a:solidFill>
+                <a:latin typeface="Arial" pitchFamily="34" charset="0"/>
+                <a:ea typeface="Arial" pitchFamily="34" charset="-122"/>
+                <a:cs typeface="Arial" pitchFamily="34" charset="-120"/>
+              </a:rPr>
+              <a:t>non-zero</a:t>
+            </a:r>
+            <a:pPr algn="l" indent="0" marL="0">
+              <a:lnSpc>
+                <a:spcPts val="1620"/>
+              </a:lnSpc>
+              <a:spcAft>
+                <a:spcPts val="300"/>
+              </a:spcAft>
+              <a:buNone/>
+            </a:pPr>
+            <a:r>
+              <a:rPr lang="en-US" sz="1200" dirty="0">
+                <a:solidFill>
+                  <a:srgbClr val="1C2833"/>
+                </a:solidFill>
+                <a:latin typeface="Arial" pitchFamily="34" charset="0"/>
+                <a:ea typeface="Arial" pitchFamily="34" charset="-122"/>
+                <a:cs typeface="Arial" pitchFamily="34" charset="-120"/>
+              </a:rPr>
+              <a:t> digit gets the "from 10" treatment; trailing zeros stay as zeros.</a:t>
+            </a:r>
+            <a:endParaRPr lang="en-US" sz="1200" dirty="0"/>
+          </a:p>
+        </p:txBody>
+      </p:sp>
+      <p:sp>
+        <p:nvSpPr>
+          <p:cNvPr id="20" name="Text 18"/>
+          <p:cNvSpPr/>
+          <p:nvPr/>
+        </p:nvSpPr>
+        <p:spPr>
+          <a:xfrm>
+            <a:off x="406301" y="6906964"/>
+            <a:ext cx="8498026" cy="213271"/>
+          </a:xfrm>
+          <a:prstGeom prst="rect">
+            <a:avLst/>
+          </a:prstGeom>
+          <a:noFill/>
+          <a:ln/>
+        </p:spPr>
+        <p:txBody>
+          <a:bodyPr wrap="square" lIns="0" tIns="0" rIns="0" bIns="0" rtlCol="0" anchor="t"/>
+          <a:lstStyle/>
+          <a:p>
+            <a:pPr algn="l" indent="0" marL="0">
+              <a:lnSpc>
+                <a:spcPts val="1680"/>
+              </a:lnSpc>
+              <a:spcBef>
+                <a:spcPts val="300"/>
+              </a:spcBef>
+              <a:spcAft>
+                <a:spcPts val="300"/>
+              </a:spcAft>
+              <a:buNone/>
+            </a:pPr>
+            <a:r>
+              <a:rPr lang="en-US" sz="1200" dirty="0">
+                <a:solidFill>
+                  <a:srgbClr val="1C2833"/>
+                </a:solidFill>
+                <a:latin typeface="Arial" pitchFamily="34" charset="0"/>
+                <a:ea typeface="Arial" pitchFamily="34" charset="-122"/>
+                <a:cs typeface="Arial" pitchFamily="34" charset="-120"/>
+              </a:rPr>
+              <a:t>Or more simply: 30 + 70 = 100, so complement of 30 is 70. The rule still works, you just respect place value.</a:t>
+            </a:r>
+            <a:endParaRPr lang="en-US" sz="1200" dirty="0"/>
+          </a:p>
+        </p:txBody>
+      </p:sp>
+      <p:sp>
+        <p:nvSpPr>
+          <p:cNvPr id="21" name="Text 19"/>
+          <p:cNvSpPr/>
+          <p:nvPr/>
+        </p:nvSpPr>
+        <p:spPr>
+          <a:xfrm>
+            <a:off x="406301" y="7272635"/>
             <a:ext cx="8498026" cy="213271"/>
           </a:xfrm>
           <a:prstGeom prst="rect">

--- a/exports/pptx/lessons/middle-module-09-subtraction-nikhilam/day-02-complement-100.pptx
+++ b/exports/pptx/lessons/middle-module-09-subtraction-nikhilam/day-02-complement-100.pptx
@@ -17,9 +17,16 @@
     <p:sldId id="265" r:id="rId11"/>
     <p:sldId id="266" r:id="rId12"/>
     <p:sldId id="267" r:id="rId13"/>
+    <p:sldId id="268" r:id="rId14"/>
+    <p:sldId id="269" r:id="rId15"/>
+    <p:sldId id="270" r:id="rId16"/>
+    <p:sldId id="271" r:id="rId17"/>
+    <p:sldId id="272" r:id="rId18"/>
+    <p:sldId id="273" r:id="rId19"/>
+    <p:sldId id="274" r:id="rId20"/>
   </p:sldIdLst>
   <p:notesMasterIdLst>
-    <p:notesMasterId r:id="rId14"/>
+    <p:notesMasterId r:id="rId21"/>
   </p:notesMasterIdLst>
   <p:sldSz cx="9144000" cy="5143500"/>
   <p:notesSz cx="5143500" cy="9144000"/>
@@ -801,6 +808,622 @@
             <a:fld id="{F7021451-1387-4CA6-816F-3879F97B5CBC}" type="slidenum">
               <a:rPr lang="en-US"/>
               <a:t>12</a:t>
+            </a:fld>
+            <a:endParaRPr lang="en-US"/>
+          </a:p>
+        </p:txBody>
+      </p:sp>
+    </p:spTree>
+    <p:extLst>
+      <p:ext uri="{BB962C8B-B14F-4D97-AF65-F5344CB8AC3E}">
+        <p14:creationId xmlns:p14="http://schemas.microsoft.com/office/powerpoint/2010/main" val="1024086991"/>
+      </p:ext>
+    </p:extLst>
+  </p:cSld>
+  <p:clrMapOvr>
+    <a:masterClrMapping/>
+  </p:clrMapOvr>
+</p:notes>
+</file>
+
+<file path=ppt/notesSlides/notesSlide13.xml><?xml version="1.0" encoding="utf-8"?>
+<p:notes xmlns:a="http://schemas.openxmlformats.org/drawingml/2006/main" xmlns:r="http://schemas.openxmlformats.org/officeDocument/2006/relationships" xmlns:p="http://schemas.openxmlformats.org/presentationml/2006/main">
+  <p:cSld>
+    <p:spTree>
+      <p:nvGrpSpPr>
+        <p:cNvPr id="1" name=""/>
+        <p:cNvGrpSpPr/>
+        <p:nvPr/>
+      </p:nvGrpSpPr>
+      <p:grpSpPr>
+        <a:xfrm>
+          <a:off x="0" y="0"/>
+          <a:ext cx="0" cy="0"/>
+          <a:chOff x="0" y="0"/>
+          <a:chExt cx="0" cy="0"/>
+        </a:xfrm>
+      </p:grpSpPr>
+      <p:sp>
+        <p:nvSpPr>
+          <p:cNvPr id="2" name="Slide Image Placeholder 1"/>
+          <p:cNvSpPr>
+            <a:spLocks noGrp="1" noRot="1" noChangeAspect="1"/>
+          </p:cNvSpPr>
+          <p:nvPr>
+            <p:ph type="sldImg"/>
+          </p:nvPr>
+        </p:nvSpPr>
+        <p:spPr/>
+      </p:sp>
+      <p:sp>
+        <p:nvSpPr>
+          <p:cNvPr id="3" name="Notes Placeholder 2"/>
+          <p:cNvSpPr>
+            <a:spLocks noGrp="1"/>
+          </p:cNvSpPr>
+          <p:nvPr>
+            <p:ph type="body" idx="1"/>
+          </p:nvPr>
+        </p:nvSpPr>
+        <p:spPr/>
+        <p:txBody>
+          <a:bodyPr/>
+          <a:lstStyle/>
+          <a:p>
+            <a:r>
+              <a:rPr lang="en-US" dirty="0"/>
+              <a:t/>
+            </a:r>
+            <a:endParaRPr lang="en-US" dirty="0"/>
+          </a:p>
+        </p:txBody>
+      </p:sp>
+      <p:sp>
+        <p:nvSpPr>
+          <p:cNvPr id="4" name="Slide Number Placeholder 3"/>
+          <p:cNvSpPr>
+            <a:spLocks noGrp="1"/>
+          </p:cNvSpPr>
+          <p:nvPr>
+            <p:ph type="sldNum" sz="quarter" idx="10"/>
+          </p:nvPr>
+        </p:nvSpPr>
+        <p:spPr/>
+        <p:txBody>
+          <a:bodyPr/>
+          <a:lstStyle/>
+          <a:p>
+            <a:fld id="{F7021451-1387-4CA6-816F-3879F97B5CBC}" type="slidenum">
+              <a:rPr lang="en-US"/>
+              <a:t>13</a:t>
+            </a:fld>
+            <a:endParaRPr lang="en-US"/>
+          </a:p>
+        </p:txBody>
+      </p:sp>
+    </p:spTree>
+    <p:extLst>
+      <p:ext uri="{BB962C8B-B14F-4D97-AF65-F5344CB8AC3E}">
+        <p14:creationId xmlns:p14="http://schemas.microsoft.com/office/powerpoint/2010/main" val="1024086991"/>
+      </p:ext>
+    </p:extLst>
+  </p:cSld>
+  <p:clrMapOvr>
+    <a:masterClrMapping/>
+  </p:clrMapOvr>
+</p:notes>
+</file>
+
+<file path=ppt/notesSlides/notesSlide14.xml><?xml version="1.0" encoding="utf-8"?>
+<p:notes xmlns:a="http://schemas.openxmlformats.org/drawingml/2006/main" xmlns:r="http://schemas.openxmlformats.org/officeDocument/2006/relationships" xmlns:p="http://schemas.openxmlformats.org/presentationml/2006/main">
+  <p:cSld>
+    <p:spTree>
+      <p:nvGrpSpPr>
+        <p:cNvPr id="1" name=""/>
+        <p:cNvGrpSpPr/>
+        <p:nvPr/>
+      </p:nvGrpSpPr>
+      <p:grpSpPr>
+        <a:xfrm>
+          <a:off x="0" y="0"/>
+          <a:ext cx="0" cy="0"/>
+          <a:chOff x="0" y="0"/>
+          <a:chExt cx="0" cy="0"/>
+        </a:xfrm>
+      </p:grpSpPr>
+      <p:sp>
+        <p:nvSpPr>
+          <p:cNvPr id="2" name="Slide Image Placeholder 1"/>
+          <p:cNvSpPr>
+            <a:spLocks noGrp="1" noRot="1" noChangeAspect="1"/>
+          </p:cNvSpPr>
+          <p:nvPr>
+            <p:ph type="sldImg"/>
+          </p:nvPr>
+        </p:nvSpPr>
+        <p:spPr/>
+      </p:sp>
+      <p:sp>
+        <p:nvSpPr>
+          <p:cNvPr id="3" name="Notes Placeholder 2"/>
+          <p:cNvSpPr>
+            <a:spLocks noGrp="1"/>
+          </p:cNvSpPr>
+          <p:nvPr>
+            <p:ph type="body" idx="1"/>
+          </p:nvPr>
+        </p:nvSpPr>
+        <p:spPr/>
+        <p:txBody>
+          <a:bodyPr/>
+          <a:lstStyle/>
+          <a:p>
+            <a:r>
+              <a:rPr lang="en-US" dirty="0"/>
+              <a:t/>
+            </a:r>
+            <a:endParaRPr lang="en-US" dirty="0"/>
+          </a:p>
+        </p:txBody>
+      </p:sp>
+      <p:sp>
+        <p:nvSpPr>
+          <p:cNvPr id="4" name="Slide Number Placeholder 3"/>
+          <p:cNvSpPr>
+            <a:spLocks noGrp="1"/>
+          </p:cNvSpPr>
+          <p:nvPr>
+            <p:ph type="sldNum" sz="quarter" idx="10"/>
+          </p:nvPr>
+        </p:nvSpPr>
+        <p:spPr/>
+        <p:txBody>
+          <a:bodyPr/>
+          <a:lstStyle/>
+          <a:p>
+            <a:fld id="{F7021451-1387-4CA6-816F-3879F97B5CBC}" type="slidenum">
+              <a:rPr lang="en-US"/>
+              <a:t>14</a:t>
+            </a:fld>
+            <a:endParaRPr lang="en-US"/>
+          </a:p>
+        </p:txBody>
+      </p:sp>
+    </p:spTree>
+    <p:extLst>
+      <p:ext uri="{BB962C8B-B14F-4D97-AF65-F5344CB8AC3E}">
+        <p14:creationId xmlns:p14="http://schemas.microsoft.com/office/powerpoint/2010/main" val="1024086991"/>
+      </p:ext>
+    </p:extLst>
+  </p:cSld>
+  <p:clrMapOvr>
+    <a:masterClrMapping/>
+  </p:clrMapOvr>
+</p:notes>
+</file>
+
+<file path=ppt/notesSlides/notesSlide15.xml><?xml version="1.0" encoding="utf-8"?>
+<p:notes xmlns:a="http://schemas.openxmlformats.org/drawingml/2006/main" xmlns:r="http://schemas.openxmlformats.org/officeDocument/2006/relationships" xmlns:p="http://schemas.openxmlformats.org/presentationml/2006/main">
+  <p:cSld>
+    <p:spTree>
+      <p:nvGrpSpPr>
+        <p:cNvPr id="1" name=""/>
+        <p:cNvGrpSpPr/>
+        <p:nvPr/>
+      </p:nvGrpSpPr>
+      <p:grpSpPr>
+        <a:xfrm>
+          <a:off x="0" y="0"/>
+          <a:ext cx="0" cy="0"/>
+          <a:chOff x="0" y="0"/>
+          <a:chExt cx="0" cy="0"/>
+        </a:xfrm>
+      </p:grpSpPr>
+      <p:sp>
+        <p:nvSpPr>
+          <p:cNvPr id="2" name="Slide Image Placeholder 1"/>
+          <p:cNvSpPr>
+            <a:spLocks noGrp="1" noRot="1" noChangeAspect="1"/>
+          </p:cNvSpPr>
+          <p:nvPr>
+            <p:ph type="sldImg"/>
+          </p:nvPr>
+        </p:nvSpPr>
+        <p:spPr/>
+      </p:sp>
+      <p:sp>
+        <p:nvSpPr>
+          <p:cNvPr id="3" name="Notes Placeholder 2"/>
+          <p:cNvSpPr>
+            <a:spLocks noGrp="1"/>
+          </p:cNvSpPr>
+          <p:nvPr>
+            <p:ph type="body" idx="1"/>
+          </p:nvPr>
+        </p:nvSpPr>
+        <p:spPr/>
+        <p:txBody>
+          <a:bodyPr/>
+          <a:lstStyle/>
+          <a:p>
+            <a:r>
+              <a:rPr lang="en-US" dirty="0"/>
+              <a:t/>
+            </a:r>
+            <a:endParaRPr lang="en-US" dirty="0"/>
+          </a:p>
+        </p:txBody>
+      </p:sp>
+      <p:sp>
+        <p:nvSpPr>
+          <p:cNvPr id="4" name="Slide Number Placeholder 3"/>
+          <p:cNvSpPr>
+            <a:spLocks noGrp="1"/>
+          </p:cNvSpPr>
+          <p:nvPr>
+            <p:ph type="sldNum" sz="quarter" idx="10"/>
+          </p:nvPr>
+        </p:nvSpPr>
+        <p:spPr/>
+        <p:txBody>
+          <a:bodyPr/>
+          <a:lstStyle/>
+          <a:p>
+            <a:fld id="{F7021451-1387-4CA6-816F-3879F97B5CBC}" type="slidenum">
+              <a:rPr lang="en-US"/>
+              <a:t>15</a:t>
+            </a:fld>
+            <a:endParaRPr lang="en-US"/>
+          </a:p>
+        </p:txBody>
+      </p:sp>
+    </p:spTree>
+    <p:extLst>
+      <p:ext uri="{BB962C8B-B14F-4D97-AF65-F5344CB8AC3E}">
+        <p14:creationId xmlns:p14="http://schemas.microsoft.com/office/powerpoint/2010/main" val="1024086991"/>
+      </p:ext>
+    </p:extLst>
+  </p:cSld>
+  <p:clrMapOvr>
+    <a:masterClrMapping/>
+  </p:clrMapOvr>
+</p:notes>
+</file>
+
+<file path=ppt/notesSlides/notesSlide16.xml><?xml version="1.0" encoding="utf-8"?>
+<p:notes xmlns:a="http://schemas.openxmlformats.org/drawingml/2006/main" xmlns:r="http://schemas.openxmlformats.org/officeDocument/2006/relationships" xmlns:p="http://schemas.openxmlformats.org/presentationml/2006/main">
+  <p:cSld>
+    <p:spTree>
+      <p:nvGrpSpPr>
+        <p:cNvPr id="1" name=""/>
+        <p:cNvGrpSpPr/>
+        <p:nvPr/>
+      </p:nvGrpSpPr>
+      <p:grpSpPr>
+        <a:xfrm>
+          <a:off x="0" y="0"/>
+          <a:ext cx="0" cy="0"/>
+          <a:chOff x="0" y="0"/>
+          <a:chExt cx="0" cy="0"/>
+        </a:xfrm>
+      </p:grpSpPr>
+      <p:sp>
+        <p:nvSpPr>
+          <p:cNvPr id="2" name="Slide Image Placeholder 1"/>
+          <p:cNvSpPr>
+            <a:spLocks noGrp="1" noRot="1" noChangeAspect="1"/>
+          </p:cNvSpPr>
+          <p:nvPr>
+            <p:ph type="sldImg"/>
+          </p:nvPr>
+        </p:nvSpPr>
+        <p:spPr/>
+      </p:sp>
+      <p:sp>
+        <p:nvSpPr>
+          <p:cNvPr id="3" name="Notes Placeholder 2"/>
+          <p:cNvSpPr>
+            <a:spLocks noGrp="1"/>
+          </p:cNvSpPr>
+          <p:nvPr>
+            <p:ph type="body" idx="1"/>
+          </p:nvPr>
+        </p:nvSpPr>
+        <p:spPr/>
+        <p:txBody>
+          <a:bodyPr/>
+          <a:lstStyle/>
+          <a:p>
+            <a:r>
+              <a:rPr lang="en-US" dirty="0"/>
+              <a:t/>
+            </a:r>
+            <a:endParaRPr lang="en-US" dirty="0"/>
+          </a:p>
+        </p:txBody>
+      </p:sp>
+      <p:sp>
+        <p:nvSpPr>
+          <p:cNvPr id="4" name="Slide Number Placeholder 3"/>
+          <p:cNvSpPr>
+            <a:spLocks noGrp="1"/>
+          </p:cNvSpPr>
+          <p:nvPr>
+            <p:ph type="sldNum" sz="quarter" idx="10"/>
+          </p:nvPr>
+        </p:nvSpPr>
+        <p:spPr/>
+        <p:txBody>
+          <a:bodyPr/>
+          <a:lstStyle/>
+          <a:p>
+            <a:fld id="{F7021451-1387-4CA6-816F-3879F97B5CBC}" type="slidenum">
+              <a:rPr lang="en-US"/>
+              <a:t>16</a:t>
+            </a:fld>
+            <a:endParaRPr lang="en-US"/>
+          </a:p>
+        </p:txBody>
+      </p:sp>
+    </p:spTree>
+    <p:extLst>
+      <p:ext uri="{BB962C8B-B14F-4D97-AF65-F5344CB8AC3E}">
+        <p14:creationId xmlns:p14="http://schemas.microsoft.com/office/powerpoint/2010/main" val="1024086991"/>
+      </p:ext>
+    </p:extLst>
+  </p:cSld>
+  <p:clrMapOvr>
+    <a:masterClrMapping/>
+  </p:clrMapOvr>
+</p:notes>
+</file>
+
+<file path=ppt/notesSlides/notesSlide17.xml><?xml version="1.0" encoding="utf-8"?>
+<p:notes xmlns:a="http://schemas.openxmlformats.org/drawingml/2006/main" xmlns:r="http://schemas.openxmlformats.org/officeDocument/2006/relationships" xmlns:p="http://schemas.openxmlformats.org/presentationml/2006/main">
+  <p:cSld>
+    <p:spTree>
+      <p:nvGrpSpPr>
+        <p:cNvPr id="1" name=""/>
+        <p:cNvGrpSpPr/>
+        <p:nvPr/>
+      </p:nvGrpSpPr>
+      <p:grpSpPr>
+        <a:xfrm>
+          <a:off x="0" y="0"/>
+          <a:ext cx="0" cy="0"/>
+          <a:chOff x="0" y="0"/>
+          <a:chExt cx="0" cy="0"/>
+        </a:xfrm>
+      </p:grpSpPr>
+      <p:sp>
+        <p:nvSpPr>
+          <p:cNvPr id="2" name="Slide Image Placeholder 1"/>
+          <p:cNvSpPr>
+            <a:spLocks noGrp="1" noRot="1" noChangeAspect="1"/>
+          </p:cNvSpPr>
+          <p:nvPr>
+            <p:ph type="sldImg"/>
+          </p:nvPr>
+        </p:nvSpPr>
+        <p:spPr/>
+      </p:sp>
+      <p:sp>
+        <p:nvSpPr>
+          <p:cNvPr id="3" name="Notes Placeholder 2"/>
+          <p:cNvSpPr>
+            <a:spLocks noGrp="1"/>
+          </p:cNvSpPr>
+          <p:nvPr>
+            <p:ph type="body" idx="1"/>
+          </p:nvPr>
+        </p:nvSpPr>
+        <p:spPr/>
+        <p:txBody>
+          <a:bodyPr/>
+          <a:lstStyle/>
+          <a:p>
+            <a:r>
+              <a:rPr lang="en-US" dirty="0"/>
+              <a:t/>
+            </a:r>
+            <a:endParaRPr lang="en-US" dirty="0"/>
+          </a:p>
+        </p:txBody>
+      </p:sp>
+      <p:sp>
+        <p:nvSpPr>
+          <p:cNvPr id="4" name="Slide Number Placeholder 3"/>
+          <p:cNvSpPr>
+            <a:spLocks noGrp="1"/>
+          </p:cNvSpPr>
+          <p:nvPr>
+            <p:ph type="sldNum" sz="quarter" idx="10"/>
+          </p:nvPr>
+        </p:nvSpPr>
+        <p:spPr/>
+        <p:txBody>
+          <a:bodyPr/>
+          <a:lstStyle/>
+          <a:p>
+            <a:fld id="{F7021451-1387-4CA6-816F-3879F97B5CBC}" type="slidenum">
+              <a:rPr lang="en-US"/>
+              <a:t>17</a:t>
+            </a:fld>
+            <a:endParaRPr lang="en-US"/>
+          </a:p>
+        </p:txBody>
+      </p:sp>
+    </p:spTree>
+    <p:extLst>
+      <p:ext uri="{BB962C8B-B14F-4D97-AF65-F5344CB8AC3E}">
+        <p14:creationId xmlns:p14="http://schemas.microsoft.com/office/powerpoint/2010/main" val="1024086991"/>
+      </p:ext>
+    </p:extLst>
+  </p:cSld>
+  <p:clrMapOvr>
+    <a:masterClrMapping/>
+  </p:clrMapOvr>
+</p:notes>
+</file>
+
+<file path=ppt/notesSlides/notesSlide18.xml><?xml version="1.0" encoding="utf-8"?>
+<p:notes xmlns:a="http://schemas.openxmlformats.org/drawingml/2006/main" xmlns:r="http://schemas.openxmlformats.org/officeDocument/2006/relationships" xmlns:p="http://schemas.openxmlformats.org/presentationml/2006/main">
+  <p:cSld>
+    <p:spTree>
+      <p:nvGrpSpPr>
+        <p:cNvPr id="1" name=""/>
+        <p:cNvGrpSpPr/>
+        <p:nvPr/>
+      </p:nvGrpSpPr>
+      <p:grpSpPr>
+        <a:xfrm>
+          <a:off x="0" y="0"/>
+          <a:ext cx="0" cy="0"/>
+          <a:chOff x="0" y="0"/>
+          <a:chExt cx="0" cy="0"/>
+        </a:xfrm>
+      </p:grpSpPr>
+      <p:sp>
+        <p:nvSpPr>
+          <p:cNvPr id="2" name="Slide Image Placeholder 1"/>
+          <p:cNvSpPr>
+            <a:spLocks noGrp="1" noRot="1" noChangeAspect="1"/>
+          </p:cNvSpPr>
+          <p:nvPr>
+            <p:ph type="sldImg"/>
+          </p:nvPr>
+        </p:nvSpPr>
+        <p:spPr/>
+      </p:sp>
+      <p:sp>
+        <p:nvSpPr>
+          <p:cNvPr id="3" name="Notes Placeholder 2"/>
+          <p:cNvSpPr>
+            <a:spLocks noGrp="1"/>
+          </p:cNvSpPr>
+          <p:nvPr>
+            <p:ph type="body" idx="1"/>
+          </p:nvPr>
+        </p:nvSpPr>
+        <p:spPr/>
+        <p:txBody>
+          <a:bodyPr/>
+          <a:lstStyle/>
+          <a:p>
+            <a:r>
+              <a:rPr lang="en-US" dirty="0"/>
+              <a:t/>
+            </a:r>
+            <a:endParaRPr lang="en-US" dirty="0"/>
+          </a:p>
+        </p:txBody>
+      </p:sp>
+      <p:sp>
+        <p:nvSpPr>
+          <p:cNvPr id="4" name="Slide Number Placeholder 3"/>
+          <p:cNvSpPr>
+            <a:spLocks noGrp="1"/>
+          </p:cNvSpPr>
+          <p:nvPr>
+            <p:ph type="sldNum" sz="quarter" idx="10"/>
+          </p:nvPr>
+        </p:nvSpPr>
+        <p:spPr/>
+        <p:txBody>
+          <a:bodyPr/>
+          <a:lstStyle/>
+          <a:p>
+            <a:fld id="{F7021451-1387-4CA6-816F-3879F97B5CBC}" type="slidenum">
+              <a:rPr lang="en-US"/>
+              <a:t>18</a:t>
+            </a:fld>
+            <a:endParaRPr lang="en-US"/>
+          </a:p>
+        </p:txBody>
+      </p:sp>
+    </p:spTree>
+    <p:extLst>
+      <p:ext uri="{BB962C8B-B14F-4D97-AF65-F5344CB8AC3E}">
+        <p14:creationId xmlns:p14="http://schemas.microsoft.com/office/powerpoint/2010/main" val="1024086991"/>
+      </p:ext>
+    </p:extLst>
+  </p:cSld>
+  <p:clrMapOvr>
+    <a:masterClrMapping/>
+  </p:clrMapOvr>
+</p:notes>
+</file>
+
+<file path=ppt/notesSlides/notesSlide19.xml><?xml version="1.0" encoding="utf-8"?>
+<p:notes xmlns:a="http://schemas.openxmlformats.org/drawingml/2006/main" xmlns:r="http://schemas.openxmlformats.org/officeDocument/2006/relationships" xmlns:p="http://schemas.openxmlformats.org/presentationml/2006/main">
+  <p:cSld>
+    <p:spTree>
+      <p:nvGrpSpPr>
+        <p:cNvPr id="1" name=""/>
+        <p:cNvGrpSpPr/>
+        <p:nvPr/>
+      </p:nvGrpSpPr>
+      <p:grpSpPr>
+        <a:xfrm>
+          <a:off x="0" y="0"/>
+          <a:ext cx="0" cy="0"/>
+          <a:chOff x="0" y="0"/>
+          <a:chExt cx="0" cy="0"/>
+        </a:xfrm>
+      </p:grpSpPr>
+      <p:sp>
+        <p:nvSpPr>
+          <p:cNvPr id="2" name="Slide Image Placeholder 1"/>
+          <p:cNvSpPr>
+            <a:spLocks noGrp="1" noRot="1" noChangeAspect="1"/>
+          </p:cNvSpPr>
+          <p:nvPr>
+            <p:ph type="sldImg"/>
+          </p:nvPr>
+        </p:nvSpPr>
+        <p:spPr/>
+      </p:sp>
+      <p:sp>
+        <p:nvSpPr>
+          <p:cNvPr id="3" name="Notes Placeholder 2"/>
+          <p:cNvSpPr>
+            <a:spLocks noGrp="1"/>
+          </p:cNvSpPr>
+          <p:nvPr>
+            <p:ph type="body" idx="1"/>
+          </p:nvPr>
+        </p:nvSpPr>
+        <p:spPr/>
+        <p:txBody>
+          <a:bodyPr/>
+          <a:lstStyle/>
+          <a:p>
+            <a:r>
+              <a:rPr lang="en-US" dirty="0"/>
+              <a:t/>
+            </a:r>
+            <a:endParaRPr lang="en-US" dirty="0"/>
+          </a:p>
+        </p:txBody>
+      </p:sp>
+      <p:sp>
+        <p:nvSpPr>
+          <p:cNvPr id="4" name="Slide Number Placeholder 3"/>
+          <p:cNvSpPr>
+            <a:spLocks noGrp="1"/>
+          </p:cNvSpPr>
+          <p:nvPr>
+            <p:ph type="sldNum" sz="quarter" idx="10"/>
+          </p:nvPr>
+        </p:nvSpPr>
+        <p:spPr/>
+        <p:txBody>
+          <a:bodyPr/>
+          <a:lstStyle/>
+          <a:p>
+            <a:fld id="{F7021451-1387-4CA6-816F-3879F97B5CBC}" type="slidenum">
+              <a:rPr lang="en-US"/>
+              <a:t>19</a:t>
             </a:fld>
             <a:endParaRPr lang="en-US"/>
           </a:p>
@@ -2100,148 +2723,6 @@
         </p:nvSpPr>
         <p:spPr>
           <a:xfrm>
-            <a:off x="406301" y="1223963"/>
-            <a:ext cx="8498026" cy="274290"/>
-          </a:xfrm>
-          <a:prstGeom prst="rect">
-            <a:avLst/>
-          </a:prstGeom>
-          <a:noFill/>
-          <a:ln/>
-        </p:spPr>
-        <p:txBody>
-          <a:bodyPr wrap="square" lIns="0" tIns="0" rIns="0" bIns="0" rtlCol="0" anchor="t"/>
-          <a:lstStyle/>
-          <a:p>
-            <a:pPr algn="l" indent="0" marL="0">
-              <a:lnSpc>
-                <a:spcPts val="2160"/>
-              </a:lnSpc>
-              <a:spcBef>
-                <a:spcPts val="600"/>
-              </a:spcBef>
-              <a:spcAft>
-                <a:spcPts val="800"/>
-              </a:spcAft>
-              <a:buNone/>
-            </a:pPr>
-            <a:r>
-              <a:rPr lang="en-US" sz="1800" b="1" dirty="0">
-                <a:solidFill>
-                  <a:srgbClr val="FE4447"/>
-                </a:solidFill>
-                <a:latin typeface="Georgia" pitchFamily="34" charset="0"/>
-                <a:ea typeface="Georgia" pitchFamily="34" charset="-122"/>
-                <a:cs typeface="Georgia" pitchFamily="34" charset="-120"/>
-              </a:rPr>
-              <a:t>Learning objective</a:t>
-            </a:r>
-            <a:endParaRPr lang="en-US" sz="1800" dirty="0"/>
-          </a:p>
-        </p:txBody>
-      </p:sp>
-      <p:sp>
-        <p:nvSpPr>
-          <p:cNvPr id="6" name="Text 4"/>
-          <p:cNvSpPr/>
-          <p:nvPr/>
-        </p:nvSpPr>
-        <p:spPr>
-          <a:xfrm>
-            <a:off x="406301" y="1637854"/>
-            <a:ext cx="8498026" cy="426541"/>
-          </a:xfrm>
-          <a:prstGeom prst="rect">
-            <a:avLst/>
-          </a:prstGeom>
-          <a:noFill/>
-          <a:ln/>
-        </p:spPr>
-        <p:txBody>
-          <a:bodyPr wrap="square" lIns="0" tIns="0" rIns="0" bIns="0" rtlCol="0" anchor="t"/>
-          <a:lstStyle/>
-          <a:p>
-            <a:pPr algn="l" indent="0" marL="0">
-              <a:lnSpc>
-                <a:spcPts val="1680"/>
-              </a:lnSpc>
-              <a:spcBef>
-                <a:spcPts val="300"/>
-              </a:spcBef>
-              <a:spcAft>
-                <a:spcPts val="300"/>
-              </a:spcAft>
-              <a:buNone/>
-            </a:pPr>
-            <a:r>
-              <a:rPr lang="en-US" sz="1200" dirty="0">
-                <a:solidFill>
-                  <a:srgbClr val="1C2833"/>
-                </a:solidFill>
-                <a:latin typeface="Arial" pitchFamily="34" charset="0"/>
-                <a:ea typeface="Arial" pitchFamily="34" charset="-122"/>
-                <a:cs typeface="Arial" pitchFamily="34" charset="-120"/>
-              </a:rPr>
-              <a:t>By the end of this lesson, students will find the complement (</a:t>
-            </a:r>
-            <a:pPr algn="l" indent="0" marL="0">
-              <a:lnSpc>
-                <a:spcPts val="1680"/>
-              </a:lnSpc>
-              <a:spcBef>
-                <a:spcPts val="300"/>
-              </a:spcBef>
-              <a:spcAft>
-                <a:spcPts val="300"/>
-              </a:spcAft>
-              <a:buNone/>
-            </a:pPr>
-            <a:r>
-              <a:rPr lang="en-US" sz="1200" i="1" dirty="0">
-                <a:solidFill>
-                  <a:srgbClr val="1C2833"/>
-                </a:solidFill>
-                <a:latin typeface="Arial" pitchFamily="34" charset="0"/>
-                <a:ea typeface="Arial" pitchFamily="34" charset="-122"/>
-                <a:cs typeface="Arial" pitchFamily="34" charset="-120"/>
-              </a:rPr>
-              <a:t>pūraka</a:t>
-            </a:r>
-            <a:pPr algn="l" indent="0" marL="0">
-              <a:lnSpc>
-                <a:spcPts val="1680"/>
-              </a:lnSpc>
-              <a:spcBef>
-                <a:spcPts val="300"/>
-              </a:spcBef>
-              <a:spcAft>
-                <a:spcPts val="300"/>
-              </a:spcAft>
-              <a:buNone/>
-            </a:pPr>
-            <a:r>
-              <a:rPr lang="en-US" sz="1200" dirty="0">
-                <a:solidFill>
-                  <a:srgbClr val="1C2833"/>
-                </a:solidFill>
-                <a:latin typeface="Arial" pitchFamily="34" charset="0"/>
-                <a:ea typeface="Arial" pitchFamily="34" charset="-122"/>
-                <a:cs typeface="Arial" pitchFamily="34" charset="-120"/>
-              </a:rPr>
-              <a:t>) of any 2-digit number to 100 in under 3 seconds, using the Nikhilam rule applied to two digits.</a:t>
-            </a:r>
-            <a:endParaRPr lang="en-US" sz="1200" dirty="0"/>
-          </a:p>
-        </p:txBody>
-      </p:sp>
-      <p:sp>
-        <p:nvSpPr>
-          <p:cNvPr id="7" name="Text 5"/>
-          <p:cNvSpPr/>
-          <p:nvPr/>
-        </p:nvSpPr>
-        <p:spPr>
-          <a:xfrm>
             <a:off x="406301" y="4434929"/>
             <a:ext cx="8498026" cy="213271"/>
           </a:xfrm>
@@ -2386,7 +2867,7 @@
                 <a:ea typeface="Georgia" pitchFamily="34" charset="-122"/>
                 <a:cs typeface="Georgia" pitchFamily="34" charset="-120"/>
               </a:rPr>
-              <a:t>Differentiation</a:t>
+              <a:t>Core (15 min) — The pattern (cont.)</a:t>
             </a:r>
             <a:endParaRPr lang="en-US" sz="1800" dirty="0"/>
           </a:p>
@@ -2401,7 +2882,7 @@
         <p:spPr>
           <a:xfrm>
             <a:off x="634901" y="883593"/>
-            <a:ext cx="8102798" cy="731341"/>
+            <a:ext cx="8102798" cy="525661"/>
           </a:xfrm>
           <a:prstGeom prst="rect">
             <a:avLst/>
@@ -2424,6 +2905,66 @@
               <a:buChar char="•"/>
             </a:pPr>
             <a:r>
+              <a:rPr lang="en-US" sz="1200" dirty="0">
+                <a:solidFill>
+                  <a:srgbClr val="1C2833"/>
+                </a:solidFill>
+                <a:latin typeface="Arial" pitchFamily="34" charset="0"/>
+                <a:ea typeface="Arial" pitchFamily="34" charset="-122"/>
+                <a:cs typeface="Arial" pitchFamily="34" charset="-120"/>
+              </a:rPr>
+              <a:t>If we subtract each digit </a:t>
+            </a:r>
+            <a:pPr algn="l" indent="0" marL="0">
+              <a:lnSpc>
+                <a:spcPts val="1620"/>
+              </a:lnSpc>
+              <a:spcAft>
+                <a:spcPts val="300"/>
+              </a:spcAft>
+              <a:buNone/>
+            </a:pPr>
+            <a:r>
+              <a:rPr lang="en-US" sz="1200" i="1" dirty="0">
+                <a:solidFill>
+                  <a:srgbClr val="1C2833"/>
+                </a:solidFill>
+                <a:latin typeface="Arial" pitchFamily="34" charset="0"/>
+                <a:ea typeface="Arial" pitchFamily="34" charset="-122"/>
+                <a:cs typeface="Arial" pitchFamily="34" charset="-120"/>
+              </a:rPr>
+              <a:t>from 9</a:t>
+            </a:r>
+            <a:pPr algn="l" indent="0" marL="0">
+              <a:lnSpc>
+                <a:spcPts val="1620"/>
+              </a:lnSpc>
+              <a:spcAft>
+                <a:spcPts val="300"/>
+              </a:spcAft>
+              <a:buNone/>
+            </a:pPr>
+            <a:r>
+              <a:rPr lang="en-US" sz="1200" dirty="0">
+                <a:solidFill>
+                  <a:srgbClr val="1C2833"/>
+                </a:solidFill>
+                <a:latin typeface="Arial" pitchFamily="34" charset="0"/>
+                <a:ea typeface="Arial" pitchFamily="34" charset="-122"/>
+                <a:cs typeface="Arial" pitchFamily="34" charset="-120"/>
+              </a:rPr>
+              <a:t> we get the complement to </a:t>
+            </a:r>
+            <a:pPr algn="l" indent="0" marL="0">
+              <a:lnSpc>
+                <a:spcPts val="1620"/>
+              </a:lnSpc>
+              <a:spcAft>
+                <a:spcPts val="300"/>
+              </a:spcAft>
+              <a:buNone/>
+            </a:pPr>
+            <a:r>
               <a:rPr lang="en-US" sz="1200" b="1" dirty="0">
                 <a:solidFill>
                   <a:srgbClr val="1C2833"/>
@@ -2432,7 +2973,7 @@
                 <a:ea typeface="Arial" pitchFamily="34" charset="-122"/>
                 <a:cs typeface="Arial" pitchFamily="34" charset="-120"/>
               </a:rPr>
-              <a:t>Tier up:</a:t>
+              <a:t>99</a:t>
             </a:r>
             <a:pPr algn="l" indent="0" marL="0">
               <a:lnSpc>
@@ -2452,7 +2993,7 @@
                 <a:ea typeface="Arial" pitchFamily="34" charset="-122"/>
                 <a:cs typeface="Arial" pitchFamily="34" charset="-120"/>
               </a:rPr>
-              <a:t> Try complements to 200, 300, 500. The rule modifies — find complement to 100, then adjust. (Tier-up students should be able to articulate that adjustment by the end of class.)</a:t>
+              <a:t>, not 100.</a:t>
             </a:r>
             <a:endParaRPr lang="en-US" sz="1200" dirty="0"/>
           </a:p>
@@ -2468,24 +3009,167 @@
               <a:buChar char="•"/>
             </a:pPr>
             <a:r>
-              <a:rPr lang="en-US" sz="1200" b="1" dirty="0">
-                <a:solidFill>
-                  <a:srgbClr val="1C2833"/>
-                </a:solidFill>
-                <a:latin typeface="Arial" pitchFamily="34" charset="0"/>
-                <a:ea typeface="Arial" pitchFamily="34" charset="-122"/>
-                <a:cs typeface="Arial" pitchFamily="34" charset="-120"/>
-              </a:rPr>
-              <a:t>Tier down:</a:t>
-            </a:r>
-            <a:pPr algn="l" indent="0" marL="0">
+              <a:rPr lang="en-US" sz="1200" dirty="0">
+                <a:solidFill>
+                  <a:srgbClr val="1C2833"/>
+                </a:solidFill>
+                <a:latin typeface="Arial" pitchFamily="34" charset="0"/>
+                <a:ea typeface="Arial" pitchFamily="34" charset="-122"/>
+                <a:cs typeface="Arial" pitchFamily="34" charset="-120"/>
+              </a:rPr>
+              <a:t>The "+1" needed to bridge 99 → 100 is exactly what "the last from 10" provides:</a:t>
+            </a:r>
+            <a:endParaRPr lang="en-US" sz="1200" dirty="0"/>
+          </a:p>
+        </p:txBody>
+      </p:sp>
+      <p:sp>
+        <p:nvSpPr>
+          <p:cNvPr id="5" name="Text 3"/>
+          <p:cNvSpPr/>
+          <p:nvPr/>
+        </p:nvSpPr>
+        <p:spPr>
+          <a:xfrm>
+            <a:off x="406301" y="1498104"/>
+            <a:ext cx="8498026" cy="222796"/>
+          </a:xfrm>
+          <a:prstGeom prst="rect">
+            <a:avLst/>
+          </a:prstGeom>
+          <a:noFill/>
+          <a:ln/>
+        </p:spPr>
+        <p:txBody>
+          <a:bodyPr wrap="square" lIns="0" tIns="0" rIns="0" bIns="0" rtlCol="0" anchor="t"/>
+          <a:lstStyle/>
+          <a:p>
+            <a:pPr algn="l" indent="0" marL="0">
+              <a:lnSpc>
+                <a:spcPts val="1680"/>
+              </a:lnSpc>
+              <a:spcBef>
+                <a:spcPts val="300"/>
+              </a:spcBef>
+              <a:spcAft>
+                <a:spcPts val="300"/>
+              </a:spcAft>
+              <a:buNone/>
+            </a:pPr>
+            <a:r>
+              <a:rPr lang="en-US" sz="1200" dirty="0">
+                <a:solidFill>
+                  <a:srgbClr val="1C2833"/>
+                </a:solidFill>
+                <a:latin typeface="Arial" pitchFamily="34" charset="0"/>
+                <a:ea typeface="Arial" pitchFamily="34" charset="-122"/>
+                <a:cs typeface="Arial" pitchFamily="34" charset="-120"/>
+              </a:rPr>
+              <a:t>10 − x</a:t>
+            </a:r>
+            <a:pPr algn="l" indent="0" marL="0">
+              <a:lnSpc>
+                <a:spcPts val="1680"/>
+              </a:lnSpc>
+              <a:spcBef>
+                <a:spcPts val="300"/>
+              </a:spcBef>
+              <a:spcAft>
+                <a:spcPts val="300"/>
+              </a:spcAft>
+              <a:buNone/>
+            </a:pPr>
+            <a:r>
+              <a:rPr lang="en-US" sz="1200" dirty="0">
+                <a:solidFill>
+                  <a:srgbClr val="1C2833"/>
+                </a:solidFill>
+                <a:latin typeface="Arial" pitchFamily="34" charset="0"/>
+                <a:ea typeface="Arial" pitchFamily="34" charset="-122"/>
+                <a:cs typeface="Arial" pitchFamily="34" charset="-120"/>
+              </a:rPr>
+              <a:t> is the same as </a:t>
+            </a:r>
+            <a:pPr algn="l" indent="0" marL="0">
+              <a:lnSpc>
+                <a:spcPts val="1680"/>
+              </a:lnSpc>
+              <a:spcBef>
+                <a:spcPts val="300"/>
+              </a:spcBef>
+              <a:spcAft>
+                <a:spcPts val="300"/>
+              </a:spcAft>
+              <a:buNone/>
+            </a:pPr>
+            <a:r>
+              <a:rPr lang="en-US" sz="1200" dirty="0">
+                <a:solidFill>
+                  <a:srgbClr val="1C2833"/>
+                </a:solidFill>
+                <a:latin typeface="Arial" pitchFamily="34" charset="0"/>
+                <a:ea typeface="Arial" pitchFamily="34" charset="-122"/>
+                <a:cs typeface="Arial" pitchFamily="34" charset="-120"/>
+              </a:rPr>
+              <a:t>(9 − x) + 1</a:t>
+            </a:r>
+            <a:pPr algn="l" indent="0" marL="0">
+              <a:lnSpc>
+                <a:spcPts val="1680"/>
+              </a:lnSpc>
+              <a:spcBef>
+                <a:spcPts val="300"/>
+              </a:spcBef>
+              <a:spcAft>
+                <a:spcPts val="300"/>
+              </a:spcAft>
+              <a:buNone/>
+            </a:pPr>
+            <a:r>
+              <a:rPr lang="en-US" sz="1200" dirty="0">
+                <a:solidFill>
+                  <a:srgbClr val="1C2833"/>
+                </a:solidFill>
+                <a:latin typeface="Arial" pitchFamily="34" charset="0"/>
+                <a:ea typeface="Arial" pitchFamily="34" charset="-122"/>
+                <a:cs typeface="Arial" pitchFamily="34" charset="-120"/>
+              </a:rPr>
+              <a:t>.</a:t>
+            </a:r>
+            <a:endParaRPr lang="en-US" sz="1200" dirty="0"/>
+          </a:p>
+        </p:txBody>
+      </p:sp>
+      <p:sp>
+        <p:nvSpPr>
+          <p:cNvPr id="6" name="Text 4"/>
+          <p:cNvSpPr/>
+          <p:nvPr/>
+        </p:nvSpPr>
+        <p:spPr>
+          <a:xfrm>
+            <a:off x="634901" y="1809750"/>
+            <a:ext cx="8102798" cy="281880"/>
+          </a:xfrm>
+          <a:prstGeom prst="rect">
+            <a:avLst/>
+          </a:prstGeom>
+          <a:noFill/>
+          <a:ln/>
+        </p:spPr>
+        <p:txBody>
+          <a:bodyPr wrap="square" lIns="0" tIns="0" rIns="0" bIns="0" rtlCol="0" anchor="t"/>
+          <a:lstStyle/>
+          <a:p>
+            <a:pPr algn="l" marL="342900" indent="-342900">
               <a:lnSpc>
                 <a:spcPts val="1620"/>
               </a:lnSpc>
               <a:spcAft>
                 <a:spcPts val="300"/>
               </a:spcAft>
-              <a:buNone/>
+              <a:buSzPct val="100000"/>
+              <a:buChar char="•"/>
             </a:pPr>
             <a:r>
               <a:rPr lang="en-US" sz="1200" dirty="0">
@@ -2496,7 +3180,7 @@
                 <a:ea typeface="Arial" pitchFamily="34" charset="-122"/>
                 <a:cs typeface="Arial" pitchFamily="34" charset="-120"/>
               </a:rPr>
-              <a:t> Use the rule only when both digits of the number are non-zero. Trailing zeros will be drilled on Day 3.</a:t>
+              <a:t>That's the whole trick. The last digit absorbs the "+1." Every other digit just goes "from 9."</a:t>
             </a:r>
             <a:endParaRPr lang="en-US" sz="1200" dirty="0"/>
           </a:p>
@@ -2504,7 +3188,7 @@
       </p:sp>
       <p:sp>
         <p:nvSpPr>
-          <p:cNvPr id="5" name="Text 3"/>
+          <p:cNvPr id="7" name="Text 5"/>
           <p:cNvSpPr/>
           <p:nvPr/>
         </p:nvSpPr>
@@ -2654,7 +3338,7 @@
                 <a:ea typeface="Georgia" pitchFamily="34" charset="-122"/>
                 <a:cs typeface="Georgia" pitchFamily="34" charset="-120"/>
               </a:rPr>
-              <a:t>Teacher notes</a:t>
+              <a:t>Core (15 min) — The pattern (cont.)</a:t>
             </a:r>
             <a:endParaRPr lang="en-US" sz="1800" dirty="0"/>
           </a:p>
@@ -2668,8 +3352,8 @@
         </p:nvSpPr>
         <p:spPr>
           <a:xfrm>
-            <a:off x="406301" y="870942"/>
-            <a:ext cx="8498026" cy="1289149"/>
+            <a:off x="634901" y="883593"/>
+            <a:ext cx="8102798" cy="281880"/>
           </a:xfrm>
           <a:prstGeom prst="rect">
             <a:avLst/>
@@ -2681,6 +3365,52 @@
           <a:bodyPr wrap="square" lIns="0" tIns="0" rIns="0" bIns="0" rtlCol="0" anchor="t"/>
           <a:lstStyle/>
           <a:p>
+            <a:pPr algn="l" marL="342900" indent="-342900">
+              <a:lnSpc>
+                <a:spcPts val="1620"/>
+              </a:lnSpc>
+              <a:spcAft>
+                <a:spcPts val="300"/>
+              </a:spcAft>
+              <a:buSzPct val="100000"/>
+              <a:buChar char="•"/>
+            </a:pPr>
+            <a:r>
+              <a:rPr lang="en-US" sz="1200" b="1" dirty="0">
+                <a:solidFill>
+                  <a:srgbClr val="1C2833"/>
+                </a:solidFill>
+                <a:latin typeface="Arial" pitchFamily="34" charset="0"/>
+                <a:ea typeface="Arial" pitchFamily="34" charset="-122"/>
+                <a:cs typeface="Arial" pitchFamily="34" charset="-120"/>
+              </a:rPr>
+              <a:t>Demo 4 more, quickly, with the class chanting along:</a:t>
+            </a:r>
+            <a:endParaRPr lang="en-US" sz="1200" dirty="0"/>
+          </a:p>
+        </p:txBody>
+      </p:sp>
+      <p:sp>
+        <p:nvSpPr>
+          <p:cNvPr id="5" name="Text 3"/>
+          <p:cNvSpPr/>
+          <p:nvPr/>
+        </p:nvSpPr>
+        <p:spPr>
+          <a:xfrm>
+            <a:off x="406301" y="1254323"/>
+            <a:ext cx="8498026" cy="213271"/>
+          </a:xfrm>
+          <a:prstGeom prst="rect">
+            <a:avLst/>
+          </a:prstGeom>
+          <a:noFill/>
+          <a:ln/>
+        </p:spPr>
+        <p:txBody>
+          <a:bodyPr wrap="square" lIns="0" tIns="0" rIns="0" bIns="0" rtlCol="0" anchor="t"/>
+          <a:lstStyle/>
+          <a:p>
             <a:pPr algn="l" indent="0" marL="0">
               <a:lnSpc>
                 <a:spcPts val="1680"/>
@@ -2694,6 +3424,72 @@
               <a:buNone/>
             </a:pPr>
             <a:r>
+              <a:rPr lang="en-US" sz="1200" i="1" dirty="0">
+                <a:solidFill>
+                  <a:srgbClr val="1C2833"/>
+                </a:solidFill>
+                <a:latin typeface="Arial" pitchFamily="34" charset="0"/>
+                <a:ea typeface="Arial" pitchFamily="34" charset="-122"/>
+                <a:cs typeface="Arial" pitchFamily="34" charset="-120"/>
+              </a:rPr>
+              <a:t>Each row: Number · First digit · Last digit · Complement · Check.</a:t>
+            </a:r>
+            <a:endParaRPr lang="en-US" sz="1200" dirty="0"/>
+          </a:p>
+        </p:txBody>
+      </p:sp>
+      <p:sp>
+        <p:nvSpPr>
+          <p:cNvPr id="6" name="Text 4"/>
+          <p:cNvSpPr/>
+          <p:nvPr/>
+        </p:nvSpPr>
+        <p:spPr>
+          <a:xfrm>
+            <a:off x="634901" y="1556445"/>
+            <a:ext cx="8102798" cy="1013222"/>
+          </a:xfrm>
+          <a:prstGeom prst="rect">
+            <a:avLst/>
+          </a:prstGeom>
+          <a:noFill/>
+          <a:ln/>
+        </p:spPr>
+        <p:txBody>
+          <a:bodyPr wrap="square" lIns="0" tIns="0" rIns="0" bIns="0" rtlCol="0" anchor="t"/>
+          <a:lstStyle/>
+          <a:p>
+            <a:pPr algn="l" marL="342900" indent="-342900">
+              <a:lnSpc>
+                <a:spcPts val="1620"/>
+              </a:lnSpc>
+              <a:spcAft>
+                <a:spcPts val="300"/>
+              </a:spcAft>
+              <a:buSzPct val="100000"/>
+              <a:buChar char="•"/>
+            </a:pPr>
+            <a:r>
+              <a:rPr lang="en-US" sz="1200" b="1" dirty="0">
+                <a:solidFill>
+                  <a:srgbClr val="1C2833"/>
+                </a:solidFill>
+                <a:latin typeface="Arial" pitchFamily="34" charset="0"/>
+                <a:ea typeface="Arial" pitchFamily="34" charset="-122"/>
+                <a:cs typeface="Arial" pitchFamily="34" charset="-120"/>
+              </a:rPr>
+              <a:t>41</a:t>
+            </a:r>
+            <a:pPr algn="l" indent="0" marL="0">
+              <a:lnSpc>
+                <a:spcPts val="1620"/>
+              </a:lnSpc>
+              <a:spcAft>
+                <a:spcPts val="300"/>
+              </a:spcAft>
+              <a:buNone/>
+            </a:pPr>
+            <a:r>
               <a:rPr lang="en-US" sz="1200" dirty="0">
                 <a:solidFill>
                   <a:srgbClr val="1C2833"/>
@@ -2702,15 +3498,32 @@
                 <a:ea typeface="Arial" pitchFamily="34" charset="-122"/>
                 <a:cs typeface="Arial" pitchFamily="34" charset="-120"/>
               </a:rPr>
-              <a:t>– Most common error today: 9 − 0 = 9 (correct) but 10 − 0 = 10 (cannot be a digit). Students will write </a:t>
-            </a:r>
-            <a:pPr algn="l" indent="0" marL="0">
-              <a:lnSpc>
-                <a:spcPts val="1680"/>
-              </a:lnSpc>
-              <a:spcBef>
-                <a:spcPts val="300"/>
-              </a:spcBef>
+              <a:t> — 9 − 4 = 5 · 10 − 1 = 9 · </a:t>
+            </a:r>
+            <a:pPr algn="l" indent="0" marL="0">
+              <a:lnSpc>
+                <a:spcPts val="1620"/>
+              </a:lnSpc>
+              <a:spcAft>
+                <a:spcPts val="300"/>
+              </a:spcAft>
+              <a:buNone/>
+            </a:pPr>
+            <a:r>
+              <a:rPr lang="en-US" sz="1200" b="1" dirty="0">
+                <a:solidFill>
+                  <a:srgbClr val="1C2833"/>
+                </a:solidFill>
+                <a:latin typeface="Arial" pitchFamily="34" charset="0"/>
+                <a:ea typeface="Arial" pitchFamily="34" charset="-122"/>
+                <a:cs typeface="Arial" pitchFamily="34" charset="-120"/>
+              </a:rPr>
+              <a:t>59</a:t>
+            </a:r>
+            <a:pPr algn="l" indent="0" marL="0">
+              <a:lnSpc>
+                <a:spcPts val="1620"/>
+              </a:lnSpc>
               <a:spcAft>
                 <a:spcPts val="300"/>
               </a:spcAft>
@@ -2725,15 +3538,36 @@
                 <a:ea typeface="Arial" pitchFamily="34" charset="-122"/>
                 <a:cs typeface="Arial" pitchFamily="34" charset="-120"/>
               </a:rPr>
-              <a:t>0</a:t>
-            </a:r>
-            <a:pPr algn="l" indent="0" marL="0">
-              <a:lnSpc>
-                <a:spcPts val="1680"/>
-              </a:lnSpc>
-              <a:spcBef>
-                <a:spcPts val="300"/>
-              </a:spcBef>
+              <a:t> · 41 + 59 = 100 ✓</a:t>
+            </a:r>
+            <a:endParaRPr lang="en-US" sz="1200" dirty="0"/>
+          </a:p>
+          <a:p>
+            <a:pPr algn="l" marL="342900" indent="-342900">
+              <a:lnSpc>
+                <a:spcPts val="1620"/>
+              </a:lnSpc>
+              <a:spcAft>
+                <a:spcPts val="300"/>
+              </a:spcAft>
+              <a:buSzPct val="100000"/>
+              <a:buChar char="•"/>
+            </a:pPr>
+            <a:r>
+              <a:rPr lang="en-US" sz="1200" b="1" dirty="0">
+                <a:solidFill>
+                  <a:srgbClr val="1C2833"/>
+                </a:solidFill>
+                <a:latin typeface="Arial" pitchFamily="34" charset="0"/>
+                <a:ea typeface="Arial" pitchFamily="34" charset="-122"/>
+                <a:cs typeface="Arial" pitchFamily="34" charset="-120"/>
+              </a:rPr>
+              <a:t>28</a:t>
+            </a:r>
+            <a:pPr algn="l" indent="0" marL="0">
+              <a:lnSpc>
+                <a:spcPts val="1620"/>
+              </a:lnSpc>
               <a:spcAft>
                 <a:spcPts val="300"/>
               </a:spcAft>
@@ -2748,38 +3582,32 @@
                 <a:ea typeface="Arial" pitchFamily="34" charset="-122"/>
                 <a:cs typeface="Arial" pitchFamily="34" charset="-120"/>
               </a:rPr>
-              <a:t> and lose 10. Reinforce: if the last digit is 0, the complement's last digit is also 0, and the "10" gets absorbed into the next column. Or: just note that the rule cleanly handles non-zero last digits; trailing zeros are a quick edge-case. – Many students try to do this in their head WITHOUT going digit-by-digit. That's fine if they get the right answer — but make sure they can </a:t>
-            </a:r>
-            <a:pPr algn="l" indent="0" marL="0">
-              <a:lnSpc>
-                <a:spcPts val="1680"/>
-              </a:lnSpc>
-              <a:spcBef>
-                <a:spcPts val="300"/>
-              </a:spcBef>
-              <a:spcAft>
-                <a:spcPts val="300"/>
-              </a:spcAft>
-              <a:buNone/>
-            </a:pPr>
-            <a:r>
-              <a:rPr lang="en-US" sz="1200" i="1" dirty="0">
-                <a:solidFill>
-                  <a:srgbClr val="1C2833"/>
-                </a:solidFill>
-                <a:latin typeface="Arial" pitchFamily="34" charset="0"/>
-                <a:ea typeface="Arial" pitchFamily="34" charset="-122"/>
-                <a:cs typeface="Arial" pitchFamily="34" charset="-120"/>
-              </a:rPr>
-              <a:t>show</a:t>
-            </a:r>
-            <a:pPr algn="l" indent="0" marL="0">
-              <a:lnSpc>
-                <a:spcPts val="1680"/>
-              </a:lnSpc>
-              <a:spcBef>
-                <a:spcPts val="300"/>
-              </a:spcBef>
+              <a:t> — 9 − 2 = 7 · 10 − 8 = 2 · </a:t>
+            </a:r>
+            <a:pPr algn="l" indent="0" marL="0">
+              <a:lnSpc>
+                <a:spcPts val="1620"/>
+              </a:lnSpc>
+              <a:spcAft>
+                <a:spcPts val="300"/>
+              </a:spcAft>
+              <a:buNone/>
+            </a:pPr>
+            <a:r>
+              <a:rPr lang="en-US" sz="1200" b="1" dirty="0">
+                <a:solidFill>
+                  <a:srgbClr val="1C2833"/>
+                </a:solidFill>
+                <a:latin typeface="Arial" pitchFamily="34" charset="0"/>
+                <a:ea typeface="Arial" pitchFamily="34" charset="-122"/>
+                <a:cs typeface="Arial" pitchFamily="34" charset="-120"/>
+              </a:rPr>
+              <a:t>72</a:t>
+            </a:r>
+            <a:pPr algn="l" indent="0" marL="0">
+              <a:lnSpc>
+                <a:spcPts val="1620"/>
+              </a:lnSpc>
               <a:spcAft>
                 <a:spcPts val="300"/>
               </a:spcAft>
@@ -2794,15 +3622,183 @@
                 <a:ea typeface="Arial" pitchFamily="34" charset="-122"/>
                 <a:cs typeface="Arial" pitchFamily="34" charset="-120"/>
               </a:rPr>
-              <a:t> the digit-wise method when asked. Day 6's "why it works" depends on the digit-wise framing. – Pair students with different reflexes. The faster-reflex student often models; the slower benefits.</a:t>
+              <a:t> · 28 + 72 = 100 ✓</a:t>
             </a:r>
             <a:endParaRPr lang="en-US" sz="1200" dirty="0"/>
           </a:p>
-        </p:txBody>
-      </p:sp>
-      <p:sp>
-        <p:nvSpPr>
-          <p:cNvPr id="5" name="Text 3"/>
+          <a:p>
+            <a:pPr algn="l" marL="342900" indent="-342900">
+              <a:lnSpc>
+                <a:spcPts val="1620"/>
+              </a:lnSpc>
+              <a:spcAft>
+                <a:spcPts val="300"/>
+              </a:spcAft>
+              <a:buSzPct val="100000"/>
+              <a:buChar char="•"/>
+            </a:pPr>
+            <a:r>
+              <a:rPr lang="en-US" sz="1200" b="1" dirty="0">
+                <a:solidFill>
+                  <a:srgbClr val="1C2833"/>
+                </a:solidFill>
+                <a:latin typeface="Arial" pitchFamily="34" charset="0"/>
+                <a:ea typeface="Arial" pitchFamily="34" charset="-122"/>
+                <a:cs typeface="Arial" pitchFamily="34" charset="-120"/>
+              </a:rPr>
+              <a:t>86</a:t>
+            </a:r>
+            <a:pPr algn="l" indent="0" marL="0">
+              <a:lnSpc>
+                <a:spcPts val="1620"/>
+              </a:lnSpc>
+              <a:spcAft>
+                <a:spcPts val="300"/>
+              </a:spcAft>
+              <a:buNone/>
+            </a:pPr>
+            <a:r>
+              <a:rPr lang="en-US" sz="1200" dirty="0">
+                <a:solidFill>
+                  <a:srgbClr val="1C2833"/>
+                </a:solidFill>
+                <a:latin typeface="Arial" pitchFamily="34" charset="0"/>
+                <a:ea typeface="Arial" pitchFamily="34" charset="-122"/>
+                <a:cs typeface="Arial" pitchFamily="34" charset="-120"/>
+              </a:rPr>
+              <a:t> — 9 − 8 = 1 · 10 − 6 = 4 · </a:t>
+            </a:r>
+            <a:pPr algn="l" indent="0" marL="0">
+              <a:lnSpc>
+                <a:spcPts val="1620"/>
+              </a:lnSpc>
+              <a:spcAft>
+                <a:spcPts val="300"/>
+              </a:spcAft>
+              <a:buNone/>
+            </a:pPr>
+            <a:r>
+              <a:rPr lang="en-US" sz="1200" b="1" dirty="0">
+                <a:solidFill>
+                  <a:srgbClr val="1C2833"/>
+                </a:solidFill>
+                <a:latin typeface="Arial" pitchFamily="34" charset="0"/>
+                <a:ea typeface="Arial" pitchFamily="34" charset="-122"/>
+                <a:cs typeface="Arial" pitchFamily="34" charset="-120"/>
+              </a:rPr>
+              <a:t>14</a:t>
+            </a:r>
+            <a:pPr algn="l" indent="0" marL="0">
+              <a:lnSpc>
+                <a:spcPts val="1620"/>
+              </a:lnSpc>
+              <a:spcAft>
+                <a:spcPts val="300"/>
+              </a:spcAft>
+              <a:buNone/>
+            </a:pPr>
+            <a:r>
+              <a:rPr lang="en-US" sz="1200" dirty="0">
+                <a:solidFill>
+                  <a:srgbClr val="1C2833"/>
+                </a:solidFill>
+                <a:latin typeface="Arial" pitchFamily="34" charset="0"/>
+                <a:ea typeface="Arial" pitchFamily="34" charset="-122"/>
+                <a:cs typeface="Arial" pitchFamily="34" charset="-120"/>
+              </a:rPr>
+              <a:t> · 86 + 14 = 100 ✓</a:t>
+            </a:r>
+            <a:endParaRPr lang="en-US" sz="1200" dirty="0"/>
+          </a:p>
+          <a:p>
+            <a:pPr algn="l" marL="342900" indent="-342900">
+              <a:lnSpc>
+                <a:spcPts val="1620"/>
+              </a:lnSpc>
+              <a:spcAft>
+                <a:spcPts val="300"/>
+              </a:spcAft>
+              <a:buSzPct val="100000"/>
+              <a:buChar char="•"/>
+            </a:pPr>
+            <a:r>
+              <a:rPr lang="en-US" sz="1200" b="1" dirty="0">
+                <a:solidFill>
+                  <a:srgbClr val="1C2833"/>
+                </a:solidFill>
+                <a:latin typeface="Arial" pitchFamily="34" charset="0"/>
+                <a:ea typeface="Arial" pitchFamily="34" charset="-122"/>
+                <a:cs typeface="Arial" pitchFamily="34" charset="-120"/>
+              </a:rPr>
+              <a:t>95</a:t>
+            </a:r>
+            <a:pPr algn="l" indent="0" marL="0">
+              <a:lnSpc>
+                <a:spcPts val="1620"/>
+              </a:lnSpc>
+              <a:spcAft>
+                <a:spcPts val="300"/>
+              </a:spcAft>
+              <a:buNone/>
+            </a:pPr>
+            <a:r>
+              <a:rPr lang="en-US" sz="1200" dirty="0">
+                <a:solidFill>
+                  <a:srgbClr val="1C2833"/>
+                </a:solidFill>
+                <a:latin typeface="Arial" pitchFamily="34" charset="0"/>
+                <a:ea typeface="Arial" pitchFamily="34" charset="-122"/>
+                <a:cs typeface="Arial" pitchFamily="34" charset="-120"/>
+              </a:rPr>
+              <a:t> — 9 − 9 = 0 · 10 − 5 = 5 · </a:t>
+            </a:r>
+            <a:pPr algn="l" indent="0" marL="0">
+              <a:lnSpc>
+                <a:spcPts val="1620"/>
+              </a:lnSpc>
+              <a:spcAft>
+                <a:spcPts val="300"/>
+              </a:spcAft>
+              <a:buNone/>
+            </a:pPr>
+            <a:r>
+              <a:rPr lang="en-US" sz="1200" b="1" dirty="0">
+                <a:solidFill>
+                  <a:srgbClr val="1C2833"/>
+                </a:solidFill>
+                <a:latin typeface="Arial" pitchFamily="34" charset="0"/>
+                <a:ea typeface="Arial" pitchFamily="34" charset="-122"/>
+                <a:cs typeface="Arial" pitchFamily="34" charset="-120"/>
+              </a:rPr>
+              <a:t>05</a:t>
+            </a:r>
+            <a:pPr algn="l" indent="0" marL="0">
+              <a:lnSpc>
+                <a:spcPts val="1620"/>
+              </a:lnSpc>
+              <a:spcAft>
+                <a:spcPts val="300"/>
+              </a:spcAft>
+              <a:buNone/>
+            </a:pPr>
+            <a:r>
+              <a:rPr lang="en-US" sz="1200" dirty="0">
+                <a:solidFill>
+                  <a:srgbClr val="1C2833"/>
+                </a:solidFill>
+                <a:latin typeface="Arial" pitchFamily="34" charset="0"/>
+                <a:ea typeface="Arial" pitchFamily="34" charset="-122"/>
+                <a:cs typeface="Arial" pitchFamily="34" charset="-120"/>
+              </a:rPr>
+              <a:t> = 5 · 95 + 5 = 100 ✓</a:t>
+            </a:r>
+            <a:endParaRPr lang="en-US" sz="1200" dirty="0"/>
+          </a:p>
+        </p:txBody>
+      </p:sp>
+      <p:sp>
+        <p:nvSpPr>
+          <p:cNvPr id="7" name="Text 5"/>
           <p:cNvSpPr/>
           <p:nvPr/>
         </p:nvSpPr>
@@ -2952,6 +3948,2715 @@
                 <a:ea typeface="Georgia" pitchFamily="34" charset="-122"/>
                 <a:cs typeface="Georgia" pitchFamily="34" charset="-120"/>
               </a:rPr>
+              <a:t>Core (15 min) — The pattern (cont.)</a:t>
+            </a:r>
+            <a:endParaRPr lang="en-US" sz="1800" dirty="0"/>
+          </a:p>
+        </p:txBody>
+      </p:sp>
+      <p:sp>
+        <p:nvSpPr>
+          <p:cNvPr id="4" name="Text 2"/>
+          <p:cNvSpPr/>
+          <p:nvPr/>
+        </p:nvSpPr>
+        <p:spPr>
+          <a:xfrm>
+            <a:off x="634901" y="883593"/>
+            <a:ext cx="8102798" cy="712291"/>
+          </a:xfrm>
+          <a:prstGeom prst="rect">
+            <a:avLst/>
+          </a:prstGeom>
+          <a:noFill/>
+          <a:ln/>
+        </p:spPr>
+        <p:txBody>
+          <a:bodyPr wrap="square" lIns="0" tIns="0" rIns="0" bIns="0" rtlCol="0" anchor="t"/>
+          <a:lstStyle/>
+          <a:p>
+            <a:pPr algn="l" marL="342900" indent="-342900">
+              <a:lnSpc>
+                <a:spcPts val="1620"/>
+              </a:lnSpc>
+              <a:spcAft>
+                <a:spcPts val="300"/>
+              </a:spcAft>
+              <a:buSzPct val="100000"/>
+              <a:buChar char="•"/>
+            </a:pPr>
+            <a:r>
+              <a:rPr lang="en-US" sz="1200" b="1" dirty="0">
+                <a:solidFill>
+                  <a:srgbClr val="1C2833"/>
+                </a:solidFill>
+                <a:latin typeface="Arial" pitchFamily="34" charset="0"/>
+                <a:ea typeface="Arial" pitchFamily="34" charset="-122"/>
+                <a:cs typeface="Arial" pitchFamily="34" charset="-120"/>
+              </a:rPr>
+              <a:t>Edge case: trailing zero.</a:t>
+            </a:r>
+            <a:pPr algn="l" indent="0" marL="0">
+              <a:lnSpc>
+                <a:spcPts val="1620"/>
+              </a:lnSpc>
+              <a:spcAft>
+                <a:spcPts val="300"/>
+              </a:spcAft>
+              <a:buNone/>
+            </a:pPr>
+            <a:r>
+              <a:rPr lang="en-US" sz="1200" dirty="0">
+                <a:solidFill>
+                  <a:srgbClr val="1C2833"/>
+                </a:solidFill>
+                <a:latin typeface="Arial" pitchFamily="34" charset="0"/>
+                <a:ea typeface="Arial" pitchFamily="34" charset="-122"/>
+                <a:cs typeface="Arial" pitchFamily="34" charset="-120"/>
+              </a:rPr>
+              <a:t> What is the complement of 30? Apply the rule: 9 − 3 = 6 (for tens), 10 − 0 = 10 (for units). But 10 isn't a digit — it carries. So you get </a:t>
+            </a:r>
+            <a:pPr algn="l" indent="0" marL="0">
+              <a:lnSpc>
+                <a:spcPts val="1620"/>
+              </a:lnSpc>
+              <a:spcAft>
+                <a:spcPts val="300"/>
+              </a:spcAft>
+              <a:buNone/>
+            </a:pPr>
+            <a:r>
+              <a:rPr lang="en-US" sz="1200" dirty="0">
+                <a:solidFill>
+                  <a:srgbClr val="1C2833"/>
+                </a:solidFill>
+                <a:latin typeface="Arial" pitchFamily="34" charset="0"/>
+                <a:ea typeface="Arial" pitchFamily="34" charset="-122"/>
+                <a:cs typeface="Arial" pitchFamily="34" charset="-120"/>
+              </a:rPr>
+              <a:t>6 | 10</a:t>
+            </a:r>
+            <a:pPr algn="l" indent="0" marL="0">
+              <a:lnSpc>
+                <a:spcPts val="1620"/>
+              </a:lnSpc>
+              <a:spcAft>
+                <a:spcPts val="300"/>
+              </a:spcAft>
+              <a:buNone/>
+            </a:pPr>
+            <a:r>
+              <a:rPr lang="en-US" sz="1200" dirty="0">
+                <a:solidFill>
+                  <a:srgbClr val="1C2833"/>
+                </a:solidFill>
+                <a:latin typeface="Arial" pitchFamily="34" charset="0"/>
+                <a:ea typeface="Arial" pitchFamily="34" charset="-122"/>
+                <a:cs typeface="Arial" pitchFamily="34" charset="-120"/>
+              </a:rPr>
+              <a:t> → </a:t>
+            </a:r>
+            <a:pPr algn="l" indent="0" marL="0">
+              <a:lnSpc>
+                <a:spcPts val="1620"/>
+              </a:lnSpc>
+              <a:spcAft>
+                <a:spcPts val="300"/>
+              </a:spcAft>
+              <a:buNone/>
+            </a:pPr>
+            <a:r>
+              <a:rPr lang="en-US" sz="1200" dirty="0">
+                <a:solidFill>
+                  <a:srgbClr val="1C2833"/>
+                </a:solidFill>
+                <a:latin typeface="Arial" pitchFamily="34" charset="0"/>
+                <a:ea typeface="Arial" pitchFamily="34" charset="-122"/>
+                <a:cs typeface="Arial" pitchFamily="34" charset="-120"/>
+              </a:rPr>
+              <a:t>70</a:t>
+            </a:r>
+            <a:pPr algn="l" indent="0" marL="0">
+              <a:lnSpc>
+                <a:spcPts val="1620"/>
+              </a:lnSpc>
+              <a:spcAft>
+                <a:spcPts val="300"/>
+              </a:spcAft>
+              <a:buNone/>
+            </a:pPr>
+            <a:r>
+              <a:rPr lang="en-US" sz="1200" dirty="0">
+                <a:solidFill>
+                  <a:srgbClr val="1C2833"/>
+                </a:solidFill>
+                <a:latin typeface="Arial" pitchFamily="34" charset="0"/>
+                <a:ea typeface="Arial" pitchFamily="34" charset="-122"/>
+                <a:cs typeface="Arial" pitchFamily="34" charset="-120"/>
+              </a:rPr>
+              <a:t>. Easier: notice that the last </a:t>
+            </a:r>
+            <a:pPr algn="l" indent="0" marL="0">
+              <a:lnSpc>
+                <a:spcPts val="1620"/>
+              </a:lnSpc>
+              <a:spcAft>
+                <a:spcPts val="300"/>
+              </a:spcAft>
+              <a:buNone/>
+            </a:pPr>
+            <a:r>
+              <a:rPr lang="en-US" sz="1200" i="1" dirty="0">
+                <a:solidFill>
+                  <a:srgbClr val="1C2833"/>
+                </a:solidFill>
+                <a:latin typeface="Arial" pitchFamily="34" charset="0"/>
+                <a:ea typeface="Arial" pitchFamily="34" charset="-122"/>
+                <a:cs typeface="Arial" pitchFamily="34" charset="-120"/>
+              </a:rPr>
+              <a:t>non-zero</a:t>
+            </a:r>
+            <a:pPr algn="l" indent="0" marL="0">
+              <a:lnSpc>
+                <a:spcPts val="1620"/>
+              </a:lnSpc>
+              <a:spcAft>
+                <a:spcPts val="300"/>
+              </a:spcAft>
+              <a:buNone/>
+            </a:pPr>
+            <a:r>
+              <a:rPr lang="en-US" sz="1200" dirty="0">
+                <a:solidFill>
+                  <a:srgbClr val="1C2833"/>
+                </a:solidFill>
+                <a:latin typeface="Arial" pitchFamily="34" charset="0"/>
+                <a:ea typeface="Arial" pitchFamily="34" charset="-122"/>
+                <a:cs typeface="Arial" pitchFamily="34" charset="-120"/>
+              </a:rPr>
+              <a:t> digit gets the "from 10" treatment; trailing zeros stay as zeros.</a:t>
+            </a:r>
+            <a:endParaRPr lang="en-US" sz="1200" dirty="0"/>
+          </a:p>
+        </p:txBody>
+      </p:sp>
+      <p:sp>
+        <p:nvSpPr>
+          <p:cNvPr id="5" name="Text 3"/>
+          <p:cNvSpPr/>
+          <p:nvPr/>
+        </p:nvSpPr>
+        <p:spPr>
+          <a:xfrm>
+            <a:off x="406301" y="1684734"/>
+            <a:ext cx="8498026" cy="213271"/>
+          </a:xfrm>
+          <a:prstGeom prst="rect">
+            <a:avLst/>
+          </a:prstGeom>
+          <a:noFill/>
+          <a:ln/>
+        </p:spPr>
+        <p:txBody>
+          <a:bodyPr wrap="square" lIns="0" tIns="0" rIns="0" bIns="0" rtlCol="0" anchor="t"/>
+          <a:lstStyle/>
+          <a:p>
+            <a:pPr algn="l" indent="0" marL="0">
+              <a:lnSpc>
+                <a:spcPts val="1680"/>
+              </a:lnSpc>
+              <a:spcBef>
+                <a:spcPts val="300"/>
+              </a:spcBef>
+              <a:spcAft>
+                <a:spcPts val="300"/>
+              </a:spcAft>
+              <a:buNone/>
+            </a:pPr>
+            <a:r>
+              <a:rPr lang="en-US" sz="1200" dirty="0">
+                <a:solidFill>
+                  <a:srgbClr val="1C2833"/>
+                </a:solidFill>
+                <a:latin typeface="Arial" pitchFamily="34" charset="0"/>
+                <a:ea typeface="Arial" pitchFamily="34" charset="-122"/>
+                <a:cs typeface="Arial" pitchFamily="34" charset="-120"/>
+              </a:rPr>
+              <a:t>Or more simply: 30 + 70 = 100, so complement of 30 is 70. The rule still works, you just respect place value.</a:t>
+            </a:r>
+            <a:endParaRPr lang="en-US" sz="1200" dirty="0"/>
+          </a:p>
+        </p:txBody>
+      </p:sp>
+      <p:sp>
+        <p:nvSpPr>
+          <p:cNvPr id="6" name="Text 4"/>
+          <p:cNvSpPr/>
+          <p:nvPr/>
+        </p:nvSpPr>
+        <p:spPr>
+          <a:xfrm>
+            <a:off x="406301" y="4434929"/>
+            <a:ext cx="8498026" cy="213271"/>
+          </a:xfrm>
+          <a:prstGeom prst="rect">
+            <a:avLst/>
+          </a:prstGeom>
+          <a:noFill/>
+          <a:ln/>
+        </p:spPr>
+        <p:txBody>
+          <a:bodyPr wrap="square" lIns="0" tIns="0" rIns="0" bIns="0" rtlCol="0" anchor="t"/>
+          <a:lstStyle/>
+          <a:p>
+            <a:pPr algn="l" indent="0" marL="0">
+              <a:lnSpc>
+                <a:spcPts val="1680"/>
+              </a:lnSpc>
+              <a:spcBef>
+                <a:spcPts val="300"/>
+              </a:spcBef>
+              <a:spcAft>
+                <a:spcPts val="300"/>
+              </a:spcAft>
+              <a:buNone/>
+            </a:pPr>
+            <a:r>
+              <a:rPr lang="en-US" sz="1200" dirty="0">
+                <a:solidFill>
+                  <a:srgbClr val="1C2833"/>
+                </a:solidFill>
+                <a:latin typeface="Arial" pitchFamily="34" charset="0"/>
+                <a:ea typeface="Arial" pitchFamily="34" charset="-122"/>
+                <a:cs typeface="Arial" pitchFamily="34" charset="-120"/>
+              </a:rPr>
+              <a:t>Middle ·  · IKS Curriculum</a:t>
+            </a:r>
+            <a:endParaRPr lang="en-US" sz="1200" dirty="0"/>
+          </a:p>
+        </p:txBody>
+      </p:sp>
+    </p:spTree>
+  </p:cSld>
+  <p:clrMapOvr>
+    <a:masterClrMapping/>
+  </p:clrMapOvr>
+</p:sld>
+</file>
+
+<file path=ppt/slides/slide13.xml><?xml version="1.0" encoding="utf-8"?>
+<p:sld xmlns:a="http://schemas.openxmlformats.org/drawingml/2006/main" xmlns:r="http://schemas.openxmlformats.org/officeDocument/2006/relationships" xmlns:p="http://schemas.openxmlformats.org/presentationml/2006/main">
+  <p:cSld name="Slide 13">
+    <p:bg>
+      <p:bgPr>
+        <a:solidFill>
+          <a:srgbClr val="FFFFFF"/>
+        </a:solidFill>
+      </p:bgPr>
+    </p:bg>
+    <p:spTree>
+      <p:nvGrpSpPr>
+        <p:cNvPr id="1" name=""/>
+        <p:cNvGrpSpPr/>
+        <p:nvPr/>
+      </p:nvGrpSpPr>
+      <p:grpSpPr>
+        <a:xfrm>
+          <a:off x="0" y="0"/>
+          <a:ext cx="0" cy="0"/>
+          <a:chOff x="0" y="0"/>
+          <a:chExt cx="0" cy="0"/>
+        </a:xfrm>
+      </p:grpSpPr>
+      <p:sp>
+        <p:nvSpPr>
+          <p:cNvPr id="2" name="Text 0"/>
+          <p:cNvSpPr/>
+          <p:nvPr/>
+        </p:nvSpPr>
+        <p:spPr>
+          <a:xfrm>
+            <a:off x="0" y="0"/>
+            <a:ext cx="9144000" cy="101501"/>
+          </a:xfrm>
+          <a:prstGeom prst="rect">
+            <a:avLst/>
+          </a:prstGeom>
+          <a:solidFill>
+            <a:srgbClr val="277884"/>
+          </a:solidFill>
+          <a:ln/>
+        </p:spPr>
+        <p:txBody>
+          <a:bodyPr wrap="square" rtlCol="0" anchor="ctr"/>
+          <a:lstStyle/>
+          <a:p>
+            <a:pPr indent="0" marL="0">
+              <a:buNone/>
+            </a:pPr>
+            <a:endParaRPr lang="en-US" dirty="0"/>
+          </a:p>
+        </p:txBody>
+      </p:sp>
+      <p:sp>
+        <p:nvSpPr>
+          <p:cNvPr id="3" name="Text 1"/>
+          <p:cNvSpPr/>
+          <p:nvPr/>
+        </p:nvSpPr>
+        <p:spPr>
+          <a:xfrm>
+            <a:off x="406301" y="457051"/>
+            <a:ext cx="8498026" cy="274290"/>
+          </a:xfrm>
+          <a:prstGeom prst="rect">
+            <a:avLst/>
+          </a:prstGeom>
+          <a:noFill/>
+          <a:ln/>
+        </p:spPr>
+        <p:txBody>
+          <a:bodyPr wrap="square" lIns="0" tIns="0" rIns="0" bIns="0" rtlCol="0" anchor="t"/>
+          <a:lstStyle/>
+          <a:p>
+            <a:pPr algn="l" indent="0" marL="0">
+              <a:lnSpc>
+                <a:spcPts val="2160"/>
+              </a:lnSpc>
+              <a:spcBef>
+                <a:spcPts val="600"/>
+              </a:spcBef>
+              <a:spcAft>
+                <a:spcPts val="800"/>
+              </a:spcAft>
+              <a:buNone/>
+            </a:pPr>
+            <a:r>
+              <a:rPr lang="en-US" sz="1800" b="1" dirty="0">
+                <a:solidFill>
+                  <a:srgbClr val="FE4447"/>
+                </a:solidFill>
+                <a:latin typeface="Georgia" pitchFamily="34" charset="0"/>
+                <a:ea typeface="Georgia" pitchFamily="34" charset="-122"/>
+                <a:cs typeface="Georgia" pitchFamily="34" charset="-120"/>
+              </a:rPr>
+              <a:t>Activity (20 min) — Paired drill</a:t>
+            </a:r>
+            <a:endParaRPr lang="en-US" sz="1800" dirty="0"/>
+          </a:p>
+        </p:txBody>
+      </p:sp>
+      <p:sp>
+        <p:nvSpPr>
+          <p:cNvPr id="4" name="Text 2"/>
+          <p:cNvSpPr/>
+          <p:nvPr/>
+        </p:nvSpPr>
+        <p:spPr>
+          <a:xfrm>
+            <a:off x="634901" y="883593"/>
+            <a:ext cx="8102798" cy="1218902"/>
+          </a:xfrm>
+          <a:prstGeom prst="rect">
+            <a:avLst/>
+          </a:prstGeom>
+          <a:noFill/>
+          <a:ln/>
+        </p:spPr>
+        <p:txBody>
+          <a:bodyPr wrap="square" lIns="0" tIns="0" rIns="0" bIns="0" rtlCol="0" anchor="t"/>
+          <a:lstStyle/>
+          <a:p>
+            <a:pPr algn="l" marL="342900" indent="-342900">
+              <a:lnSpc>
+                <a:spcPts val="1620"/>
+              </a:lnSpc>
+              <a:spcAft>
+                <a:spcPts val="300"/>
+              </a:spcAft>
+              <a:buSzPct val="100000"/>
+              <a:buChar char="•"/>
+            </a:pPr>
+            <a:r>
+              <a:rPr lang="en-US" sz="1200" dirty="0">
+                <a:solidFill>
+                  <a:srgbClr val="1C2833"/>
+                </a:solidFill>
+                <a:latin typeface="Arial" pitchFamily="34" charset="0"/>
+                <a:ea typeface="Arial" pitchFamily="34" charset="-122"/>
+                <a:cs typeface="Arial" pitchFamily="34" charset="-120"/>
+              </a:rPr>
+              <a:t>Pairs face each other across desks. One holds the drill sheet (20 two-digit numbers); the other says complements out loud.</a:t>
+            </a:r>
+            <a:endParaRPr lang="en-US" sz="1200" dirty="0"/>
+          </a:p>
+          <a:p>
+            <a:pPr algn="l" marL="342900" indent="-342900">
+              <a:lnSpc>
+                <a:spcPts val="1620"/>
+              </a:lnSpc>
+              <a:spcAft>
+                <a:spcPts val="300"/>
+              </a:spcAft>
+              <a:buSzPct val="100000"/>
+              <a:buChar char="•"/>
+            </a:pPr>
+            <a:r>
+              <a:rPr lang="en-US" sz="1200" dirty="0">
+                <a:solidFill>
+                  <a:srgbClr val="1C2833"/>
+                </a:solidFill>
+                <a:latin typeface="Arial" pitchFamily="34" charset="0"/>
+                <a:ea typeface="Arial" pitchFamily="34" charset="-122"/>
+                <a:cs typeface="Arial" pitchFamily="34" charset="-120"/>
+              </a:rPr>
+              <a:t>Round 1: 60 seconds. Count correct answers.</a:t>
+            </a:r>
+            <a:endParaRPr lang="en-US" sz="1200" dirty="0"/>
+          </a:p>
+          <a:p>
+            <a:pPr algn="l" marL="342900" indent="-342900">
+              <a:lnSpc>
+                <a:spcPts val="1620"/>
+              </a:lnSpc>
+              <a:spcAft>
+                <a:spcPts val="300"/>
+              </a:spcAft>
+              <a:buSzPct val="100000"/>
+              <a:buChar char="•"/>
+            </a:pPr>
+            <a:r>
+              <a:rPr lang="en-US" sz="1200" dirty="0">
+                <a:solidFill>
+                  <a:srgbClr val="1C2833"/>
+                </a:solidFill>
+                <a:latin typeface="Arial" pitchFamily="34" charset="0"/>
+                <a:ea typeface="Arial" pitchFamily="34" charset="-122"/>
+                <a:cs typeface="Arial" pitchFamily="34" charset="-120"/>
+              </a:rPr>
+              <a:t>Swap roles. Round 2.</a:t>
+            </a:r>
+            <a:endParaRPr lang="en-US" sz="1200" dirty="0"/>
+          </a:p>
+          <a:p>
+            <a:pPr algn="l" marL="342900" indent="-342900">
+              <a:lnSpc>
+                <a:spcPts val="1620"/>
+              </a:lnSpc>
+              <a:spcAft>
+                <a:spcPts val="300"/>
+              </a:spcAft>
+              <a:buSzPct val="100000"/>
+              <a:buChar char="•"/>
+            </a:pPr>
+            <a:r>
+              <a:rPr lang="en-US" sz="1200" dirty="0">
+                <a:solidFill>
+                  <a:srgbClr val="1C2833"/>
+                </a:solidFill>
+                <a:latin typeface="Arial" pitchFamily="34" charset="0"/>
+                <a:ea typeface="Arial" pitchFamily="34" charset="-122"/>
+                <a:cs typeface="Arial" pitchFamily="34" charset="-120"/>
+              </a:rPr>
+              <a:t>Round 3: swap to a new sheet (different numbers). Aim to beat your Round 1 count.</a:t>
+            </a:r>
+            <a:endParaRPr lang="en-US" sz="1200" dirty="0"/>
+          </a:p>
+        </p:txBody>
+      </p:sp>
+      <p:sp>
+        <p:nvSpPr>
+          <p:cNvPr id="5" name="Text 3"/>
+          <p:cNvSpPr/>
+          <p:nvPr/>
+        </p:nvSpPr>
+        <p:spPr>
+          <a:xfrm>
+            <a:off x="406301" y="4434929"/>
+            <a:ext cx="8498026" cy="213271"/>
+          </a:xfrm>
+          <a:prstGeom prst="rect">
+            <a:avLst/>
+          </a:prstGeom>
+          <a:noFill/>
+          <a:ln/>
+        </p:spPr>
+        <p:txBody>
+          <a:bodyPr wrap="square" lIns="0" tIns="0" rIns="0" bIns="0" rtlCol="0" anchor="t"/>
+          <a:lstStyle/>
+          <a:p>
+            <a:pPr algn="l" indent="0" marL="0">
+              <a:lnSpc>
+                <a:spcPts val="1680"/>
+              </a:lnSpc>
+              <a:spcBef>
+                <a:spcPts val="300"/>
+              </a:spcBef>
+              <a:spcAft>
+                <a:spcPts val="300"/>
+              </a:spcAft>
+              <a:buNone/>
+            </a:pPr>
+            <a:r>
+              <a:rPr lang="en-US" sz="1200" dirty="0">
+                <a:solidFill>
+                  <a:srgbClr val="1C2833"/>
+                </a:solidFill>
+                <a:latin typeface="Arial" pitchFamily="34" charset="0"/>
+                <a:ea typeface="Arial" pitchFamily="34" charset="-122"/>
+                <a:cs typeface="Arial" pitchFamily="34" charset="-120"/>
+              </a:rPr>
+              <a:t>Middle ·  · IKS Curriculum</a:t>
+            </a:r>
+            <a:endParaRPr lang="en-US" sz="1200" dirty="0"/>
+          </a:p>
+        </p:txBody>
+      </p:sp>
+    </p:spTree>
+  </p:cSld>
+  <p:clrMapOvr>
+    <a:masterClrMapping/>
+  </p:clrMapOvr>
+</p:sld>
+</file>
+
+<file path=ppt/slides/slide14.xml><?xml version="1.0" encoding="utf-8"?>
+<p:sld xmlns:a="http://schemas.openxmlformats.org/drawingml/2006/main" xmlns:r="http://schemas.openxmlformats.org/officeDocument/2006/relationships" xmlns:p="http://schemas.openxmlformats.org/presentationml/2006/main">
+  <p:cSld name="Slide 14">
+    <p:bg>
+      <p:bgPr>
+        <a:solidFill>
+          <a:srgbClr val="FFFFFF"/>
+        </a:solidFill>
+      </p:bgPr>
+    </p:bg>
+    <p:spTree>
+      <p:nvGrpSpPr>
+        <p:cNvPr id="1" name=""/>
+        <p:cNvGrpSpPr/>
+        <p:nvPr/>
+      </p:nvGrpSpPr>
+      <p:grpSpPr>
+        <a:xfrm>
+          <a:off x="0" y="0"/>
+          <a:ext cx="0" cy="0"/>
+          <a:chOff x="0" y="0"/>
+          <a:chExt cx="0" cy="0"/>
+        </a:xfrm>
+      </p:grpSpPr>
+      <p:sp>
+        <p:nvSpPr>
+          <p:cNvPr id="2" name="Text 0"/>
+          <p:cNvSpPr/>
+          <p:nvPr/>
+        </p:nvSpPr>
+        <p:spPr>
+          <a:xfrm>
+            <a:off x="0" y="0"/>
+            <a:ext cx="9144000" cy="101501"/>
+          </a:xfrm>
+          <a:prstGeom prst="rect">
+            <a:avLst/>
+          </a:prstGeom>
+          <a:solidFill>
+            <a:srgbClr val="277884"/>
+          </a:solidFill>
+          <a:ln/>
+        </p:spPr>
+        <p:txBody>
+          <a:bodyPr wrap="square" rtlCol="0" anchor="ctr"/>
+          <a:lstStyle/>
+          <a:p>
+            <a:pPr indent="0" marL="0">
+              <a:buNone/>
+            </a:pPr>
+            <a:endParaRPr lang="en-US" dirty="0"/>
+          </a:p>
+        </p:txBody>
+      </p:sp>
+      <p:sp>
+        <p:nvSpPr>
+          <p:cNvPr id="3" name="Text 1"/>
+          <p:cNvSpPr/>
+          <p:nvPr/>
+        </p:nvSpPr>
+        <p:spPr>
+          <a:xfrm>
+            <a:off x="406301" y="457051"/>
+            <a:ext cx="8498026" cy="274290"/>
+          </a:xfrm>
+          <a:prstGeom prst="rect">
+            <a:avLst/>
+          </a:prstGeom>
+          <a:noFill/>
+          <a:ln/>
+        </p:spPr>
+        <p:txBody>
+          <a:bodyPr wrap="square" lIns="0" tIns="0" rIns="0" bIns="0" rtlCol="0" anchor="t"/>
+          <a:lstStyle/>
+          <a:p>
+            <a:pPr algn="l" indent="0" marL="0">
+              <a:lnSpc>
+                <a:spcPts val="2160"/>
+              </a:lnSpc>
+              <a:spcBef>
+                <a:spcPts val="600"/>
+              </a:spcBef>
+              <a:spcAft>
+                <a:spcPts val="800"/>
+              </a:spcAft>
+              <a:buNone/>
+            </a:pPr>
+            <a:r>
+              <a:rPr lang="en-US" sz="1800" b="1" dirty="0">
+                <a:solidFill>
+                  <a:srgbClr val="FE4447"/>
+                </a:solidFill>
+                <a:latin typeface="Georgia" pitchFamily="34" charset="0"/>
+                <a:ea typeface="Georgia" pitchFamily="34" charset="-122"/>
+                <a:cs typeface="Georgia" pitchFamily="34" charset="-120"/>
+              </a:rPr>
+              <a:t>Wrap-up (5 min)</a:t>
+            </a:r>
+            <a:endParaRPr lang="en-US" sz="1800" dirty="0"/>
+          </a:p>
+        </p:txBody>
+      </p:sp>
+      <p:sp>
+        <p:nvSpPr>
+          <p:cNvPr id="4" name="Text 2"/>
+          <p:cNvSpPr/>
+          <p:nvPr/>
+        </p:nvSpPr>
+        <p:spPr>
+          <a:xfrm>
+            <a:off x="634901" y="883593"/>
+            <a:ext cx="8102798" cy="769441"/>
+          </a:xfrm>
+          <a:prstGeom prst="rect">
+            <a:avLst/>
+          </a:prstGeom>
+          <a:noFill/>
+          <a:ln/>
+        </p:spPr>
+        <p:txBody>
+          <a:bodyPr wrap="square" lIns="0" tIns="0" rIns="0" bIns="0" rtlCol="0" anchor="t"/>
+          <a:lstStyle/>
+          <a:p>
+            <a:pPr algn="l" marL="342900" indent="-342900">
+              <a:lnSpc>
+                <a:spcPts val="1620"/>
+              </a:lnSpc>
+              <a:spcAft>
+                <a:spcPts val="300"/>
+              </a:spcAft>
+              <a:buSzPct val="100000"/>
+              <a:buChar char="•"/>
+            </a:pPr>
+            <a:r>
+              <a:rPr lang="en-US" sz="1200" dirty="0">
+                <a:solidFill>
+                  <a:srgbClr val="1C2833"/>
+                </a:solidFill>
+                <a:latin typeface="Arial" pitchFamily="34" charset="0"/>
+                <a:ea typeface="Arial" pitchFamily="34" charset="-122"/>
+                <a:cs typeface="Arial" pitchFamily="34" charset="-120"/>
+              </a:rPr>
+              <a:t>Quick poll: who got 15+ in 60 sec? 18+? 20?</a:t>
+            </a:r>
+            <a:endParaRPr lang="en-US" sz="1200" dirty="0"/>
+          </a:p>
+          <a:p>
+            <a:pPr algn="l" marL="342900" indent="-342900">
+              <a:lnSpc>
+                <a:spcPts val="1620"/>
+              </a:lnSpc>
+              <a:spcAft>
+                <a:spcPts val="300"/>
+              </a:spcAft>
+              <a:buSzPct val="100000"/>
+              <a:buChar char="•"/>
+            </a:pPr>
+            <a:r>
+              <a:rPr lang="en-US" sz="1200" dirty="0">
+                <a:solidFill>
+                  <a:srgbClr val="1C2833"/>
+                </a:solidFill>
+                <a:latin typeface="Arial" pitchFamily="34" charset="0"/>
+                <a:ea typeface="Arial" pitchFamily="34" charset="-122"/>
+                <a:cs typeface="Arial" pitchFamily="34" charset="-120"/>
+              </a:rPr>
+              <a:t>Recall paraphrase: </a:t>
+            </a:r>
+            <a:pPr algn="l" indent="0" marL="0">
+              <a:lnSpc>
+                <a:spcPts val="1620"/>
+              </a:lnSpc>
+              <a:spcAft>
+                <a:spcPts val="300"/>
+              </a:spcAft>
+              <a:buNone/>
+            </a:pPr>
+            <a:r>
+              <a:rPr lang="en-US" sz="1200" i="1" dirty="0">
+                <a:solidFill>
+                  <a:srgbClr val="1C2833"/>
+                </a:solidFill>
+                <a:latin typeface="Arial" pitchFamily="34" charset="0"/>
+                <a:ea typeface="Arial" pitchFamily="34" charset="-122"/>
+                <a:cs typeface="Arial" pitchFamily="34" charset="-120"/>
+              </a:rPr>
+              <a:t>"To complete to 100, take each digit from 9; the last digit takes from 10."</a:t>
+            </a:r>
+            <a:endParaRPr lang="en-US" sz="1200" dirty="0"/>
+          </a:p>
+          <a:p>
+            <a:pPr algn="l" marL="342900" indent="-342900">
+              <a:lnSpc>
+                <a:spcPts val="1620"/>
+              </a:lnSpc>
+              <a:spcAft>
+                <a:spcPts val="300"/>
+              </a:spcAft>
+              <a:buSzPct val="100000"/>
+              <a:buChar char="•"/>
+            </a:pPr>
+            <a:r>
+              <a:rPr lang="en-US" sz="1200" dirty="0">
+                <a:solidFill>
+                  <a:srgbClr val="1C2833"/>
+                </a:solidFill>
+                <a:latin typeface="Arial" pitchFamily="34" charset="0"/>
+                <a:ea typeface="Arial" pitchFamily="34" charset="-122"/>
+                <a:cs typeface="Arial" pitchFamily="34" charset="-120"/>
+              </a:rPr>
+              <a:t>Preview Day 3: </a:t>
+            </a:r>
+            <a:pPr algn="l" indent="0" marL="0">
+              <a:lnSpc>
+                <a:spcPts val="1620"/>
+              </a:lnSpc>
+              <a:spcAft>
+                <a:spcPts val="300"/>
+              </a:spcAft>
+              <a:buNone/>
+            </a:pPr>
+            <a:r>
+              <a:rPr lang="en-US" sz="1200" i="1" dirty="0">
+                <a:solidFill>
+                  <a:srgbClr val="1C2833"/>
+                </a:solidFill>
+                <a:latin typeface="Arial" pitchFamily="34" charset="0"/>
+                <a:ea typeface="Arial" pitchFamily="34" charset="-122"/>
+                <a:cs typeface="Arial" pitchFamily="34" charset="-120"/>
+              </a:rPr>
+              <a:t>"Tomorrow — same idea, but complement to 1000."</a:t>
+            </a:r>
+            <a:endParaRPr lang="en-US" sz="1200" dirty="0"/>
+          </a:p>
+        </p:txBody>
+      </p:sp>
+      <p:sp>
+        <p:nvSpPr>
+          <p:cNvPr id="5" name="Text 3"/>
+          <p:cNvSpPr/>
+          <p:nvPr/>
+        </p:nvSpPr>
+        <p:spPr>
+          <a:xfrm>
+            <a:off x="406301" y="4434929"/>
+            <a:ext cx="8498026" cy="213271"/>
+          </a:xfrm>
+          <a:prstGeom prst="rect">
+            <a:avLst/>
+          </a:prstGeom>
+          <a:noFill/>
+          <a:ln/>
+        </p:spPr>
+        <p:txBody>
+          <a:bodyPr wrap="square" lIns="0" tIns="0" rIns="0" bIns="0" rtlCol="0" anchor="t"/>
+          <a:lstStyle/>
+          <a:p>
+            <a:pPr algn="l" indent="0" marL="0">
+              <a:lnSpc>
+                <a:spcPts val="1680"/>
+              </a:lnSpc>
+              <a:spcBef>
+                <a:spcPts val="300"/>
+              </a:spcBef>
+              <a:spcAft>
+                <a:spcPts val="300"/>
+              </a:spcAft>
+              <a:buNone/>
+            </a:pPr>
+            <a:r>
+              <a:rPr lang="en-US" sz="1200" dirty="0">
+                <a:solidFill>
+                  <a:srgbClr val="1C2833"/>
+                </a:solidFill>
+                <a:latin typeface="Arial" pitchFamily="34" charset="0"/>
+                <a:ea typeface="Arial" pitchFamily="34" charset="-122"/>
+                <a:cs typeface="Arial" pitchFamily="34" charset="-120"/>
+              </a:rPr>
+              <a:t>Middle ·  · IKS Curriculum</a:t>
+            </a:r>
+            <a:endParaRPr lang="en-US" sz="1200" dirty="0"/>
+          </a:p>
+        </p:txBody>
+      </p:sp>
+    </p:spTree>
+  </p:cSld>
+  <p:clrMapOvr>
+    <a:masterClrMapping/>
+  </p:clrMapOvr>
+</p:sld>
+</file>
+
+<file path=ppt/slides/slide15.xml><?xml version="1.0" encoding="utf-8"?>
+<p:sld xmlns:a="http://schemas.openxmlformats.org/drawingml/2006/main" xmlns:r="http://schemas.openxmlformats.org/officeDocument/2006/relationships" xmlns:p="http://schemas.openxmlformats.org/presentationml/2006/main">
+  <p:cSld name="Slide 15">
+    <p:bg>
+      <p:bgPr>
+        <a:solidFill>
+          <a:srgbClr val="FFFFFF"/>
+        </a:solidFill>
+      </p:bgPr>
+    </p:bg>
+    <p:spTree>
+      <p:nvGrpSpPr>
+        <p:cNvPr id="1" name=""/>
+        <p:cNvGrpSpPr/>
+        <p:nvPr/>
+      </p:nvGrpSpPr>
+      <p:grpSpPr>
+        <a:xfrm>
+          <a:off x="0" y="0"/>
+          <a:ext cx="0" cy="0"/>
+          <a:chOff x="0" y="0"/>
+          <a:chExt cx="0" cy="0"/>
+        </a:xfrm>
+      </p:grpSpPr>
+      <p:sp>
+        <p:nvSpPr>
+          <p:cNvPr id="2" name="Text 0"/>
+          <p:cNvSpPr/>
+          <p:nvPr/>
+        </p:nvSpPr>
+        <p:spPr>
+          <a:xfrm>
+            <a:off x="0" y="0"/>
+            <a:ext cx="9144000" cy="101501"/>
+          </a:xfrm>
+          <a:prstGeom prst="rect">
+            <a:avLst/>
+          </a:prstGeom>
+          <a:solidFill>
+            <a:srgbClr val="277884"/>
+          </a:solidFill>
+          <a:ln/>
+        </p:spPr>
+        <p:txBody>
+          <a:bodyPr wrap="square" rtlCol="0" anchor="ctr"/>
+          <a:lstStyle/>
+          <a:p>
+            <a:pPr indent="0" marL="0">
+              <a:buNone/>
+            </a:pPr>
+            <a:endParaRPr lang="en-US" dirty="0"/>
+          </a:p>
+        </p:txBody>
+      </p:sp>
+      <p:sp>
+        <p:nvSpPr>
+          <p:cNvPr id="3" name="Text 1"/>
+          <p:cNvSpPr/>
+          <p:nvPr/>
+        </p:nvSpPr>
+        <p:spPr>
+          <a:xfrm>
+            <a:off x="406301" y="457051"/>
+            <a:ext cx="8498026" cy="274290"/>
+          </a:xfrm>
+          <a:prstGeom prst="rect">
+            <a:avLst/>
+          </a:prstGeom>
+          <a:noFill/>
+          <a:ln/>
+        </p:spPr>
+        <p:txBody>
+          <a:bodyPr wrap="square" lIns="0" tIns="0" rIns="0" bIns="0" rtlCol="0" anchor="t"/>
+          <a:lstStyle/>
+          <a:p>
+            <a:pPr algn="l" indent="0" marL="0">
+              <a:lnSpc>
+                <a:spcPts val="2160"/>
+              </a:lnSpc>
+              <a:spcBef>
+                <a:spcPts val="600"/>
+              </a:spcBef>
+              <a:spcAft>
+                <a:spcPts val="800"/>
+              </a:spcAft>
+              <a:buNone/>
+            </a:pPr>
+            <a:r>
+              <a:rPr lang="en-US" sz="1800" b="1" dirty="0">
+                <a:solidFill>
+                  <a:srgbClr val="FE4447"/>
+                </a:solidFill>
+                <a:latin typeface="Georgia" pitchFamily="34" charset="0"/>
+                <a:ea typeface="Georgia" pitchFamily="34" charset="-122"/>
+                <a:cs typeface="Georgia" pitchFamily="34" charset="-120"/>
+              </a:rPr>
+              <a:t>Student-facing content</a:t>
+            </a:r>
+            <a:endParaRPr lang="en-US" sz="1800" dirty="0"/>
+          </a:p>
+        </p:txBody>
+      </p:sp>
+      <p:sp>
+        <p:nvSpPr>
+          <p:cNvPr id="4" name="Text 2"/>
+          <p:cNvSpPr/>
+          <p:nvPr/>
+        </p:nvSpPr>
+        <p:spPr>
+          <a:xfrm>
+            <a:off x="406301" y="883593"/>
+            <a:ext cx="8331398" cy="3264694"/>
+          </a:xfrm>
+          <a:prstGeom prst="rect">
+            <a:avLst/>
+          </a:prstGeom>
+          <a:solidFill>
+            <a:srgbClr val="F4F8F9"/>
+          </a:solidFill>
+          <a:ln/>
+        </p:spPr>
+        <p:txBody>
+          <a:bodyPr wrap="square" rtlCol="0" anchor="ctr"/>
+          <a:lstStyle/>
+          <a:p>
+            <a:pPr indent="0" marL="0">
+              <a:buNone/>
+            </a:pPr>
+            <a:endParaRPr lang="en-US" dirty="0"/>
+          </a:p>
+        </p:txBody>
+      </p:sp>
+      <p:sp>
+        <p:nvSpPr>
+          <p:cNvPr id="5" name="Shape 3"/>
+          <p:cNvSpPr/>
+          <p:nvPr/>
+        </p:nvSpPr>
+        <p:spPr>
+          <a:xfrm>
+            <a:off x="434876" y="883593"/>
+            <a:ext cx="0" cy="3264694"/>
+          </a:xfrm>
+          <a:prstGeom prst="line">
+            <a:avLst/>
+          </a:prstGeom>
+          <a:noFill/>
+          <a:ln w="57150">
+            <a:solidFill>
+              <a:srgbClr val="FE4447"/>
+            </a:solidFill>
+            <a:prstDash val="solid"/>
+          </a:ln>
+        </p:spPr>
+      </p:sp>
+      <p:sp>
+        <p:nvSpPr>
+          <p:cNvPr id="6" name="Text 4"/>
+          <p:cNvSpPr/>
+          <p:nvPr/>
+        </p:nvSpPr>
+        <p:spPr>
+          <a:xfrm>
+            <a:off x="692051" y="1074093"/>
+            <a:ext cx="7973389" cy="230981"/>
+          </a:xfrm>
+          <a:prstGeom prst="rect">
+            <a:avLst/>
+          </a:prstGeom>
+          <a:noFill/>
+          <a:ln/>
+        </p:spPr>
+        <p:txBody>
+          <a:bodyPr wrap="square" lIns="0" tIns="0" rIns="0" bIns="0" rtlCol="0" anchor="t"/>
+          <a:lstStyle/>
+          <a:p>
+            <a:pPr algn="l" indent="0" marL="0">
+              <a:lnSpc>
+                <a:spcPts val="1820"/>
+              </a:lnSpc>
+              <a:spcBef>
+                <a:spcPts val="300"/>
+              </a:spcBef>
+              <a:spcAft>
+                <a:spcPts val="300"/>
+              </a:spcAft>
+              <a:buNone/>
+            </a:pPr>
+            <a:r>
+              <a:rPr lang="en-US" sz="1300" dirty="0">
+                <a:solidFill>
+                  <a:srgbClr val="1C2833"/>
+                </a:solidFill>
+                <a:latin typeface="Georgia" pitchFamily="34" charset="0"/>
+                <a:ea typeface="Georgia" pitchFamily="34" charset="-122"/>
+                <a:cs typeface="Georgia" pitchFamily="34" charset="-120"/>
+              </a:rPr>
+              <a:t>*</a:t>
+            </a:r>
+            <a:pPr algn="l" indent="0" marL="0">
+              <a:lnSpc>
+                <a:spcPts val="1820"/>
+              </a:lnSpc>
+              <a:spcBef>
+                <a:spcPts val="300"/>
+              </a:spcBef>
+              <a:spcAft>
+                <a:spcPts val="300"/>
+              </a:spcAft>
+              <a:buNone/>
+            </a:pPr>
+            <a:r>
+              <a:rPr lang="en-US" sz="1300" i="1" dirty="0">
+                <a:solidFill>
+                  <a:srgbClr val="1C2833"/>
+                </a:solidFill>
+                <a:latin typeface="Georgia" pitchFamily="34" charset="0"/>
+                <a:ea typeface="Georgia" pitchFamily="34" charset="-122"/>
+                <a:cs typeface="Georgia" pitchFamily="34" charset="-120"/>
+              </a:rPr>
+              <a:t>Complement (</a:t>
+            </a:r>
+            <a:pPr algn="l" indent="0" marL="0">
+              <a:lnSpc>
+                <a:spcPts val="1820"/>
+              </a:lnSpc>
+              <a:spcBef>
+                <a:spcPts val="300"/>
+              </a:spcBef>
+              <a:spcAft>
+                <a:spcPts val="300"/>
+              </a:spcAft>
+              <a:buNone/>
+            </a:pPr>
+            <a:r>
+              <a:rPr lang="en-US" sz="1300" dirty="0">
+                <a:solidFill>
+                  <a:srgbClr val="1C2833"/>
+                </a:solidFill>
+                <a:latin typeface="Georgia" pitchFamily="34" charset="0"/>
+                <a:ea typeface="Georgia" pitchFamily="34" charset="-122"/>
+                <a:cs typeface="Georgia" pitchFamily="34" charset="-120"/>
+              </a:rPr>
+              <a:t>pūraka</a:t>
+            </a:r>
+            <a:pPr algn="l" indent="0" marL="0">
+              <a:lnSpc>
+                <a:spcPts val="1820"/>
+              </a:lnSpc>
+              <a:spcBef>
+                <a:spcPts val="300"/>
+              </a:spcBef>
+              <a:spcAft>
+                <a:spcPts val="300"/>
+              </a:spcAft>
+              <a:buNone/>
+            </a:pPr>
+            <a:r>
+              <a:rPr lang="en-US" sz="1300" i="1" dirty="0">
+                <a:solidFill>
+                  <a:srgbClr val="1C2833"/>
+                </a:solidFill>
+                <a:latin typeface="Georgia" pitchFamily="34" charset="0"/>
+                <a:ea typeface="Georgia" pitchFamily="34" charset="-122"/>
+                <a:cs typeface="Georgia" pitchFamily="34" charset="-120"/>
+              </a:rPr>
+              <a:t>) to 100</a:t>
+            </a:r>
+            <a:pPr algn="l" indent="0" marL="0">
+              <a:lnSpc>
+                <a:spcPts val="1820"/>
+              </a:lnSpc>
+              <a:spcBef>
+                <a:spcPts val="300"/>
+              </a:spcBef>
+              <a:spcAft>
+                <a:spcPts val="300"/>
+              </a:spcAft>
+              <a:buNone/>
+            </a:pPr>
+            <a:r>
+              <a:rPr lang="en-US" sz="1300" dirty="0">
+                <a:solidFill>
+                  <a:srgbClr val="1C2833"/>
+                </a:solidFill>
+                <a:latin typeface="Georgia" pitchFamily="34" charset="0"/>
+                <a:ea typeface="Georgia" pitchFamily="34" charset="-122"/>
+                <a:cs typeface="Georgia" pitchFamily="34" charset="-120"/>
+              </a:rPr>
+              <a:t>*</a:t>
+            </a:r>
+            <a:endParaRPr lang="en-US" sz="1300" dirty="0"/>
+          </a:p>
+        </p:txBody>
+      </p:sp>
+      <p:sp>
+        <p:nvSpPr>
+          <p:cNvPr id="7" name="Text 5"/>
+          <p:cNvSpPr/>
+          <p:nvPr/>
+        </p:nvSpPr>
+        <p:spPr>
+          <a:xfrm>
+            <a:off x="692051" y="1343174"/>
+            <a:ext cx="7973389" cy="230981"/>
+          </a:xfrm>
+          <a:prstGeom prst="rect">
+            <a:avLst/>
+          </a:prstGeom>
+          <a:noFill/>
+          <a:ln/>
+        </p:spPr>
+        <p:txBody>
+          <a:bodyPr wrap="square" lIns="0" tIns="0" rIns="0" bIns="0" rtlCol="0" anchor="t"/>
+          <a:lstStyle/>
+          <a:p>
+            <a:pPr algn="l" indent="0" marL="0">
+              <a:lnSpc>
+                <a:spcPts val="1820"/>
+              </a:lnSpc>
+              <a:spcBef>
+                <a:spcPts val="300"/>
+              </a:spcBef>
+              <a:spcAft>
+                <a:spcPts val="300"/>
+              </a:spcAft>
+              <a:buNone/>
+            </a:pPr>
+            <a:r>
+              <a:rPr lang="en-US" sz="1300" i="1" dirty="0">
+                <a:solidFill>
+                  <a:srgbClr val="1C2833"/>
+                </a:solidFill>
+                <a:latin typeface="Georgia" pitchFamily="34" charset="0"/>
+                <a:ea typeface="Georgia" pitchFamily="34" charset="-122"/>
+                <a:cs typeface="Georgia" pitchFamily="34" charset="-120"/>
+              </a:rPr>
+              <a:t>For any 2-digit number AB:</a:t>
+            </a:r>
+            <a:endParaRPr lang="en-US" sz="1300" dirty="0"/>
+          </a:p>
+        </p:txBody>
+      </p:sp>
+      <p:sp>
+        <p:nvSpPr>
+          <p:cNvPr id="8" name="Text 6"/>
+          <p:cNvSpPr/>
+          <p:nvPr/>
+        </p:nvSpPr>
+        <p:spPr>
+          <a:xfrm>
+            <a:off x="692051" y="1612255"/>
+            <a:ext cx="7973389" cy="230981"/>
+          </a:xfrm>
+          <a:prstGeom prst="rect">
+            <a:avLst/>
+          </a:prstGeom>
+          <a:noFill/>
+          <a:ln/>
+        </p:spPr>
+        <p:txBody>
+          <a:bodyPr wrap="square" lIns="0" tIns="0" rIns="0" bIns="0" rtlCol="0" anchor="t"/>
+          <a:lstStyle/>
+          <a:p>
+            <a:pPr algn="l" indent="0" marL="0">
+              <a:lnSpc>
+                <a:spcPts val="1820"/>
+              </a:lnSpc>
+              <a:spcBef>
+                <a:spcPts val="300"/>
+              </a:spcBef>
+              <a:spcAft>
+                <a:spcPts val="300"/>
+              </a:spcAft>
+              <a:buNone/>
+            </a:pPr>
+            <a:r>
+              <a:rPr lang="en-US" sz="1300" dirty="0">
+                <a:solidFill>
+                  <a:srgbClr val="1C2833"/>
+                </a:solidFill>
+                <a:latin typeface="Georgia" pitchFamily="34" charset="0"/>
+                <a:ea typeface="Georgia" pitchFamily="34" charset="-122"/>
+                <a:cs typeface="Georgia" pitchFamily="34" charset="-120"/>
+              </a:rPr>
+              <a:t>Tens digit: </a:t>
+            </a:r>
+            <a:pPr algn="l" indent="0" marL="0">
+              <a:lnSpc>
+                <a:spcPts val="1820"/>
+              </a:lnSpc>
+              <a:spcBef>
+                <a:spcPts val="300"/>
+              </a:spcBef>
+              <a:spcAft>
+                <a:spcPts val="300"/>
+              </a:spcAft>
+              <a:buNone/>
+            </a:pPr>
+            <a:r>
+              <a:rPr lang="en-US" sz="1300" b="1" i="1" dirty="0">
+                <a:solidFill>
+                  <a:srgbClr val="1C2833"/>
+                </a:solidFill>
+                <a:latin typeface="Georgia" pitchFamily="34" charset="0"/>
+                <a:ea typeface="Georgia" pitchFamily="34" charset="-122"/>
+                <a:cs typeface="Georgia" pitchFamily="34" charset="-120"/>
+              </a:rPr>
+              <a:t>9 − A</a:t>
+            </a:r>
+            <a:endParaRPr lang="en-US" sz="1300" dirty="0"/>
+          </a:p>
+        </p:txBody>
+      </p:sp>
+      <p:sp>
+        <p:nvSpPr>
+          <p:cNvPr id="9" name="Text 7"/>
+          <p:cNvSpPr/>
+          <p:nvPr/>
+        </p:nvSpPr>
+        <p:spPr>
+          <a:xfrm>
+            <a:off x="692051" y="1881336"/>
+            <a:ext cx="7973389" cy="230981"/>
+          </a:xfrm>
+          <a:prstGeom prst="rect">
+            <a:avLst/>
+          </a:prstGeom>
+          <a:noFill/>
+          <a:ln/>
+        </p:spPr>
+        <p:txBody>
+          <a:bodyPr wrap="square" lIns="0" tIns="0" rIns="0" bIns="0" rtlCol="0" anchor="t"/>
+          <a:lstStyle/>
+          <a:p>
+            <a:pPr algn="l" indent="0" marL="0">
+              <a:lnSpc>
+                <a:spcPts val="1820"/>
+              </a:lnSpc>
+              <a:spcBef>
+                <a:spcPts val="300"/>
+              </a:spcBef>
+              <a:spcAft>
+                <a:spcPts val="300"/>
+              </a:spcAft>
+              <a:buNone/>
+            </a:pPr>
+            <a:r>
+              <a:rPr lang="en-US" sz="1300" dirty="0">
+                <a:solidFill>
+                  <a:srgbClr val="1C2833"/>
+                </a:solidFill>
+                <a:latin typeface="Georgia" pitchFamily="34" charset="0"/>
+                <a:ea typeface="Georgia" pitchFamily="34" charset="-122"/>
+                <a:cs typeface="Georgia" pitchFamily="34" charset="-120"/>
+              </a:rPr>
+              <a:t>Units digit: </a:t>
+            </a:r>
+            <a:pPr algn="l" indent="0" marL="0">
+              <a:lnSpc>
+                <a:spcPts val="1820"/>
+              </a:lnSpc>
+              <a:spcBef>
+                <a:spcPts val="300"/>
+              </a:spcBef>
+              <a:spcAft>
+                <a:spcPts val="300"/>
+              </a:spcAft>
+              <a:buNone/>
+            </a:pPr>
+            <a:r>
+              <a:rPr lang="en-US" sz="1300" b="1" i="1" dirty="0">
+                <a:solidFill>
+                  <a:srgbClr val="1C2833"/>
+                </a:solidFill>
+                <a:latin typeface="Georgia" pitchFamily="34" charset="0"/>
+                <a:ea typeface="Georgia" pitchFamily="34" charset="-122"/>
+                <a:cs typeface="Georgia" pitchFamily="34" charset="-120"/>
+              </a:rPr>
+              <a:t>10 − B</a:t>
+            </a:r>
+            <a:endParaRPr lang="en-US" sz="1300" dirty="0"/>
+          </a:p>
+        </p:txBody>
+      </p:sp>
+      <p:sp>
+        <p:nvSpPr>
+          <p:cNvPr id="10" name="Text 8"/>
+          <p:cNvSpPr/>
+          <p:nvPr/>
+        </p:nvSpPr>
+        <p:spPr>
+          <a:xfrm>
+            <a:off x="692051" y="2150418"/>
+            <a:ext cx="7973389" cy="230981"/>
+          </a:xfrm>
+          <a:prstGeom prst="rect">
+            <a:avLst/>
+          </a:prstGeom>
+          <a:noFill/>
+          <a:ln/>
+        </p:spPr>
+        <p:txBody>
+          <a:bodyPr wrap="square" lIns="0" tIns="0" rIns="0" bIns="0" rtlCol="0" anchor="t"/>
+          <a:lstStyle/>
+          <a:p>
+            <a:pPr algn="l" indent="0" marL="0">
+              <a:lnSpc>
+                <a:spcPts val="1820"/>
+              </a:lnSpc>
+              <a:spcBef>
+                <a:spcPts val="300"/>
+              </a:spcBef>
+              <a:spcAft>
+                <a:spcPts val="300"/>
+              </a:spcAft>
+              <a:buNone/>
+            </a:pPr>
+            <a:r>
+              <a:rPr lang="en-US" sz="1300" i="1" dirty="0">
+                <a:solidFill>
+                  <a:srgbClr val="1C2833"/>
+                </a:solidFill>
+                <a:latin typeface="Georgia" pitchFamily="34" charset="0"/>
+                <a:ea typeface="Georgia" pitchFamily="34" charset="-122"/>
+                <a:cs typeface="Georgia" pitchFamily="34" charset="-120"/>
+              </a:rPr>
+              <a:t>Examples:</a:t>
+            </a:r>
+            <a:endParaRPr lang="en-US" sz="1300" dirty="0"/>
+          </a:p>
+        </p:txBody>
+      </p:sp>
+      <p:sp>
+        <p:nvSpPr>
+          <p:cNvPr id="11" name="Text 9"/>
+          <p:cNvSpPr/>
+          <p:nvPr/>
+        </p:nvSpPr>
+        <p:spPr>
+          <a:xfrm>
+            <a:off x="692051" y="2419499"/>
+            <a:ext cx="7973389" cy="230981"/>
+          </a:xfrm>
+          <a:prstGeom prst="rect">
+            <a:avLst/>
+          </a:prstGeom>
+          <a:noFill/>
+          <a:ln/>
+        </p:spPr>
+        <p:txBody>
+          <a:bodyPr wrap="square" lIns="0" tIns="0" rIns="0" bIns="0" rtlCol="0" anchor="t"/>
+          <a:lstStyle/>
+          <a:p>
+            <a:pPr algn="l" indent="0" marL="0">
+              <a:lnSpc>
+                <a:spcPts val="1820"/>
+              </a:lnSpc>
+              <a:spcBef>
+                <a:spcPts val="300"/>
+              </a:spcBef>
+              <a:spcAft>
+                <a:spcPts val="300"/>
+              </a:spcAft>
+              <a:buNone/>
+            </a:pPr>
+            <a:r>
+              <a:rPr lang="en-US" sz="1300" i="1" dirty="0">
+                <a:solidFill>
+                  <a:srgbClr val="1C2833"/>
+                </a:solidFill>
+                <a:latin typeface="Georgia" pitchFamily="34" charset="0"/>
+                <a:ea typeface="Georgia" pitchFamily="34" charset="-122"/>
+                <a:cs typeface="Georgia" pitchFamily="34" charset="-120"/>
+              </a:rPr>
+              <a:t>73 → 27 (9−7=2, 10−3=7)</a:t>
+            </a:r>
+            <a:endParaRPr lang="en-US" sz="1300" dirty="0"/>
+          </a:p>
+        </p:txBody>
+      </p:sp>
+      <p:sp>
+        <p:nvSpPr>
+          <p:cNvPr id="12" name="Text 10"/>
+          <p:cNvSpPr/>
+          <p:nvPr/>
+        </p:nvSpPr>
+        <p:spPr>
+          <a:xfrm>
+            <a:off x="692051" y="2688580"/>
+            <a:ext cx="7973389" cy="230981"/>
+          </a:xfrm>
+          <a:prstGeom prst="rect">
+            <a:avLst/>
+          </a:prstGeom>
+          <a:noFill/>
+          <a:ln/>
+        </p:spPr>
+        <p:txBody>
+          <a:bodyPr wrap="square" lIns="0" tIns="0" rIns="0" bIns="0" rtlCol="0" anchor="t"/>
+          <a:lstStyle/>
+          <a:p>
+            <a:pPr algn="l" indent="0" marL="0">
+              <a:lnSpc>
+                <a:spcPts val="1820"/>
+              </a:lnSpc>
+              <a:spcBef>
+                <a:spcPts val="300"/>
+              </a:spcBef>
+              <a:spcAft>
+                <a:spcPts val="300"/>
+              </a:spcAft>
+              <a:buNone/>
+            </a:pPr>
+            <a:r>
+              <a:rPr lang="en-US" sz="1300" i="1" dirty="0">
+                <a:solidFill>
+                  <a:srgbClr val="1C2833"/>
+                </a:solidFill>
+                <a:latin typeface="Georgia" pitchFamily="34" charset="0"/>
+                <a:ea typeface="Georgia" pitchFamily="34" charset="-122"/>
+                <a:cs typeface="Georgia" pitchFamily="34" charset="-120"/>
+              </a:rPr>
+              <a:t>41 → 59 (9−4=5, 10−1=9)</a:t>
+            </a:r>
+            <a:endParaRPr lang="en-US" sz="1300" dirty="0"/>
+          </a:p>
+        </p:txBody>
+      </p:sp>
+      <p:sp>
+        <p:nvSpPr>
+          <p:cNvPr id="13" name="Text 11"/>
+          <p:cNvSpPr/>
+          <p:nvPr/>
+        </p:nvSpPr>
+        <p:spPr>
+          <a:xfrm>
+            <a:off x="692051" y="2957661"/>
+            <a:ext cx="7973389" cy="230981"/>
+          </a:xfrm>
+          <a:prstGeom prst="rect">
+            <a:avLst/>
+          </a:prstGeom>
+          <a:noFill/>
+          <a:ln/>
+        </p:spPr>
+        <p:txBody>
+          <a:bodyPr wrap="square" lIns="0" tIns="0" rIns="0" bIns="0" rtlCol="0" anchor="t"/>
+          <a:lstStyle/>
+          <a:p>
+            <a:pPr algn="l" indent="0" marL="0">
+              <a:lnSpc>
+                <a:spcPts val="1820"/>
+              </a:lnSpc>
+              <a:spcBef>
+                <a:spcPts val="300"/>
+              </a:spcBef>
+              <a:spcAft>
+                <a:spcPts val="300"/>
+              </a:spcAft>
+              <a:buNone/>
+            </a:pPr>
+            <a:r>
+              <a:rPr lang="en-US" sz="1300" i="1" dirty="0">
+                <a:solidFill>
+                  <a:srgbClr val="1C2833"/>
+                </a:solidFill>
+                <a:latin typeface="Georgia" pitchFamily="34" charset="0"/>
+                <a:ea typeface="Georgia" pitchFamily="34" charset="-122"/>
+                <a:cs typeface="Georgia" pitchFamily="34" charset="-120"/>
+              </a:rPr>
+              <a:t>95 → 05 (9−9=0, 10−5=5)</a:t>
+            </a:r>
+            <a:endParaRPr lang="en-US" sz="1300" dirty="0"/>
+          </a:p>
+        </p:txBody>
+      </p:sp>
+      <p:sp>
+        <p:nvSpPr>
+          <p:cNvPr id="14" name="Text 12"/>
+          <p:cNvSpPr/>
+          <p:nvPr/>
+        </p:nvSpPr>
+        <p:spPr>
+          <a:xfrm>
+            <a:off x="692051" y="3226743"/>
+            <a:ext cx="7973389" cy="230981"/>
+          </a:xfrm>
+          <a:prstGeom prst="rect">
+            <a:avLst/>
+          </a:prstGeom>
+          <a:noFill/>
+          <a:ln/>
+        </p:spPr>
+        <p:txBody>
+          <a:bodyPr wrap="square" lIns="0" tIns="0" rIns="0" bIns="0" rtlCol="0" anchor="t"/>
+          <a:lstStyle/>
+          <a:p>
+            <a:pPr algn="l" indent="0" marL="0">
+              <a:lnSpc>
+                <a:spcPts val="1820"/>
+              </a:lnSpc>
+              <a:spcBef>
+                <a:spcPts val="300"/>
+              </a:spcBef>
+              <a:spcAft>
+                <a:spcPts val="300"/>
+              </a:spcAft>
+              <a:buNone/>
+            </a:pPr>
+            <a:r>
+              <a:rPr lang="en-US" sz="1300" i="1" dirty="0">
+                <a:solidFill>
+                  <a:srgbClr val="1C2833"/>
+                </a:solidFill>
+                <a:latin typeface="Georgia" pitchFamily="34" charset="0"/>
+                <a:ea typeface="Georgia" pitchFamily="34" charset="-122"/>
+                <a:cs typeface="Georgia" pitchFamily="34" charset="-120"/>
+              </a:rPr>
+              <a:t>Verify by adding: number + complement = 100.</a:t>
+            </a:r>
+            <a:endParaRPr lang="en-US" sz="1300" dirty="0"/>
+          </a:p>
+        </p:txBody>
+      </p:sp>
+      <p:sp>
+        <p:nvSpPr>
+          <p:cNvPr id="15" name="Text 13"/>
+          <p:cNvSpPr/>
+          <p:nvPr/>
+        </p:nvSpPr>
+        <p:spPr>
+          <a:xfrm>
+            <a:off x="692051" y="3495824"/>
+            <a:ext cx="7973389" cy="461963"/>
+          </a:xfrm>
+          <a:prstGeom prst="rect">
+            <a:avLst/>
+          </a:prstGeom>
+          <a:noFill/>
+          <a:ln/>
+        </p:spPr>
+        <p:txBody>
+          <a:bodyPr wrap="square" lIns="0" tIns="0" rIns="0" bIns="0" rtlCol="0" anchor="t"/>
+          <a:lstStyle/>
+          <a:p>
+            <a:pPr algn="l" indent="0" marL="0">
+              <a:lnSpc>
+                <a:spcPts val="1820"/>
+              </a:lnSpc>
+              <a:spcBef>
+                <a:spcPts val="300"/>
+              </a:spcBef>
+              <a:spcAft>
+                <a:spcPts val="300"/>
+              </a:spcAft>
+              <a:buNone/>
+            </a:pPr>
+            <a:r>
+              <a:rPr lang="en-US" sz="1300" dirty="0">
+                <a:solidFill>
+                  <a:srgbClr val="1C2833"/>
+                </a:solidFill>
+                <a:latin typeface="Georgia" pitchFamily="34" charset="0"/>
+                <a:ea typeface="Georgia" pitchFamily="34" charset="-122"/>
+                <a:cs typeface="Georgia" pitchFamily="34" charset="-120"/>
+              </a:rPr>
+              <a:t>&gt; Tirthaji's </a:t>
+            </a:r>
+            <a:pPr algn="l" indent="0" marL="0">
+              <a:lnSpc>
+                <a:spcPts val="1820"/>
+              </a:lnSpc>
+              <a:spcBef>
+                <a:spcPts val="300"/>
+              </a:spcBef>
+              <a:spcAft>
+                <a:spcPts val="300"/>
+              </a:spcAft>
+              <a:buNone/>
+            </a:pPr>
+            <a:r>
+              <a:rPr lang="en-US" sz="1300" i="1" dirty="0">
+                <a:solidFill>
+                  <a:srgbClr val="1C2833"/>
+                </a:solidFill>
+                <a:latin typeface="Georgia" pitchFamily="34" charset="0"/>
+                <a:ea typeface="Georgia" pitchFamily="34" charset="-122"/>
+                <a:cs typeface="Georgia" pitchFamily="34" charset="-120"/>
+              </a:rPr>
+              <a:t>Vedic Mathematics</a:t>
+            </a:r>
+            <a:pPr algn="l" indent="0" marL="0">
+              <a:lnSpc>
+                <a:spcPts val="1820"/>
+              </a:lnSpc>
+              <a:spcBef>
+                <a:spcPts val="300"/>
+              </a:spcBef>
+              <a:spcAft>
+                <a:spcPts val="300"/>
+              </a:spcAft>
+              <a:buNone/>
+            </a:pPr>
+            <a:r>
+              <a:rPr lang="en-US" sz="1300" dirty="0">
+                <a:solidFill>
+                  <a:srgbClr val="1C2833"/>
+                </a:solidFill>
+                <a:latin typeface="Georgia" pitchFamily="34" charset="0"/>
+                <a:ea typeface="Georgia" pitchFamily="34" charset="-122"/>
+                <a:cs typeface="Georgia" pitchFamily="34" charset="-120"/>
+              </a:rPr>
+              <a:t> (1965) gives the rule as </a:t>
+            </a:r>
+            <a:pPr algn="l" indent="0" marL="0">
+              <a:lnSpc>
+                <a:spcPts val="1820"/>
+              </a:lnSpc>
+              <a:spcBef>
+                <a:spcPts val="300"/>
+              </a:spcBef>
+              <a:spcAft>
+                <a:spcPts val="300"/>
+              </a:spcAft>
+              <a:buNone/>
+            </a:pPr>
+            <a:r>
+              <a:rPr lang="en-US" sz="1300" i="1" dirty="0">
+                <a:solidFill>
+                  <a:srgbClr val="1C2833"/>
+                </a:solidFill>
+                <a:latin typeface="Georgia" pitchFamily="34" charset="0"/>
+                <a:ea typeface="Georgia" pitchFamily="34" charset="-122"/>
+                <a:cs typeface="Georgia" pitchFamily="34" charset="-120"/>
+              </a:rPr>
+              <a:t>Nikhilaṁ Navataścaramaṁ Daśataḥ</a:t>
+            </a:r>
+            <a:pPr algn="l" indent="0" marL="0">
+              <a:lnSpc>
+                <a:spcPts val="1820"/>
+              </a:lnSpc>
+              <a:spcBef>
+                <a:spcPts val="300"/>
+              </a:spcBef>
+              <a:spcAft>
+                <a:spcPts val="300"/>
+              </a:spcAft>
+              <a:buNone/>
+            </a:pPr>
+            <a:r>
+              <a:rPr lang="en-US" sz="1300" dirty="0">
+                <a:solidFill>
+                  <a:srgbClr val="1C2833"/>
+                </a:solidFill>
+                <a:latin typeface="Georgia" pitchFamily="34" charset="0"/>
+                <a:ea typeface="Georgia" pitchFamily="34" charset="-122"/>
+                <a:cs typeface="Georgia" pitchFamily="34" charset="-120"/>
+              </a:rPr>
+              <a:t> — and a "complement to 100" is just the rule applied to two digits.</a:t>
+            </a:r>
+            <a:endParaRPr lang="en-US" sz="1300" dirty="0"/>
+          </a:p>
+        </p:txBody>
+      </p:sp>
+      <p:sp>
+        <p:nvSpPr>
+          <p:cNvPr id="16" name="Text 14"/>
+          <p:cNvSpPr/>
+          <p:nvPr/>
+        </p:nvSpPr>
+        <p:spPr>
+          <a:xfrm>
+            <a:off x="406301" y="4434929"/>
+            <a:ext cx="8498026" cy="213271"/>
+          </a:xfrm>
+          <a:prstGeom prst="rect">
+            <a:avLst/>
+          </a:prstGeom>
+          <a:noFill/>
+          <a:ln/>
+        </p:spPr>
+        <p:txBody>
+          <a:bodyPr wrap="square" lIns="0" tIns="0" rIns="0" bIns="0" rtlCol="0" anchor="t"/>
+          <a:lstStyle/>
+          <a:p>
+            <a:pPr algn="l" indent="0" marL="0">
+              <a:lnSpc>
+                <a:spcPts val="1680"/>
+              </a:lnSpc>
+              <a:spcBef>
+                <a:spcPts val="300"/>
+              </a:spcBef>
+              <a:spcAft>
+                <a:spcPts val="300"/>
+              </a:spcAft>
+              <a:buNone/>
+            </a:pPr>
+            <a:r>
+              <a:rPr lang="en-US" sz="1200" dirty="0">
+                <a:solidFill>
+                  <a:srgbClr val="1C2833"/>
+                </a:solidFill>
+                <a:latin typeface="Arial" pitchFamily="34" charset="0"/>
+                <a:ea typeface="Arial" pitchFamily="34" charset="-122"/>
+                <a:cs typeface="Arial" pitchFamily="34" charset="-120"/>
+              </a:rPr>
+              <a:t>Middle ·  · IKS Curriculum</a:t>
+            </a:r>
+            <a:endParaRPr lang="en-US" sz="1200" dirty="0"/>
+          </a:p>
+        </p:txBody>
+      </p:sp>
+    </p:spTree>
+  </p:cSld>
+  <p:clrMapOvr>
+    <a:masterClrMapping/>
+  </p:clrMapOvr>
+</p:sld>
+</file>
+
+<file path=ppt/slides/slide16.xml><?xml version="1.0" encoding="utf-8"?>
+<p:sld xmlns:a="http://schemas.openxmlformats.org/drawingml/2006/main" xmlns:r="http://schemas.openxmlformats.org/officeDocument/2006/relationships" xmlns:p="http://schemas.openxmlformats.org/presentationml/2006/main">
+  <p:cSld name="Slide 16">
+    <p:bg>
+      <p:bgPr>
+        <a:solidFill>
+          <a:srgbClr val="FFFFFF"/>
+        </a:solidFill>
+      </p:bgPr>
+    </p:bg>
+    <p:spTree>
+      <p:nvGrpSpPr>
+        <p:cNvPr id="1" name=""/>
+        <p:cNvGrpSpPr/>
+        <p:nvPr/>
+      </p:nvGrpSpPr>
+      <p:grpSpPr>
+        <a:xfrm>
+          <a:off x="0" y="0"/>
+          <a:ext cx="0" cy="0"/>
+          <a:chOff x="0" y="0"/>
+          <a:chExt cx="0" cy="0"/>
+        </a:xfrm>
+      </p:grpSpPr>
+      <p:sp>
+        <p:nvSpPr>
+          <p:cNvPr id="2" name="Text 0"/>
+          <p:cNvSpPr/>
+          <p:nvPr/>
+        </p:nvSpPr>
+        <p:spPr>
+          <a:xfrm>
+            <a:off x="0" y="0"/>
+            <a:ext cx="9144000" cy="101501"/>
+          </a:xfrm>
+          <a:prstGeom prst="rect">
+            <a:avLst/>
+          </a:prstGeom>
+          <a:solidFill>
+            <a:srgbClr val="277884"/>
+          </a:solidFill>
+          <a:ln/>
+        </p:spPr>
+        <p:txBody>
+          <a:bodyPr wrap="square" rtlCol="0" anchor="ctr"/>
+          <a:lstStyle/>
+          <a:p>
+            <a:pPr indent="0" marL="0">
+              <a:buNone/>
+            </a:pPr>
+            <a:endParaRPr lang="en-US" dirty="0"/>
+          </a:p>
+        </p:txBody>
+      </p:sp>
+      <p:sp>
+        <p:nvSpPr>
+          <p:cNvPr id="3" name="Text 1"/>
+          <p:cNvSpPr/>
+          <p:nvPr/>
+        </p:nvSpPr>
+        <p:spPr>
+          <a:xfrm>
+            <a:off x="406301" y="457051"/>
+            <a:ext cx="8498026" cy="274290"/>
+          </a:xfrm>
+          <a:prstGeom prst="rect">
+            <a:avLst/>
+          </a:prstGeom>
+          <a:noFill/>
+          <a:ln/>
+        </p:spPr>
+        <p:txBody>
+          <a:bodyPr wrap="square" lIns="0" tIns="0" rIns="0" bIns="0" rtlCol="0" anchor="t"/>
+          <a:lstStyle/>
+          <a:p>
+            <a:pPr algn="l" indent="0" marL="0">
+              <a:lnSpc>
+                <a:spcPts val="2160"/>
+              </a:lnSpc>
+              <a:spcBef>
+                <a:spcPts val="600"/>
+              </a:spcBef>
+              <a:spcAft>
+                <a:spcPts val="800"/>
+              </a:spcAft>
+              <a:buNone/>
+            </a:pPr>
+            <a:r>
+              <a:rPr lang="en-US" sz="1800" b="1" dirty="0">
+                <a:solidFill>
+                  <a:srgbClr val="FE4447"/>
+                </a:solidFill>
+                <a:latin typeface="Georgia" pitchFamily="34" charset="0"/>
+                <a:ea typeface="Georgia" pitchFamily="34" charset="-122"/>
+                <a:cs typeface="Georgia" pitchFamily="34" charset="-120"/>
+              </a:rPr>
+              <a:t>Homework</a:t>
+            </a:r>
+            <a:endParaRPr lang="en-US" sz="1800" dirty="0"/>
+          </a:p>
+        </p:txBody>
+      </p:sp>
+      <p:sp>
+        <p:nvSpPr>
+          <p:cNvPr id="4" name="Text 2"/>
+          <p:cNvSpPr/>
+          <p:nvPr/>
+        </p:nvSpPr>
+        <p:spPr>
+          <a:xfrm>
+            <a:off x="634901" y="883593"/>
+            <a:ext cx="8102798" cy="731341"/>
+          </a:xfrm>
+          <a:prstGeom prst="rect">
+            <a:avLst/>
+          </a:prstGeom>
+          <a:noFill/>
+          <a:ln/>
+        </p:spPr>
+        <p:txBody>
+          <a:bodyPr wrap="square" lIns="0" tIns="0" rIns="0" bIns="0" rtlCol="0" anchor="t"/>
+          <a:lstStyle/>
+          <a:p>
+            <a:pPr algn="l" marL="342900" indent="-342900">
+              <a:lnSpc>
+                <a:spcPts val="1620"/>
+              </a:lnSpc>
+              <a:spcAft>
+                <a:spcPts val="300"/>
+              </a:spcAft>
+              <a:buSzPct val="100000"/>
+              <a:buChar char="•"/>
+            </a:pPr>
+            <a:r>
+              <a:rPr lang="en-US" sz="1200" dirty="0">
+                <a:solidFill>
+                  <a:srgbClr val="1C2833"/>
+                </a:solidFill>
+                <a:latin typeface="Arial" pitchFamily="34" charset="0"/>
+                <a:ea typeface="Arial" pitchFamily="34" charset="-122"/>
+                <a:cs typeface="Arial" pitchFamily="34" charset="-120"/>
+              </a:rPr>
+              <a:t>Memorise complements to 100 of the multiples of 5: 5, 10, 15, 20, 25, 30, 35, 40, 45, 50, 55, 60, 65, 70, 75, 80, 85, 90, 95. These should become automatic.</a:t>
+            </a:r>
+            <a:endParaRPr lang="en-US" sz="1200" dirty="0"/>
+          </a:p>
+          <a:p>
+            <a:pPr algn="l" marL="342900" indent="-342900">
+              <a:lnSpc>
+                <a:spcPts val="1620"/>
+              </a:lnSpc>
+              <a:spcAft>
+                <a:spcPts val="300"/>
+              </a:spcAft>
+              <a:buSzPct val="100000"/>
+              <a:buChar char="•"/>
+            </a:pPr>
+            <a:r>
+              <a:rPr lang="en-US" sz="1200" dirty="0">
+                <a:solidFill>
+                  <a:srgbClr val="1C2833"/>
+                </a:solidFill>
+                <a:latin typeface="Arial" pitchFamily="34" charset="0"/>
+                <a:ea typeface="Arial" pitchFamily="34" charset="-122"/>
+                <a:cs typeface="Arial" pitchFamily="34" charset="-120"/>
+              </a:rPr>
+              <a:t>Time yourself: 20 random complements in under 60 seconds. Practise twice.</a:t>
+            </a:r>
+            <a:endParaRPr lang="en-US" sz="1200" dirty="0"/>
+          </a:p>
+        </p:txBody>
+      </p:sp>
+      <p:sp>
+        <p:nvSpPr>
+          <p:cNvPr id="5" name="Text 3"/>
+          <p:cNvSpPr/>
+          <p:nvPr/>
+        </p:nvSpPr>
+        <p:spPr>
+          <a:xfrm>
+            <a:off x="406301" y="4434929"/>
+            <a:ext cx="8498026" cy="213271"/>
+          </a:xfrm>
+          <a:prstGeom prst="rect">
+            <a:avLst/>
+          </a:prstGeom>
+          <a:noFill/>
+          <a:ln/>
+        </p:spPr>
+        <p:txBody>
+          <a:bodyPr wrap="square" lIns="0" tIns="0" rIns="0" bIns="0" rtlCol="0" anchor="t"/>
+          <a:lstStyle/>
+          <a:p>
+            <a:pPr algn="l" indent="0" marL="0">
+              <a:lnSpc>
+                <a:spcPts val="1680"/>
+              </a:lnSpc>
+              <a:spcBef>
+                <a:spcPts val="300"/>
+              </a:spcBef>
+              <a:spcAft>
+                <a:spcPts val="300"/>
+              </a:spcAft>
+              <a:buNone/>
+            </a:pPr>
+            <a:r>
+              <a:rPr lang="en-US" sz="1200" dirty="0">
+                <a:solidFill>
+                  <a:srgbClr val="1C2833"/>
+                </a:solidFill>
+                <a:latin typeface="Arial" pitchFamily="34" charset="0"/>
+                <a:ea typeface="Arial" pitchFamily="34" charset="-122"/>
+                <a:cs typeface="Arial" pitchFamily="34" charset="-120"/>
+              </a:rPr>
+              <a:t>Middle ·  · IKS Curriculum</a:t>
+            </a:r>
+            <a:endParaRPr lang="en-US" sz="1200" dirty="0"/>
+          </a:p>
+        </p:txBody>
+      </p:sp>
+    </p:spTree>
+  </p:cSld>
+  <p:clrMapOvr>
+    <a:masterClrMapping/>
+  </p:clrMapOvr>
+</p:sld>
+</file>
+
+<file path=ppt/slides/slide17.xml><?xml version="1.0" encoding="utf-8"?>
+<p:sld xmlns:a="http://schemas.openxmlformats.org/drawingml/2006/main" xmlns:r="http://schemas.openxmlformats.org/officeDocument/2006/relationships" xmlns:p="http://schemas.openxmlformats.org/presentationml/2006/main">
+  <p:cSld name="Slide 17">
+    <p:bg>
+      <p:bgPr>
+        <a:solidFill>
+          <a:srgbClr val="FFFFFF"/>
+        </a:solidFill>
+      </p:bgPr>
+    </p:bg>
+    <p:spTree>
+      <p:nvGrpSpPr>
+        <p:cNvPr id="1" name=""/>
+        <p:cNvGrpSpPr/>
+        <p:nvPr/>
+      </p:nvGrpSpPr>
+      <p:grpSpPr>
+        <a:xfrm>
+          <a:off x="0" y="0"/>
+          <a:ext cx="0" cy="0"/>
+          <a:chOff x="0" y="0"/>
+          <a:chExt cx="0" cy="0"/>
+        </a:xfrm>
+      </p:grpSpPr>
+      <p:sp>
+        <p:nvSpPr>
+          <p:cNvPr id="2" name="Text 0"/>
+          <p:cNvSpPr/>
+          <p:nvPr/>
+        </p:nvSpPr>
+        <p:spPr>
+          <a:xfrm>
+            <a:off x="0" y="0"/>
+            <a:ext cx="9144000" cy="101501"/>
+          </a:xfrm>
+          <a:prstGeom prst="rect">
+            <a:avLst/>
+          </a:prstGeom>
+          <a:solidFill>
+            <a:srgbClr val="277884"/>
+          </a:solidFill>
+          <a:ln/>
+        </p:spPr>
+        <p:txBody>
+          <a:bodyPr wrap="square" rtlCol="0" anchor="ctr"/>
+          <a:lstStyle/>
+          <a:p>
+            <a:pPr indent="0" marL="0">
+              <a:buNone/>
+            </a:pPr>
+            <a:endParaRPr lang="en-US" dirty="0"/>
+          </a:p>
+        </p:txBody>
+      </p:sp>
+      <p:sp>
+        <p:nvSpPr>
+          <p:cNvPr id="3" name="Text 1"/>
+          <p:cNvSpPr/>
+          <p:nvPr/>
+        </p:nvSpPr>
+        <p:spPr>
+          <a:xfrm>
+            <a:off x="406301" y="457051"/>
+            <a:ext cx="8498026" cy="274290"/>
+          </a:xfrm>
+          <a:prstGeom prst="rect">
+            <a:avLst/>
+          </a:prstGeom>
+          <a:noFill/>
+          <a:ln/>
+        </p:spPr>
+        <p:txBody>
+          <a:bodyPr wrap="square" lIns="0" tIns="0" rIns="0" bIns="0" rtlCol="0" anchor="t"/>
+          <a:lstStyle/>
+          <a:p>
+            <a:pPr algn="l" indent="0" marL="0">
+              <a:lnSpc>
+                <a:spcPts val="2160"/>
+              </a:lnSpc>
+              <a:spcBef>
+                <a:spcPts val="600"/>
+              </a:spcBef>
+              <a:spcAft>
+                <a:spcPts val="800"/>
+              </a:spcAft>
+              <a:buNone/>
+            </a:pPr>
+            <a:r>
+              <a:rPr lang="en-US" sz="1800" b="1" dirty="0">
+                <a:solidFill>
+                  <a:srgbClr val="FE4447"/>
+                </a:solidFill>
+                <a:latin typeface="Georgia" pitchFamily="34" charset="0"/>
+                <a:ea typeface="Georgia" pitchFamily="34" charset="-122"/>
+                <a:cs typeface="Georgia" pitchFamily="34" charset="-120"/>
+              </a:rPr>
+              <a:t>Differentiation</a:t>
+            </a:r>
+            <a:endParaRPr lang="en-US" sz="1800" dirty="0"/>
+          </a:p>
+        </p:txBody>
+      </p:sp>
+      <p:sp>
+        <p:nvSpPr>
+          <p:cNvPr id="4" name="Text 2"/>
+          <p:cNvSpPr/>
+          <p:nvPr/>
+        </p:nvSpPr>
+        <p:spPr>
+          <a:xfrm>
+            <a:off x="634901" y="883593"/>
+            <a:ext cx="8102798" cy="731341"/>
+          </a:xfrm>
+          <a:prstGeom prst="rect">
+            <a:avLst/>
+          </a:prstGeom>
+          <a:noFill/>
+          <a:ln/>
+        </p:spPr>
+        <p:txBody>
+          <a:bodyPr wrap="square" lIns="0" tIns="0" rIns="0" bIns="0" rtlCol="0" anchor="t"/>
+          <a:lstStyle/>
+          <a:p>
+            <a:pPr algn="l" marL="342900" indent="-342900">
+              <a:lnSpc>
+                <a:spcPts val="1620"/>
+              </a:lnSpc>
+              <a:spcAft>
+                <a:spcPts val="300"/>
+              </a:spcAft>
+              <a:buSzPct val="100000"/>
+              <a:buChar char="•"/>
+            </a:pPr>
+            <a:r>
+              <a:rPr lang="en-US" sz="1200" b="1" dirty="0">
+                <a:solidFill>
+                  <a:srgbClr val="1C2833"/>
+                </a:solidFill>
+                <a:latin typeface="Arial" pitchFamily="34" charset="0"/>
+                <a:ea typeface="Arial" pitchFamily="34" charset="-122"/>
+                <a:cs typeface="Arial" pitchFamily="34" charset="-120"/>
+              </a:rPr>
+              <a:t>Tier up:</a:t>
+            </a:r>
+            <a:pPr algn="l" indent="0" marL="0">
+              <a:lnSpc>
+                <a:spcPts val="1620"/>
+              </a:lnSpc>
+              <a:spcAft>
+                <a:spcPts val="300"/>
+              </a:spcAft>
+              <a:buNone/>
+            </a:pPr>
+            <a:r>
+              <a:rPr lang="en-US" sz="1200" dirty="0">
+                <a:solidFill>
+                  <a:srgbClr val="1C2833"/>
+                </a:solidFill>
+                <a:latin typeface="Arial" pitchFamily="34" charset="0"/>
+                <a:ea typeface="Arial" pitchFamily="34" charset="-122"/>
+                <a:cs typeface="Arial" pitchFamily="34" charset="-120"/>
+              </a:rPr>
+              <a:t> Try complements to 200, 300, 500. The rule modifies — find complement to 100, then adjust. (Tier-up students should be able to articulate that adjustment by the end of class.)</a:t>
+            </a:r>
+            <a:endParaRPr lang="en-US" sz="1200" dirty="0"/>
+          </a:p>
+          <a:p>
+            <a:pPr algn="l" marL="342900" indent="-342900">
+              <a:lnSpc>
+                <a:spcPts val="1620"/>
+              </a:lnSpc>
+              <a:spcAft>
+                <a:spcPts val="300"/>
+              </a:spcAft>
+              <a:buSzPct val="100000"/>
+              <a:buChar char="•"/>
+            </a:pPr>
+            <a:r>
+              <a:rPr lang="en-US" sz="1200" b="1" dirty="0">
+                <a:solidFill>
+                  <a:srgbClr val="1C2833"/>
+                </a:solidFill>
+                <a:latin typeface="Arial" pitchFamily="34" charset="0"/>
+                <a:ea typeface="Arial" pitchFamily="34" charset="-122"/>
+                <a:cs typeface="Arial" pitchFamily="34" charset="-120"/>
+              </a:rPr>
+              <a:t>Tier down:</a:t>
+            </a:r>
+            <a:pPr algn="l" indent="0" marL="0">
+              <a:lnSpc>
+                <a:spcPts val="1620"/>
+              </a:lnSpc>
+              <a:spcAft>
+                <a:spcPts val="300"/>
+              </a:spcAft>
+              <a:buNone/>
+            </a:pPr>
+            <a:r>
+              <a:rPr lang="en-US" sz="1200" dirty="0">
+                <a:solidFill>
+                  <a:srgbClr val="1C2833"/>
+                </a:solidFill>
+                <a:latin typeface="Arial" pitchFamily="34" charset="0"/>
+                <a:ea typeface="Arial" pitchFamily="34" charset="-122"/>
+                <a:cs typeface="Arial" pitchFamily="34" charset="-120"/>
+              </a:rPr>
+              <a:t> Use the rule only when both digits of the number are non-zero. Trailing zeros will be drilled on Day 3.</a:t>
+            </a:r>
+            <a:endParaRPr lang="en-US" sz="1200" dirty="0"/>
+          </a:p>
+        </p:txBody>
+      </p:sp>
+      <p:sp>
+        <p:nvSpPr>
+          <p:cNvPr id="5" name="Text 3"/>
+          <p:cNvSpPr/>
+          <p:nvPr/>
+        </p:nvSpPr>
+        <p:spPr>
+          <a:xfrm>
+            <a:off x="406301" y="4434929"/>
+            <a:ext cx="8498026" cy="213271"/>
+          </a:xfrm>
+          <a:prstGeom prst="rect">
+            <a:avLst/>
+          </a:prstGeom>
+          <a:noFill/>
+          <a:ln/>
+        </p:spPr>
+        <p:txBody>
+          <a:bodyPr wrap="square" lIns="0" tIns="0" rIns="0" bIns="0" rtlCol="0" anchor="t"/>
+          <a:lstStyle/>
+          <a:p>
+            <a:pPr algn="l" indent="0" marL="0">
+              <a:lnSpc>
+                <a:spcPts val="1680"/>
+              </a:lnSpc>
+              <a:spcBef>
+                <a:spcPts val="300"/>
+              </a:spcBef>
+              <a:spcAft>
+                <a:spcPts val="300"/>
+              </a:spcAft>
+              <a:buNone/>
+            </a:pPr>
+            <a:r>
+              <a:rPr lang="en-US" sz="1200" dirty="0">
+                <a:solidFill>
+                  <a:srgbClr val="1C2833"/>
+                </a:solidFill>
+                <a:latin typeface="Arial" pitchFamily="34" charset="0"/>
+                <a:ea typeface="Arial" pitchFamily="34" charset="-122"/>
+                <a:cs typeface="Arial" pitchFamily="34" charset="-120"/>
+              </a:rPr>
+              <a:t>Middle ·  · IKS Curriculum</a:t>
+            </a:r>
+            <a:endParaRPr lang="en-US" sz="1200" dirty="0"/>
+          </a:p>
+        </p:txBody>
+      </p:sp>
+    </p:spTree>
+  </p:cSld>
+  <p:clrMapOvr>
+    <a:masterClrMapping/>
+  </p:clrMapOvr>
+</p:sld>
+</file>
+
+<file path=ppt/slides/slide18.xml><?xml version="1.0" encoding="utf-8"?>
+<p:sld xmlns:a="http://schemas.openxmlformats.org/drawingml/2006/main" xmlns:r="http://schemas.openxmlformats.org/officeDocument/2006/relationships" xmlns:p="http://schemas.openxmlformats.org/presentationml/2006/main">
+  <p:cSld name="Slide 18">
+    <p:bg>
+      <p:bgPr>
+        <a:solidFill>
+          <a:srgbClr val="FFFFFF"/>
+        </a:solidFill>
+      </p:bgPr>
+    </p:bg>
+    <p:spTree>
+      <p:nvGrpSpPr>
+        <p:cNvPr id="1" name=""/>
+        <p:cNvGrpSpPr/>
+        <p:nvPr/>
+      </p:nvGrpSpPr>
+      <p:grpSpPr>
+        <a:xfrm>
+          <a:off x="0" y="0"/>
+          <a:ext cx="0" cy="0"/>
+          <a:chOff x="0" y="0"/>
+          <a:chExt cx="0" cy="0"/>
+        </a:xfrm>
+      </p:grpSpPr>
+      <p:sp>
+        <p:nvSpPr>
+          <p:cNvPr id="2" name="Text 0"/>
+          <p:cNvSpPr/>
+          <p:nvPr/>
+        </p:nvSpPr>
+        <p:spPr>
+          <a:xfrm>
+            <a:off x="0" y="0"/>
+            <a:ext cx="9144000" cy="101501"/>
+          </a:xfrm>
+          <a:prstGeom prst="rect">
+            <a:avLst/>
+          </a:prstGeom>
+          <a:solidFill>
+            <a:srgbClr val="277884"/>
+          </a:solidFill>
+          <a:ln/>
+        </p:spPr>
+        <p:txBody>
+          <a:bodyPr wrap="square" rtlCol="0" anchor="ctr"/>
+          <a:lstStyle/>
+          <a:p>
+            <a:pPr indent="0" marL="0">
+              <a:buNone/>
+            </a:pPr>
+            <a:endParaRPr lang="en-US" dirty="0"/>
+          </a:p>
+        </p:txBody>
+      </p:sp>
+      <p:sp>
+        <p:nvSpPr>
+          <p:cNvPr id="3" name="Text 1"/>
+          <p:cNvSpPr/>
+          <p:nvPr/>
+        </p:nvSpPr>
+        <p:spPr>
+          <a:xfrm>
+            <a:off x="406301" y="457051"/>
+            <a:ext cx="8498026" cy="274290"/>
+          </a:xfrm>
+          <a:prstGeom prst="rect">
+            <a:avLst/>
+          </a:prstGeom>
+          <a:noFill/>
+          <a:ln/>
+        </p:spPr>
+        <p:txBody>
+          <a:bodyPr wrap="square" lIns="0" tIns="0" rIns="0" bIns="0" rtlCol="0" anchor="t"/>
+          <a:lstStyle/>
+          <a:p>
+            <a:pPr algn="l" indent="0" marL="0">
+              <a:lnSpc>
+                <a:spcPts val="2160"/>
+              </a:lnSpc>
+              <a:spcBef>
+                <a:spcPts val="600"/>
+              </a:spcBef>
+              <a:spcAft>
+                <a:spcPts val="800"/>
+              </a:spcAft>
+              <a:buNone/>
+            </a:pPr>
+            <a:r>
+              <a:rPr lang="en-US" sz="1800" b="1" dirty="0">
+                <a:solidFill>
+                  <a:srgbClr val="FE4447"/>
+                </a:solidFill>
+                <a:latin typeface="Georgia" pitchFamily="34" charset="0"/>
+                <a:ea typeface="Georgia" pitchFamily="34" charset="-122"/>
+                <a:cs typeface="Georgia" pitchFamily="34" charset="-120"/>
+              </a:rPr>
+              <a:t>Teacher notes</a:t>
+            </a:r>
+            <a:endParaRPr lang="en-US" sz="1800" dirty="0"/>
+          </a:p>
+        </p:txBody>
+      </p:sp>
+      <p:sp>
+        <p:nvSpPr>
+          <p:cNvPr id="4" name="Text 2"/>
+          <p:cNvSpPr/>
+          <p:nvPr/>
+        </p:nvSpPr>
+        <p:spPr>
+          <a:xfrm>
+            <a:off x="634901" y="883593"/>
+            <a:ext cx="8102798" cy="1405533"/>
+          </a:xfrm>
+          <a:prstGeom prst="rect">
+            <a:avLst/>
+          </a:prstGeom>
+          <a:noFill/>
+          <a:ln/>
+        </p:spPr>
+        <p:txBody>
+          <a:bodyPr wrap="square" lIns="0" tIns="0" rIns="0" bIns="0" rtlCol="0" anchor="t"/>
+          <a:lstStyle/>
+          <a:p>
+            <a:pPr algn="l" marL="342900" indent="-342900">
+              <a:lnSpc>
+                <a:spcPts val="1620"/>
+              </a:lnSpc>
+              <a:spcAft>
+                <a:spcPts val="300"/>
+              </a:spcAft>
+              <a:buSzPct val="100000"/>
+              <a:buChar char="•"/>
+            </a:pPr>
+            <a:r>
+              <a:rPr lang="en-US" sz="1200" dirty="0">
+                <a:solidFill>
+                  <a:srgbClr val="1C2833"/>
+                </a:solidFill>
+                <a:latin typeface="Arial" pitchFamily="34" charset="0"/>
+                <a:ea typeface="Arial" pitchFamily="34" charset="-122"/>
+                <a:cs typeface="Arial" pitchFamily="34" charset="-120"/>
+              </a:rPr>
+              <a:t>Most common error today: 9 − 0 = 9 (correct) but 10 − 0 = 10 (cannot be a digit). Students will write </a:t>
+            </a:r>
+            <a:pPr algn="l" indent="0" marL="0">
+              <a:lnSpc>
+                <a:spcPts val="1620"/>
+              </a:lnSpc>
+              <a:spcAft>
+                <a:spcPts val="300"/>
+              </a:spcAft>
+              <a:buNone/>
+            </a:pPr>
+            <a:r>
+              <a:rPr lang="en-US" sz="1200" dirty="0">
+                <a:solidFill>
+                  <a:srgbClr val="1C2833"/>
+                </a:solidFill>
+                <a:latin typeface="Arial" pitchFamily="34" charset="0"/>
+                <a:ea typeface="Arial" pitchFamily="34" charset="-122"/>
+                <a:cs typeface="Arial" pitchFamily="34" charset="-120"/>
+              </a:rPr>
+              <a:t>0</a:t>
+            </a:r>
+            <a:pPr algn="l" indent="0" marL="0">
+              <a:lnSpc>
+                <a:spcPts val="1620"/>
+              </a:lnSpc>
+              <a:spcAft>
+                <a:spcPts val="300"/>
+              </a:spcAft>
+              <a:buNone/>
+            </a:pPr>
+            <a:r>
+              <a:rPr lang="en-US" sz="1200" dirty="0">
+                <a:solidFill>
+                  <a:srgbClr val="1C2833"/>
+                </a:solidFill>
+                <a:latin typeface="Arial" pitchFamily="34" charset="0"/>
+                <a:ea typeface="Arial" pitchFamily="34" charset="-122"/>
+                <a:cs typeface="Arial" pitchFamily="34" charset="-120"/>
+              </a:rPr>
+              <a:t> and lose 10. Reinforce: if the last digit is 0, the complement's last digit is also 0, and the "10" gets absorbed into the next column. Or: just note that the rule cleanly handles non-zero last digits; trailing zeros are a quick edge-case.</a:t>
+            </a:r>
+            <a:endParaRPr lang="en-US" sz="1200" dirty="0"/>
+          </a:p>
+          <a:p>
+            <a:pPr algn="l" marL="342900" indent="-342900">
+              <a:lnSpc>
+                <a:spcPts val="1620"/>
+              </a:lnSpc>
+              <a:spcAft>
+                <a:spcPts val="300"/>
+              </a:spcAft>
+              <a:buSzPct val="100000"/>
+              <a:buChar char="•"/>
+            </a:pPr>
+            <a:r>
+              <a:rPr lang="en-US" sz="1200" dirty="0">
+                <a:solidFill>
+                  <a:srgbClr val="1C2833"/>
+                </a:solidFill>
+                <a:latin typeface="Arial" pitchFamily="34" charset="0"/>
+                <a:ea typeface="Arial" pitchFamily="34" charset="-122"/>
+                <a:cs typeface="Arial" pitchFamily="34" charset="-120"/>
+              </a:rPr>
+              <a:t>Many students try to do this in their head WITHOUT going digit-by-digit. That's fine if they get the right answer — but make sure they can </a:t>
+            </a:r>
+            <a:pPr algn="l" indent="0" marL="0">
+              <a:lnSpc>
+                <a:spcPts val="1620"/>
+              </a:lnSpc>
+              <a:spcAft>
+                <a:spcPts val="300"/>
+              </a:spcAft>
+              <a:buNone/>
+            </a:pPr>
+            <a:r>
+              <a:rPr lang="en-US" sz="1200" i="1" dirty="0">
+                <a:solidFill>
+                  <a:srgbClr val="1C2833"/>
+                </a:solidFill>
+                <a:latin typeface="Arial" pitchFamily="34" charset="0"/>
+                <a:ea typeface="Arial" pitchFamily="34" charset="-122"/>
+                <a:cs typeface="Arial" pitchFamily="34" charset="-120"/>
+              </a:rPr>
+              <a:t>show</a:t>
+            </a:r>
+            <a:pPr algn="l" indent="0" marL="0">
+              <a:lnSpc>
+                <a:spcPts val="1620"/>
+              </a:lnSpc>
+              <a:spcAft>
+                <a:spcPts val="300"/>
+              </a:spcAft>
+              <a:buNone/>
+            </a:pPr>
+            <a:r>
+              <a:rPr lang="en-US" sz="1200" dirty="0">
+                <a:solidFill>
+                  <a:srgbClr val="1C2833"/>
+                </a:solidFill>
+                <a:latin typeface="Arial" pitchFamily="34" charset="0"/>
+                <a:ea typeface="Arial" pitchFamily="34" charset="-122"/>
+                <a:cs typeface="Arial" pitchFamily="34" charset="-120"/>
+              </a:rPr>
+              <a:t> the digit-wise method when asked. Day 6's "why it works" depends on the digit-wise framing.</a:t>
+            </a:r>
+            <a:endParaRPr lang="en-US" sz="1200" dirty="0"/>
+          </a:p>
+          <a:p>
+            <a:pPr algn="l" marL="342900" indent="-342900">
+              <a:lnSpc>
+                <a:spcPts val="1620"/>
+              </a:lnSpc>
+              <a:spcAft>
+                <a:spcPts val="300"/>
+              </a:spcAft>
+              <a:buSzPct val="100000"/>
+              <a:buChar char="•"/>
+            </a:pPr>
+            <a:r>
+              <a:rPr lang="en-US" sz="1200" dirty="0">
+                <a:solidFill>
+                  <a:srgbClr val="1C2833"/>
+                </a:solidFill>
+                <a:latin typeface="Arial" pitchFamily="34" charset="0"/>
+                <a:ea typeface="Arial" pitchFamily="34" charset="-122"/>
+                <a:cs typeface="Arial" pitchFamily="34" charset="-120"/>
+              </a:rPr>
+              <a:t>Pair students with different reflexes. The faster-reflex student often models; the slower benefits.</a:t>
+            </a:r>
+            <a:endParaRPr lang="en-US" sz="1200" dirty="0"/>
+          </a:p>
+        </p:txBody>
+      </p:sp>
+      <p:sp>
+        <p:nvSpPr>
+          <p:cNvPr id="5" name="Text 3"/>
+          <p:cNvSpPr/>
+          <p:nvPr/>
+        </p:nvSpPr>
+        <p:spPr>
+          <a:xfrm>
+            <a:off x="406301" y="4434929"/>
+            <a:ext cx="8498026" cy="213271"/>
+          </a:xfrm>
+          <a:prstGeom prst="rect">
+            <a:avLst/>
+          </a:prstGeom>
+          <a:noFill/>
+          <a:ln/>
+        </p:spPr>
+        <p:txBody>
+          <a:bodyPr wrap="square" lIns="0" tIns="0" rIns="0" bIns="0" rtlCol="0" anchor="t"/>
+          <a:lstStyle/>
+          <a:p>
+            <a:pPr algn="l" indent="0" marL="0">
+              <a:lnSpc>
+                <a:spcPts val="1680"/>
+              </a:lnSpc>
+              <a:spcBef>
+                <a:spcPts val="300"/>
+              </a:spcBef>
+              <a:spcAft>
+                <a:spcPts val="300"/>
+              </a:spcAft>
+              <a:buNone/>
+            </a:pPr>
+            <a:r>
+              <a:rPr lang="en-US" sz="1200" dirty="0">
+                <a:solidFill>
+                  <a:srgbClr val="1C2833"/>
+                </a:solidFill>
+                <a:latin typeface="Arial" pitchFamily="34" charset="0"/>
+                <a:ea typeface="Arial" pitchFamily="34" charset="-122"/>
+                <a:cs typeface="Arial" pitchFamily="34" charset="-120"/>
+              </a:rPr>
+              <a:t>Middle ·  · IKS Curriculum</a:t>
+            </a:r>
+            <a:endParaRPr lang="en-US" sz="1200" dirty="0"/>
+          </a:p>
+        </p:txBody>
+      </p:sp>
+    </p:spTree>
+  </p:cSld>
+  <p:clrMapOvr>
+    <a:masterClrMapping/>
+  </p:clrMapOvr>
+</p:sld>
+</file>
+
+<file path=ppt/slides/slide19.xml><?xml version="1.0" encoding="utf-8"?>
+<p:sld xmlns:a="http://schemas.openxmlformats.org/drawingml/2006/main" xmlns:r="http://schemas.openxmlformats.org/officeDocument/2006/relationships" xmlns:p="http://schemas.openxmlformats.org/presentationml/2006/main">
+  <p:cSld name="Slide 19">
+    <p:bg>
+      <p:bgPr>
+        <a:solidFill>
+          <a:srgbClr val="FFFFFF"/>
+        </a:solidFill>
+      </p:bgPr>
+    </p:bg>
+    <p:spTree>
+      <p:nvGrpSpPr>
+        <p:cNvPr id="1" name=""/>
+        <p:cNvGrpSpPr/>
+        <p:nvPr/>
+      </p:nvGrpSpPr>
+      <p:grpSpPr>
+        <a:xfrm>
+          <a:off x="0" y="0"/>
+          <a:ext cx="0" cy="0"/>
+          <a:chOff x="0" y="0"/>
+          <a:chExt cx="0" cy="0"/>
+        </a:xfrm>
+      </p:grpSpPr>
+      <p:sp>
+        <p:nvSpPr>
+          <p:cNvPr id="2" name="Text 0"/>
+          <p:cNvSpPr/>
+          <p:nvPr/>
+        </p:nvSpPr>
+        <p:spPr>
+          <a:xfrm>
+            <a:off x="0" y="0"/>
+            <a:ext cx="9144000" cy="101501"/>
+          </a:xfrm>
+          <a:prstGeom prst="rect">
+            <a:avLst/>
+          </a:prstGeom>
+          <a:solidFill>
+            <a:srgbClr val="277884"/>
+          </a:solidFill>
+          <a:ln/>
+        </p:spPr>
+        <p:txBody>
+          <a:bodyPr wrap="square" rtlCol="0" anchor="ctr"/>
+          <a:lstStyle/>
+          <a:p>
+            <a:pPr indent="0" marL="0">
+              <a:buNone/>
+            </a:pPr>
+            <a:endParaRPr lang="en-US" dirty="0"/>
+          </a:p>
+        </p:txBody>
+      </p:sp>
+      <p:sp>
+        <p:nvSpPr>
+          <p:cNvPr id="3" name="Text 1"/>
+          <p:cNvSpPr/>
+          <p:nvPr/>
+        </p:nvSpPr>
+        <p:spPr>
+          <a:xfrm>
+            <a:off x="406301" y="457051"/>
+            <a:ext cx="8498026" cy="274290"/>
+          </a:xfrm>
+          <a:prstGeom prst="rect">
+            <a:avLst/>
+          </a:prstGeom>
+          <a:noFill/>
+          <a:ln/>
+        </p:spPr>
+        <p:txBody>
+          <a:bodyPr wrap="square" lIns="0" tIns="0" rIns="0" bIns="0" rtlCol="0" anchor="t"/>
+          <a:lstStyle/>
+          <a:p>
+            <a:pPr algn="l" indent="0" marL="0">
+              <a:lnSpc>
+                <a:spcPts val="2160"/>
+              </a:lnSpc>
+              <a:spcBef>
+                <a:spcPts val="600"/>
+              </a:spcBef>
+              <a:spcAft>
+                <a:spcPts val="800"/>
+              </a:spcAft>
+              <a:buNone/>
+            </a:pPr>
+            <a:r>
+              <a:rPr lang="en-US" sz="1800" b="1" dirty="0">
+                <a:solidFill>
+                  <a:srgbClr val="FE4447"/>
+                </a:solidFill>
+                <a:latin typeface="Georgia" pitchFamily="34" charset="0"/>
+                <a:ea typeface="Georgia" pitchFamily="34" charset="-122"/>
+                <a:cs typeface="Georgia" pitchFamily="34" charset="-120"/>
+              </a:rPr>
               <a:t>Citation(s) used in this lesson</a:t>
             </a:r>
             <a:endParaRPr lang="en-US" sz="1800" dirty="0"/>
@@ -2966,8 +6671,8 @@
         </p:nvSpPr>
         <p:spPr>
           <a:xfrm>
-            <a:off x="406301" y="870942"/>
-            <a:ext cx="8498026" cy="213271"/>
+            <a:off x="634901" y="883593"/>
+            <a:ext cx="8102798" cy="281880"/>
           </a:xfrm>
           <a:prstGeom prst="rect">
             <a:avLst/>
@@ -2979,17 +6684,15 @@
           <a:bodyPr wrap="square" lIns="0" tIns="0" rIns="0" bIns="0" rtlCol="0" anchor="t"/>
           <a:lstStyle/>
           <a:p>
-            <a:pPr algn="l" indent="0" marL="0">
-              <a:lnSpc>
-                <a:spcPts val="1680"/>
-              </a:lnSpc>
-              <a:spcBef>
-                <a:spcPts val="300"/>
-              </a:spcBef>
-              <a:spcAft>
-                <a:spcPts val="300"/>
-              </a:spcAft>
-              <a:buNone/>
+            <a:pPr algn="l" marL="342900" indent="-342900">
+              <a:lnSpc>
+                <a:spcPts val="1620"/>
+              </a:lnSpc>
+              <a:spcAft>
+                <a:spcPts val="300"/>
+              </a:spcAft>
+              <a:buSzPct val="100000"/>
+              <a:buChar char="•"/>
             </a:pPr>
             <a:r>
               <a:rPr lang="en-US" sz="1200" dirty="0">
@@ -3000,15 +6703,12 @@
                 <a:ea typeface="Arial" pitchFamily="34" charset="-122"/>
                 <a:cs typeface="Arial" pitchFamily="34" charset="-120"/>
               </a:rPr>
-              <a:t>– Tirthaji, </a:t>
-            </a:r>
-            <a:pPr algn="l" indent="0" marL="0">
-              <a:lnSpc>
-                <a:spcPts val="1680"/>
-              </a:lnSpc>
-              <a:spcBef>
-                <a:spcPts val="300"/>
-              </a:spcBef>
+              <a:t>Tirthaji, </a:t>
+            </a:r>
+            <a:pPr algn="l" indent="0" marL="0">
+              <a:lnSpc>
+                <a:spcPts val="1620"/>
+              </a:lnSpc>
               <a:spcAft>
                 <a:spcPts val="300"/>
               </a:spcAft>
@@ -3027,11 +6727,8 @@
             </a:r>
             <a:pPr algn="l" indent="0" marL="0">
               <a:lnSpc>
-                <a:spcPts val="1680"/>
-              </a:lnSpc>
-              <a:spcBef>
-                <a:spcPts val="300"/>
-              </a:spcBef>
+                <a:spcPts val="1620"/>
+              </a:lnSpc>
               <a:spcAft>
                 <a:spcPts val="300"/>
               </a:spcAft>
@@ -3204,7 +6901,7 @@
                 <a:ea typeface="Georgia" pitchFamily="34" charset="-122"/>
                 <a:cs typeface="Georgia" pitchFamily="34" charset="-120"/>
               </a:rPr>
-              <a:t>Materials</a:t>
+              <a:t>Learning objective</a:t>
             </a:r>
             <a:endParaRPr lang="en-US" sz="1800" dirty="0"/>
           </a:p>
@@ -3219,7 +6916,7 @@
         <p:spPr>
           <a:xfrm>
             <a:off x="406301" y="870942"/>
-            <a:ext cx="8498026" cy="436066"/>
+            <a:ext cx="8498026" cy="426541"/>
           </a:xfrm>
           <a:prstGeom prst="rect">
             <a:avLst/>
@@ -3252,7 +6949,7 @@
                 <a:ea typeface="Arial" pitchFamily="34" charset="-122"/>
                 <a:cs typeface="Arial" pitchFamily="34" charset="-120"/>
               </a:rPr>
-              <a:t>– Whiteboards or scrap paper for live drills – A printed wall poster: </a:t>
+              <a:t>By the end of this lesson, students will find the complement (</a:t>
             </a:r>
             <a:pPr algn="l" indent="0" marL="0">
               <a:lnSpc>
@@ -3267,6 +6964,29 @@
               <a:buNone/>
             </a:pPr>
             <a:r>
+              <a:rPr lang="en-US" sz="1200" i="1" dirty="0">
+                <a:solidFill>
+                  <a:srgbClr val="1C2833"/>
+                </a:solidFill>
+                <a:latin typeface="Arial" pitchFamily="34" charset="0"/>
+                <a:ea typeface="Arial" pitchFamily="34" charset="-122"/>
+                <a:cs typeface="Arial" pitchFamily="34" charset="-120"/>
+              </a:rPr>
+              <a:t>pūraka</a:t>
+            </a:r>
+            <a:pPr algn="l" indent="0" marL="0">
+              <a:lnSpc>
+                <a:spcPts val="1680"/>
+              </a:lnSpc>
+              <a:spcBef>
+                <a:spcPts val="300"/>
+              </a:spcBef>
+              <a:spcAft>
+                <a:spcPts val="300"/>
+              </a:spcAft>
+              <a:buNone/>
+            </a:pPr>
+            <a:r>
               <a:rPr lang="en-US" sz="1200" dirty="0">
                 <a:solidFill>
                   <a:srgbClr val="1C2833"/>
@@ -3275,30 +6995,7 @@
                 <a:ea typeface="Arial" pitchFamily="34" charset="-122"/>
                 <a:cs typeface="Arial" pitchFamily="34" charset="-120"/>
               </a:rPr>
-              <a:t>9, 9, 9, 9, 9, ... 10</a:t>
-            </a:r>
-            <a:pPr algn="l" indent="0" marL="0">
-              <a:lnSpc>
-                <a:spcPts val="1680"/>
-              </a:lnSpc>
-              <a:spcBef>
-                <a:spcPts val="300"/>
-              </a:spcBef>
-              <a:spcAft>
-                <a:spcPts val="300"/>
-              </a:spcAft>
-              <a:buNone/>
-            </a:pPr>
-            <a:r>
-              <a:rPr lang="en-US" sz="1200" dirty="0">
-                <a:solidFill>
-                  <a:srgbClr val="1C2833"/>
-                </a:solidFill>
-                <a:latin typeface="Arial" pitchFamily="34" charset="0"/>
-                <a:ea typeface="Arial" pitchFamily="34" charset="-122"/>
-                <a:cs typeface="Arial" pitchFamily="34" charset="-120"/>
-              </a:rPr>
-              <a:t> showing the digit-wise rule visually – Pair-drill sheets (20 two-digit numbers each) – Stopwatch (one per pair)</a:t>
+              <a:t>) of any 2-digit number to 100 in under 3 seconds, using the Nikhilam rule applied to two digits.</a:t>
             </a:r>
             <a:endParaRPr lang="en-US" sz="1200" dirty="0"/>
           </a:p>
@@ -3456,7 +7153,7 @@
                 <a:ea typeface="Georgia" pitchFamily="34" charset="-122"/>
                 <a:cs typeface="Georgia" pitchFamily="34" charset="-120"/>
               </a:rPr>
-              <a:t>Vocabulary introduced today</a:t>
+              <a:t>Materials</a:t>
             </a:r>
             <a:endParaRPr lang="en-US" sz="1800" dirty="0"/>
           </a:p>
@@ -3471,7 +7168,7 @@
         <p:spPr>
           <a:xfrm>
             <a:off x="634901" y="883593"/>
-            <a:ext cx="8102798" cy="281880"/>
+            <a:ext cx="8102798" cy="1032272"/>
           </a:xfrm>
           <a:prstGeom prst="rect">
             <a:avLst/>
@@ -3494,24 +7191,28 @@
               <a:buChar char="•"/>
             </a:pPr>
             <a:r>
-              <a:rPr lang="en-US" sz="1200" i="1" dirty="0">
-                <a:solidFill>
-                  <a:srgbClr val="1C2833"/>
-                </a:solidFill>
-                <a:latin typeface="Arial" pitchFamily="34" charset="0"/>
-                <a:ea typeface="Arial" pitchFamily="34" charset="-122"/>
-                <a:cs typeface="Arial" pitchFamily="34" charset="-120"/>
-              </a:rPr>
-              <a:t>pūraka</a:t>
-            </a:r>
-            <a:pPr algn="l" indent="0" marL="0">
+              <a:rPr lang="en-US" sz="1200" dirty="0">
+                <a:solidFill>
+                  <a:srgbClr val="1C2833"/>
+                </a:solidFill>
+                <a:latin typeface="Arial" pitchFamily="34" charset="0"/>
+                <a:ea typeface="Arial" pitchFamily="34" charset="-122"/>
+                <a:cs typeface="Arial" pitchFamily="34" charset="-120"/>
+              </a:rPr>
+              <a:t>Whiteboards or scrap paper for live drills</a:t>
+            </a:r>
+            <a:endParaRPr lang="en-US" sz="1200" dirty="0"/>
+          </a:p>
+          <a:p>
+            <a:pPr algn="l" marL="342900" indent="-342900">
               <a:lnSpc>
                 <a:spcPts val="1620"/>
               </a:lnSpc>
               <a:spcAft>
                 <a:spcPts val="300"/>
               </a:spcAft>
-              <a:buNone/>
+              <a:buSzPct val="100000"/>
+              <a:buChar char="•"/>
             </a:pPr>
             <a:r>
               <a:rPr lang="en-US" sz="1200" dirty="0">
@@ -3522,7 +7223,7 @@
                 <a:ea typeface="Arial" pitchFamily="34" charset="-122"/>
                 <a:cs typeface="Arial" pitchFamily="34" charset="-120"/>
               </a:rPr>
-              <a:t> (IAST: pūraka; lit. "that which completes") — the </a:t>
+              <a:t>A printed wall poster: </a:t>
             </a:r>
             <a:pPr algn="l" indent="0" marL="0">
               <a:lnSpc>
@@ -3534,15 +7235,15 @@
               <a:buNone/>
             </a:pPr>
             <a:r>
-              <a:rPr lang="en-US" sz="1200" b="1" dirty="0">
-                <a:solidFill>
-                  <a:srgbClr val="1C2833"/>
-                </a:solidFill>
-                <a:latin typeface="Arial" pitchFamily="34" charset="0"/>
-                <a:ea typeface="Arial" pitchFamily="34" charset="-122"/>
-                <a:cs typeface="Arial" pitchFamily="34" charset="-120"/>
-              </a:rPr>
-              <a:t>complement</a:t>
+              <a:rPr lang="en-US" sz="1200" dirty="0">
+                <a:solidFill>
+                  <a:srgbClr val="1C2833"/>
+                </a:solidFill>
+                <a:latin typeface="Arial" pitchFamily="34" charset="0"/>
+                <a:ea typeface="Arial" pitchFamily="34" charset="-122"/>
+                <a:cs typeface="Arial" pitchFamily="34" charset="-120"/>
+              </a:rPr>
+              <a:t>9, 9, 9, 9, 9, ... 10</a:t>
             </a:r>
             <a:pPr algn="l" indent="0" marL="0">
               <a:lnSpc>
@@ -3562,7 +7263,55 @@
                 <a:ea typeface="Arial" pitchFamily="34" charset="-122"/>
                 <a:cs typeface="Arial" pitchFamily="34" charset="-120"/>
               </a:rPr>
-              <a:t>: the number you add to fill up to 100, 1000, etc.</a:t>
+              <a:t> showing the digit-wise rule visually</a:t>
+            </a:r>
+            <a:endParaRPr lang="en-US" sz="1200" dirty="0"/>
+          </a:p>
+          <a:p>
+            <a:pPr algn="l" marL="342900" indent="-342900">
+              <a:lnSpc>
+                <a:spcPts val="1620"/>
+              </a:lnSpc>
+              <a:spcAft>
+                <a:spcPts val="300"/>
+              </a:spcAft>
+              <a:buSzPct val="100000"/>
+              <a:buChar char="•"/>
+            </a:pPr>
+            <a:r>
+              <a:rPr lang="en-US" sz="1200" dirty="0">
+                <a:solidFill>
+                  <a:srgbClr val="1C2833"/>
+                </a:solidFill>
+                <a:latin typeface="Arial" pitchFamily="34" charset="0"/>
+                <a:ea typeface="Arial" pitchFamily="34" charset="-122"/>
+                <a:cs typeface="Arial" pitchFamily="34" charset="-120"/>
+              </a:rPr>
+              <a:t>Pair-drill sheets (20 two-digit numbers each)</a:t>
+            </a:r>
+            <a:endParaRPr lang="en-US" sz="1200" dirty="0"/>
+          </a:p>
+          <a:p>
+            <a:pPr algn="l" marL="342900" indent="-342900">
+              <a:lnSpc>
+                <a:spcPts val="1620"/>
+              </a:lnSpc>
+              <a:spcAft>
+                <a:spcPts val="300"/>
+              </a:spcAft>
+              <a:buSzPct val="100000"/>
+              <a:buChar char="•"/>
+            </a:pPr>
+            <a:r>
+              <a:rPr lang="en-US" sz="1200" dirty="0">
+                <a:solidFill>
+                  <a:srgbClr val="1C2833"/>
+                </a:solidFill>
+                <a:latin typeface="Arial" pitchFamily="34" charset="0"/>
+                <a:ea typeface="Arial" pitchFamily="34" charset="-122"/>
+                <a:cs typeface="Arial" pitchFamily="34" charset="-120"/>
+              </a:rPr>
+              <a:t>Stopwatch (one per pair)</a:t>
             </a:r>
             <a:endParaRPr lang="en-US" sz="1200" dirty="0"/>
           </a:p>
@@ -3720,7 +7469,7 @@
                 <a:ea typeface="Georgia" pitchFamily="34" charset="-122"/>
                 <a:cs typeface="Georgia" pitchFamily="34" charset="-120"/>
               </a:rPr>
-              <a:t>Lesson flow</a:t>
+              <a:t>Vocabulary introduced today</a:t>
             </a:r>
             <a:endParaRPr lang="en-US" sz="1800" dirty="0"/>
           </a:p>
@@ -3729,6 +7478,112 @@
       <p:sp>
         <p:nvSpPr>
           <p:cNvPr id="4" name="Text 2"/>
+          <p:cNvSpPr/>
+          <p:nvPr/>
+        </p:nvSpPr>
+        <p:spPr>
+          <a:xfrm>
+            <a:off x="634901" y="883593"/>
+            <a:ext cx="8102798" cy="281880"/>
+          </a:xfrm>
+          <a:prstGeom prst="rect">
+            <a:avLst/>
+          </a:prstGeom>
+          <a:noFill/>
+          <a:ln/>
+        </p:spPr>
+        <p:txBody>
+          <a:bodyPr wrap="square" lIns="0" tIns="0" rIns="0" bIns="0" rtlCol="0" anchor="t"/>
+          <a:lstStyle/>
+          <a:p>
+            <a:pPr algn="l" marL="342900" indent="-342900">
+              <a:lnSpc>
+                <a:spcPts val="1620"/>
+              </a:lnSpc>
+              <a:spcAft>
+                <a:spcPts val="300"/>
+              </a:spcAft>
+              <a:buSzPct val="100000"/>
+              <a:buChar char="•"/>
+            </a:pPr>
+            <a:r>
+              <a:rPr lang="en-US" sz="1200" i="1" dirty="0">
+                <a:solidFill>
+                  <a:srgbClr val="1C2833"/>
+                </a:solidFill>
+                <a:latin typeface="Arial" pitchFamily="34" charset="0"/>
+                <a:ea typeface="Arial" pitchFamily="34" charset="-122"/>
+                <a:cs typeface="Arial" pitchFamily="34" charset="-120"/>
+              </a:rPr>
+              <a:t>pūraka</a:t>
+            </a:r>
+            <a:pPr algn="l" indent="0" marL="0">
+              <a:lnSpc>
+                <a:spcPts val="1620"/>
+              </a:lnSpc>
+              <a:spcAft>
+                <a:spcPts val="300"/>
+              </a:spcAft>
+              <a:buNone/>
+            </a:pPr>
+            <a:r>
+              <a:rPr lang="en-US" sz="1200" dirty="0">
+                <a:solidFill>
+                  <a:srgbClr val="1C2833"/>
+                </a:solidFill>
+                <a:latin typeface="Arial" pitchFamily="34" charset="0"/>
+                <a:ea typeface="Arial" pitchFamily="34" charset="-122"/>
+                <a:cs typeface="Arial" pitchFamily="34" charset="-120"/>
+              </a:rPr>
+              <a:t> (IAST: pūraka; lit. "that which completes") — the </a:t>
+            </a:r>
+            <a:pPr algn="l" indent="0" marL="0">
+              <a:lnSpc>
+                <a:spcPts val="1620"/>
+              </a:lnSpc>
+              <a:spcAft>
+                <a:spcPts val="300"/>
+              </a:spcAft>
+              <a:buNone/>
+            </a:pPr>
+            <a:r>
+              <a:rPr lang="en-US" sz="1200" b="1" dirty="0">
+                <a:solidFill>
+                  <a:srgbClr val="1C2833"/>
+                </a:solidFill>
+                <a:latin typeface="Arial" pitchFamily="34" charset="0"/>
+                <a:ea typeface="Arial" pitchFamily="34" charset="-122"/>
+                <a:cs typeface="Arial" pitchFamily="34" charset="-120"/>
+              </a:rPr>
+              <a:t>complement</a:t>
+            </a:r>
+            <a:pPr algn="l" indent="0" marL="0">
+              <a:lnSpc>
+                <a:spcPts val="1620"/>
+              </a:lnSpc>
+              <a:spcAft>
+                <a:spcPts val="300"/>
+              </a:spcAft>
+              <a:buNone/>
+            </a:pPr>
+            <a:r>
+              <a:rPr lang="en-US" sz="1200" dirty="0">
+                <a:solidFill>
+                  <a:srgbClr val="1C2833"/>
+                </a:solidFill>
+                <a:latin typeface="Arial" pitchFamily="34" charset="0"/>
+                <a:ea typeface="Arial" pitchFamily="34" charset="-122"/>
+                <a:cs typeface="Arial" pitchFamily="34" charset="-120"/>
+              </a:rPr>
+              <a:t>: the number you add to fill up to 100, 1000, etc.</a:t>
+            </a:r>
+            <a:endParaRPr lang="en-US" sz="1200" dirty="0"/>
+          </a:p>
+        </p:txBody>
+      </p:sp>
+      <p:sp>
+        <p:nvSpPr>
+          <p:cNvPr id="5" name="Text 3"/>
           <p:cNvSpPr/>
           <p:nvPr/>
         </p:nvSpPr>
@@ -3878,7 +7733,7 @@
                 <a:ea typeface="Georgia" pitchFamily="34" charset="-122"/>
                 <a:cs typeface="Georgia" pitchFamily="34" charset="-120"/>
               </a:rPr>
-              <a:t>Warm-up (5 min)</a:t>
+              <a:t>Lesson flow</a:t>
             </a:r>
             <a:endParaRPr lang="en-US" sz="1800" dirty="0"/>
           </a:p>
@@ -3887,54 +7742,6 @@
       <p:sp>
         <p:nvSpPr>
           <p:cNvPr id="4" name="Text 2"/>
-          <p:cNvSpPr/>
-          <p:nvPr/>
-        </p:nvSpPr>
-        <p:spPr>
-          <a:xfrm>
-            <a:off x="406301" y="870942"/>
-            <a:ext cx="8498026" cy="213271"/>
-          </a:xfrm>
-          <a:prstGeom prst="rect">
-            <a:avLst/>
-          </a:prstGeom>
-          <a:noFill/>
-          <a:ln/>
-        </p:spPr>
-        <p:txBody>
-          <a:bodyPr wrap="square" lIns="0" tIns="0" rIns="0" bIns="0" rtlCol="0" anchor="t"/>
-          <a:lstStyle/>
-          <a:p>
-            <a:pPr algn="l" indent="0" marL="0">
-              <a:lnSpc>
-                <a:spcPts val="1680"/>
-              </a:lnSpc>
-              <a:spcBef>
-                <a:spcPts val="300"/>
-              </a:spcBef>
-              <a:spcAft>
-                <a:spcPts val="300"/>
-              </a:spcAft>
-              <a:buNone/>
-            </a:pPr>
-            <a:r>
-              <a:rPr lang="en-US" sz="1200" dirty="0">
-                <a:solidFill>
-                  <a:srgbClr val="1C2833"/>
-                </a:solidFill>
-                <a:latin typeface="Arial" pitchFamily="34" charset="0"/>
-                <a:ea typeface="Arial" pitchFamily="34" charset="-122"/>
-                <a:cs typeface="Arial" pitchFamily="34" charset="-120"/>
-              </a:rPr>
-              <a:t>– Sūtra chant 3 times. – Make-10 reflex: 10 quick digit-partners.</a:t>
-            </a:r>
-            <a:endParaRPr lang="en-US" sz="1200" dirty="0"/>
-          </a:p>
-        </p:txBody>
-      </p:sp>
-      <p:sp>
-        <p:nvSpPr>
-          <p:cNvPr id="5" name="Text 3"/>
           <p:cNvSpPr/>
           <p:nvPr/>
         </p:nvSpPr>
@@ -4084,7 +7891,7 @@
                 <a:ea typeface="Georgia" pitchFamily="34" charset="-122"/>
                 <a:cs typeface="Georgia" pitchFamily="34" charset="-120"/>
               </a:rPr>
-              <a:t>Core (15 min) — The pattern</a:t>
+              <a:t>Warm-up (5 min)</a:t>
             </a:r>
             <a:endParaRPr lang="en-US" sz="1800" dirty="0"/>
           </a:p>
@@ -4122,26 +7929,6 @@
               <a:buChar char="•"/>
             </a:pPr>
             <a:r>
-              <a:rPr lang="en-US" sz="1200" b="1" dirty="0">
-                <a:solidFill>
-                  <a:srgbClr val="1C2833"/>
-                </a:solidFill>
-                <a:latin typeface="Arial" pitchFamily="34" charset="0"/>
-                <a:ea typeface="Arial" pitchFamily="34" charset="-122"/>
-                <a:cs typeface="Arial" pitchFamily="34" charset="-120"/>
-              </a:rPr>
-              <a:t>Pose:</a:t>
-            </a:r>
-            <a:pPr algn="l" indent="0" marL="0">
-              <a:lnSpc>
-                <a:spcPts val="1620"/>
-              </a:lnSpc>
-              <a:spcAft>
-                <a:spcPts val="300"/>
-              </a:spcAft>
-              <a:buNone/>
-            </a:pPr>
-            <a:r>
               <a:rPr lang="en-US" sz="1200" dirty="0">
                 <a:solidFill>
                   <a:srgbClr val="1C2833"/>
@@ -4150,47 +7937,7 @@
                 <a:ea typeface="Arial" pitchFamily="34" charset="-122"/>
                 <a:cs typeface="Arial" pitchFamily="34" charset="-120"/>
               </a:rPr>
-              <a:t> </a:t>
-            </a:r>
-            <a:pPr algn="l" indent="0" marL="0">
-              <a:lnSpc>
-                <a:spcPts val="1620"/>
-              </a:lnSpc>
-              <a:spcAft>
-                <a:spcPts val="300"/>
-              </a:spcAft>
-              <a:buNone/>
-            </a:pPr>
-            <a:r>
-              <a:rPr lang="en-US" sz="1200" i="1" dirty="0">
-                <a:solidFill>
-                  <a:srgbClr val="1C2833"/>
-                </a:solidFill>
-                <a:latin typeface="Arial" pitchFamily="34" charset="0"/>
-                <a:ea typeface="Arial" pitchFamily="34" charset="-122"/>
-                <a:cs typeface="Arial" pitchFamily="34" charset="-120"/>
-              </a:rPr>
-              <a:t>"What's the complement of 73 to 100?"</a:t>
-            </a:r>
-            <a:pPr algn="l" indent="0" marL="0">
-              <a:lnSpc>
-                <a:spcPts val="1620"/>
-              </a:lnSpc>
-              <a:spcAft>
-                <a:spcPts val="300"/>
-              </a:spcAft>
-              <a:buNone/>
-            </a:pPr>
-            <a:r>
-              <a:rPr lang="en-US" sz="1200" dirty="0">
-                <a:solidFill>
-                  <a:srgbClr val="1C2833"/>
-                </a:solidFill>
-                <a:latin typeface="Arial" pitchFamily="34" charset="0"/>
-                <a:ea typeface="Arial" pitchFamily="34" charset="-122"/>
-                <a:cs typeface="Arial" pitchFamily="34" charset="-120"/>
-              </a:rPr>
-              <a:t> Take guesses.</a:t>
+              <a:t>Sūtra chant 3 times.</a:t>
             </a:r>
             <a:endParaRPr lang="en-US" sz="1200" dirty="0"/>
           </a:p>
@@ -4214,7 +7961,7 @@
                 <a:ea typeface="Arial" pitchFamily="34" charset="-122"/>
                 <a:cs typeface="Arial" pitchFamily="34" charset="-120"/>
               </a:rPr>
-              <a:t>Walk through it the Nikhilam way:</a:t>
+              <a:t>Make-10 reflex: 10 quick digit-partners.</a:t>
             </a:r>
             <a:endParaRPr lang="en-US" sz="1200" dirty="0"/>
           </a:p>
@@ -4228,1451 +7975,7 @@
         </p:nvSpPr>
         <p:spPr>
           <a:xfrm>
-            <a:off x="406301" y="1510754"/>
-            <a:ext cx="8331398" cy="777627"/>
-          </a:xfrm>
-          <a:prstGeom prst="rect">
-            <a:avLst/>
-          </a:prstGeom>
-          <a:solidFill>
-            <a:srgbClr val="F4F8F9"/>
-          </a:solidFill>
-          <a:ln/>
-        </p:spPr>
-        <p:txBody>
-          <a:bodyPr wrap="square" rtlCol="0" anchor="ctr"/>
-          <a:lstStyle/>
-          <a:p>
-            <a:pPr indent="0" marL="0">
-              <a:buNone/>
-            </a:pPr>
-            <a:endParaRPr lang="en-US" dirty="0"/>
-          </a:p>
-        </p:txBody>
-      </p:sp>
-      <p:sp>
-        <p:nvSpPr>
-          <p:cNvPr id="6" name="Shape 4"/>
-          <p:cNvSpPr/>
-          <p:nvPr/>
-        </p:nvSpPr>
-        <p:spPr>
-          <a:xfrm>
-            <a:off x="430113" y="1510754"/>
-            <a:ext cx="0" cy="777627"/>
-          </a:xfrm>
-          <a:prstGeom prst="line">
-            <a:avLst/>
-          </a:prstGeom>
-          <a:noFill/>
-          <a:ln w="47625">
-            <a:solidFill>
-              <a:srgbClr val="277884"/>
-            </a:solidFill>
-            <a:prstDash val="solid"/>
-          </a:ln>
-        </p:spPr>
-      </p:sp>
-      <p:sp>
-        <p:nvSpPr>
-          <p:cNvPr id="7" name="Text 5"/>
-          <p:cNvSpPr/>
-          <p:nvPr/>
-        </p:nvSpPr>
-        <p:spPr>
-          <a:xfrm>
-            <a:off x="631627" y="1637705"/>
-            <a:ext cx="8086939" cy="174575"/>
-          </a:xfrm>
-          <a:prstGeom prst="rect">
-            <a:avLst/>
-          </a:prstGeom>
-          <a:noFill/>
-          <a:ln/>
-        </p:spPr>
-        <p:txBody>
-          <a:bodyPr wrap="square" lIns="0" tIns="0" rIns="0" bIns="0" rtlCol="0" anchor="t"/>
-          <a:lstStyle/>
-          <a:p>
-            <a:pPr algn="l" indent="0" marL="0">
-              <a:lnSpc>
-                <a:spcPts val="1375"/>
-              </a:lnSpc>
-              <a:buNone/>
-            </a:pPr>
-            <a:r>
-              <a:rPr lang="en-US" sz="1100" dirty="0">
-                <a:solidFill>
-                  <a:srgbClr val="1C2833"/>
-                </a:solidFill>
-                <a:latin typeface="Courier New" pitchFamily="34" charset="0"/>
-                <a:ea typeface="Courier New" pitchFamily="34" charset="-122"/>
-                <a:cs typeface="Courier New" pitchFamily="34" charset="-120"/>
-              </a:rPr>
-              <a:t>100</a:t>
-            </a:r>
-            <a:endParaRPr lang="en-US" sz="1100" dirty="0"/>
-          </a:p>
-        </p:txBody>
-      </p:sp>
-      <p:sp>
-        <p:nvSpPr>
-          <p:cNvPr id="8" name="Text 6"/>
-          <p:cNvSpPr/>
-          <p:nvPr/>
-        </p:nvSpPr>
-        <p:spPr>
-          <a:xfrm>
-            <a:off x="631627" y="1812280"/>
-            <a:ext cx="8086939" cy="174575"/>
-          </a:xfrm>
-          <a:prstGeom prst="rect">
-            <a:avLst/>
-          </a:prstGeom>
-          <a:noFill/>
-          <a:ln/>
-        </p:spPr>
-        <p:txBody>
-          <a:bodyPr wrap="square" lIns="0" tIns="0" rIns="0" bIns="0" rtlCol="0" anchor="t"/>
-          <a:lstStyle/>
-          <a:p>
-            <a:pPr algn="l" indent="0" marL="0">
-              <a:lnSpc>
-                <a:spcPts val="1375"/>
-              </a:lnSpc>
-              <a:buNone/>
-            </a:pPr>
-            <a:r>
-              <a:rPr lang="en-US" sz="1100" dirty="0">
-                <a:solidFill>
-                  <a:srgbClr val="1C2833"/>
-                </a:solidFill>
-                <a:latin typeface="Courier New" pitchFamily="34" charset="0"/>
-                <a:ea typeface="Courier New" pitchFamily="34" charset="-122"/>
-                <a:cs typeface="Courier New" pitchFamily="34" charset="-120"/>
-              </a:rPr>
-              <a:t>−     73</a:t>
-            </a:r>
-            <a:endParaRPr lang="en-US" sz="1100" dirty="0"/>
-          </a:p>
-        </p:txBody>
-      </p:sp>
-      <p:sp>
-        <p:nvSpPr>
-          <p:cNvPr id="9" name="Text 7"/>
-          <p:cNvSpPr/>
-          <p:nvPr/>
-        </p:nvSpPr>
-        <p:spPr>
-          <a:xfrm>
-            <a:off x="631627" y="1986855"/>
-            <a:ext cx="8086939" cy="174575"/>
-          </a:xfrm>
-          <a:prstGeom prst="rect">
-            <a:avLst/>
-          </a:prstGeom>
-          <a:noFill/>
-          <a:ln/>
-        </p:spPr>
-        <p:txBody>
-          <a:bodyPr wrap="square" lIns="0" tIns="0" rIns="0" bIns="0" rtlCol="0" anchor="t"/>
-          <a:lstStyle/>
-          <a:p>
-            <a:pPr algn="l" indent="0" marL="0">
-              <a:lnSpc>
-                <a:spcPts val="1375"/>
-              </a:lnSpc>
-              <a:buNone/>
-            </a:pPr>
-            <a:r>
-              <a:rPr lang="en-US" sz="1100" dirty="0">
-                <a:solidFill>
-                  <a:srgbClr val="1C2833"/>
-                </a:solidFill>
-                <a:latin typeface="Courier New" pitchFamily="34" charset="0"/>
-                <a:ea typeface="Courier New" pitchFamily="34" charset="-122"/>
-                <a:cs typeface="Courier New" pitchFamily="34" charset="-120"/>
-              </a:rPr>
-              <a:t>———————</a:t>
-            </a:r>
-            <a:endParaRPr lang="en-US" sz="1100" dirty="0"/>
-          </a:p>
-        </p:txBody>
-      </p:sp>
-      <p:sp>
-        <p:nvSpPr>
-          <p:cNvPr id="10" name="Text 8"/>
-          <p:cNvSpPr/>
-          <p:nvPr/>
-        </p:nvSpPr>
-        <p:spPr>
-          <a:xfrm>
-            <a:off x="406301" y="2377232"/>
-            <a:ext cx="8498026" cy="213271"/>
-          </a:xfrm>
-          <a:prstGeom prst="rect">
-            <a:avLst/>
-          </a:prstGeom>
-          <a:noFill/>
-          <a:ln/>
-        </p:spPr>
-        <p:txBody>
-          <a:bodyPr wrap="square" lIns="0" tIns="0" rIns="0" bIns="0" rtlCol="0" anchor="t"/>
-          <a:lstStyle/>
-          <a:p>
-            <a:pPr algn="l" indent="0" marL="0">
-              <a:lnSpc>
-                <a:spcPts val="1680"/>
-              </a:lnSpc>
-              <a:spcBef>
-                <a:spcPts val="300"/>
-              </a:spcBef>
-              <a:spcAft>
-                <a:spcPts val="300"/>
-              </a:spcAft>
-              <a:buNone/>
-            </a:pPr>
-            <a:r>
-              <a:rPr lang="en-US" sz="1200" dirty="0">
-                <a:solidFill>
-                  <a:srgbClr val="1C2833"/>
-                </a:solidFill>
-                <a:latin typeface="Arial" pitchFamily="34" charset="0"/>
-                <a:ea typeface="Arial" pitchFamily="34" charset="-122"/>
-                <a:cs typeface="Arial" pitchFamily="34" charset="-120"/>
-              </a:rPr>
-              <a:t>– First digit (7): 9 − 7 = </a:t>
-            </a:r>
-            <a:pPr algn="l" indent="0" marL="0">
-              <a:lnSpc>
-                <a:spcPts val="1680"/>
-              </a:lnSpc>
-              <a:spcBef>
-                <a:spcPts val="300"/>
-              </a:spcBef>
-              <a:spcAft>
-                <a:spcPts val="300"/>
-              </a:spcAft>
-              <a:buNone/>
-            </a:pPr>
-            <a:r>
-              <a:rPr lang="en-US" sz="1200" b="1" dirty="0">
-                <a:solidFill>
-                  <a:srgbClr val="1C2833"/>
-                </a:solidFill>
-                <a:latin typeface="Arial" pitchFamily="34" charset="0"/>
-                <a:ea typeface="Arial" pitchFamily="34" charset="-122"/>
-                <a:cs typeface="Arial" pitchFamily="34" charset="-120"/>
-              </a:rPr>
-              <a:t>2</a:t>
-            </a:r>
-            <a:pPr algn="l" indent="0" marL="0">
-              <a:lnSpc>
-                <a:spcPts val="1680"/>
-              </a:lnSpc>
-              <a:spcBef>
-                <a:spcPts val="300"/>
-              </a:spcBef>
-              <a:spcAft>
-                <a:spcPts val="300"/>
-              </a:spcAft>
-              <a:buNone/>
-            </a:pPr>
-            <a:r>
-              <a:rPr lang="en-US" sz="1200" dirty="0">
-                <a:solidFill>
-                  <a:srgbClr val="1C2833"/>
-                </a:solidFill>
-                <a:latin typeface="Arial" pitchFamily="34" charset="0"/>
-                <a:ea typeface="Arial" pitchFamily="34" charset="-122"/>
-                <a:cs typeface="Arial" pitchFamily="34" charset="-120"/>
-              </a:rPr>
-              <a:t> – Last digit (3): 10 − 3 = </a:t>
-            </a:r>
-            <a:pPr algn="l" indent="0" marL="0">
-              <a:lnSpc>
-                <a:spcPts val="1680"/>
-              </a:lnSpc>
-              <a:spcBef>
-                <a:spcPts val="300"/>
-              </a:spcBef>
-              <a:spcAft>
-                <a:spcPts val="300"/>
-              </a:spcAft>
-              <a:buNone/>
-            </a:pPr>
-            <a:r>
-              <a:rPr lang="en-US" sz="1200" b="1" dirty="0">
-                <a:solidFill>
-                  <a:srgbClr val="1C2833"/>
-                </a:solidFill>
-                <a:latin typeface="Arial" pitchFamily="34" charset="0"/>
-                <a:ea typeface="Arial" pitchFamily="34" charset="-122"/>
-                <a:cs typeface="Arial" pitchFamily="34" charset="-120"/>
-              </a:rPr>
-              <a:t>7</a:t>
-            </a:r>
-            <a:pPr algn="l" indent="0" marL="0">
-              <a:lnSpc>
-                <a:spcPts val="1680"/>
-              </a:lnSpc>
-              <a:spcBef>
-                <a:spcPts val="300"/>
-              </a:spcBef>
-              <a:spcAft>
-                <a:spcPts val="300"/>
-              </a:spcAft>
-              <a:buNone/>
-            </a:pPr>
-            <a:r>
-              <a:rPr lang="en-US" sz="1200" dirty="0">
-                <a:solidFill>
-                  <a:srgbClr val="1C2833"/>
-                </a:solidFill>
-                <a:latin typeface="Arial" pitchFamily="34" charset="0"/>
-                <a:ea typeface="Arial" pitchFamily="34" charset="-122"/>
-                <a:cs typeface="Arial" pitchFamily="34" charset="-120"/>
-              </a:rPr>
-              <a:t> – Answer: </a:t>
-            </a:r>
-            <a:pPr algn="l" indent="0" marL="0">
-              <a:lnSpc>
-                <a:spcPts val="1680"/>
-              </a:lnSpc>
-              <a:spcBef>
-                <a:spcPts val="300"/>
-              </a:spcBef>
-              <a:spcAft>
-                <a:spcPts val="300"/>
-              </a:spcAft>
-              <a:buNone/>
-            </a:pPr>
-            <a:r>
-              <a:rPr lang="en-US" sz="1200" b="1" dirty="0">
-                <a:solidFill>
-                  <a:srgbClr val="1C2833"/>
-                </a:solidFill>
-                <a:latin typeface="Arial" pitchFamily="34" charset="0"/>
-                <a:ea typeface="Arial" pitchFamily="34" charset="-122"/>
-                <a:cs typeface="Arial" pitchFamily="34" charset="-120"/>
-              </a:rPr>
-              <a:t>27</a:t>
-            </a:r>
-            <a:pPr algn="l" indent="0" marL="0">
-              <a:lnSpc>
-                <a:spcPts val="1680"/>
-              </a:lnSpc>
-              <a:spcBef>
-                <a:spcPts val="300"/>
-              </a:spcBef>
-              <a:spcAft>
-                <a:spcPts val="300"/>
-              </a:spcAft>
-              <a:buNone/>
-            </a:pPr>
-            <a:r>
-              <a:rPr lang="en-US" sz="1200" dirty="0">
-                <a:solidFill>
-                  <a:srgbClr val="1C2833"/>
-                </a:solidFill>
-                <a:latin typeface="Arial" pitchFamily="34" charset="0"/>
-                <a:ea typeface="Arial" pitchFamily="34" charset="-122"/>
-                <a:cs typeface="Arial" pitchFamily="34" charset="-120"/>
-              </a:rPr>
-              <a:t>. – Verify: 73 + 27 = 100. ✓</a:t>
-            </a:r>
-            <a:endParaRPr lang="en-US" sz="1200" dirty="0"/>
-          </a:p>
-        </p:txBody>
-      </p:sp>
-      <p:sp>
-        <p:nvSpPr>
-          <p:cNvPr id="11" name="Text 9"/>
-          <p:cNvSpPr/>
-          <p:nvPr/>
-        </p:nvSpPr>
-        <p:spPr>
-          <a:xfrm>
-            <a:off x="634901" y="2679353"/>
-            <a:ext cx="8102798" cy="281880"/>
-          </a:xfrm>
-          <a:prstGeom prst="rect">
-            <a:avLst/>
-          </a:prstGeom>
-          <a:noFill/>
-          <a:ln/>
-        </p:spPr>
-        <p:txBody>
-          <a:bodyPr wrap="square" lIns="0" tIns="0" rIns="0" bIns="0" rtlCol="0" anchor="t"/>
-          <a:lstStyle/>
-          <a:p>
-            <a:pPr algn="l" marL="342900" indent="-342900">
-              <a:lnSpc>
-                <a:spcPts val="1620"/>
-              </a:lnSpc>
-              <a:spcAft>
-                <a:spcPts val="300"/>
-              </a:spcAft>
-              <a:buSzPct val="100000"/>
-              <a:buChar char="•"/>
-            </a:pPr>
-            <a:r>
-              <a:rPr lang="en-US" sz="1200" b="1" dirty="0">
-                <a:solidFill>
-                  <a:srgbClr val="1C2833"/>
-                </a:solidFill>
-                <a:latin typeface="Arial" pitchFamily="34" charset="0"/>
-                <a:ea typeface="Arial" pitchFamily="34" charset="-122"/>
-                <a:cs typeface="Arial" pitchFamily="34" charset="-120"/>
-              </a:rPr>
-              <a:t>Why "all from 9, last from 10"?</a:t>
-            </a:r>
-            <a:pPr algn="l" indent="0" marL="0">
-              <a:lnSpc>
-                <a:spcPts val="1620"/>
-              </a:lnSpc>
-              <a:spcAft>
-                <a:spcPts val="300"/>
-              </a:spcAft>
-              <a:buNone/>
-            </a:pPr>
-            <a:r>
-              <a:rPr lang="en-US" sz="1200" dirty="0">
-                <a:solidFill>
-                  <a:srgbClr val="1C2833"/>
-                </a:solidFill>
-                <a:latin typeface="Arial" pitchFamily="34" charset="0"/>
-                <a:ea typeface="Arial" pitchFamily="34" charset="-122"/>
-                <a:cs typeface="Arial" pitchFamily="34" charset="-120"/>
-              </a:rPr>
-              <a:t> Show on the board:</a:t>
-            </a:r>
-            <a:endParaRPr lang="en-US" sz="1200" dirty="0"/>
-          </a:p>
-        </p:txBody>
-      </p:sp>
-      <p:sp>
-        <p:nvSpPr>
-          <p:cNvPr id="12" name="Text 10"/>
-          <p:cNvSpPr/>
-          <p:nvPr/>
-        </p:nvSpPr>
-        <p:spPr>
-          <a:xfrm>
-            <a:off x="406301" y="3062734"/>
-            <a:ext cx="8331398" cy="428476"/>
-          </a:xfrm>
-          <a:prstGeom prst="rect">
-            <a:avLst/>
-          </a:prstGeom>
-          <a:solidFill>
-            <a:srgbClr val="F4F8F9"/>
-          </a:solidFill>
-          <a:ln/>
-        </p:spPr>
-        <p:txBody>
-          <a:bodyPr wrap="square" rtlCol="0" anchor="ctr"/>
-          <a:lstStyle/>
-          <a:p>
-            <a:pPr indent="0" marL="0">
-              <a:buNone/>
-            </a:pPr>
-            <a:endParaRPr lang="en-US" dirty="0"/>
-          </a:p>
-        </p:txBody>
-      </p:sp>
-      <p:sp>
-        <p:nvSpPr>
-          <p:cNvPr id="13" name="Shape 11"/>
-          <p:cNvSpPr/>
-          <p:nvPr/>
-        </p:nvSpPr>
-        <p:spPr>
-          <a:xfrm>
-            <a:off x="430113" y="3062734"/>
-            <a:ext cx="0" cy="428476"/>
-          </a:xfrm>
-          <a:prstGeom prst="line">
-            <a:avLst/>
-          </a:prstGeom>
-          <a:noFill/>
-          <a:ln w="47625">
-            <a:solidFill>
-              <a:srgbClr val="277884"/>
-            </a:solidFill>
-            <a:prstDash val="solid"/>
-          </a:ln>
-        </p:spPr>
-      </p:sp>
-      <p:sp>
-        <p:nvSpPr>
-          <p:cNvPr id="14" name="Text 12"/>
-          <p:cNvSpPr/>
-          <p:nvPr/>
-        </p:nvSpPr>
-        <p:spPr>
-          <a:xfrm>
-            <a:off x="631627" y="3189684"/>
-            <a:ext cx="8086939" cy="174575"/>
-          </a:xfrm>
-          <a:prstGeom prst="rect">
-            <a:avLst/>
-          </a:prstGeom>
-          <a:noFill/>
-          <a:ln/>
-        </p:spPr>
-        <p:txBody>
-          <a:bodyPr wrap="square" lIns="0" tIns="0" rIns="0" bIns="0" rtlCol="0" anchor="t"/>
-          <a:lstStyle/>
-          <a:p>
-            <a:pPr algn="l" indent="0" marL="0">
-              <a:lnSpc>
-                <a:spcPts val="1375"/>
-              </a:lnSpc>
-              <a:buNone/>
-            </a:pPr>
-            <a:r>
-              <a:rPr lang="en-US" sz="1100" dirty="0">
-                <a:solidFill>
-                  <a:srgbClr val="1C2833"/>
-                </a:solidFill>
-                <a:latin typeface="Courier New" pitchFamily="34" charset="0"/>
-                <a:ea typeface="Courier New" pitchFamily="34" charset="-122"/>
-                <a:cs typeface="Courier New" pitchFamily="34" charset="-120"/>
-              </a:rPr>
-              <a:t>99  +  1  = 100</a:t>
-            </a:r>
-            <a:endParaRPr lang="en-US" sz="1100" dirty="0"/>
-          </a:p>
-        </p:txBody>
-      </p:sp>
-      <p:sp>
-        <p:nvSpPr>
-          <p:cNvPr id="15" name="Text 13"/>
-          <p:cNvSpPr/>
-          <p:nvPr/>
-        </p:nvSpPr>
-        <p:spPr>
-          <a:xfrm>
-            <a:off x="406301" y="3580061"/>
-            <a:ext cx="8498026" cy="649337"/>
-          </a:xfrm>
-          <a:prstGeom prst="rect">
-            <a:avLst/>
-          </a:prstGeom>
-          <a:noFill/>
-          <a:ln/>
-        </p:spPr>
-        <p:txBody>
-          <a:bodyPr wrap="square" lIns="0" tIns="0" rIns="0" bIns="0" rtlCol="0" anchor="t"/>
-          <a:lstStyle/>
-          <a:p>
-            <a:pPr algn="l" indent="0" marL="0">
-              <a:lnSpc>
-                <a:spcPts val="1680"/>
-              </a:lnSpc>
-              <a:spcBef>
-                <a:spcPts val="300"/>
-              </a:spcBef>
-              <a:spcAft>
-                <a:spcPts val="300"/>
-              </a:spcAft>
-              <a:buNone/>
-            </a:pPr>
-            <a:r>
-              <a:rPr lang="en-US" sz="1200" dirty="0">
-                <a:solidFill>
-                  <a:srgbClr val="1C2833"/>
-                </a:solidFill>
-                <a:latin typeface="Arial" pitchFamily="34" charset="0"/>
-                <a:ea typeface="Arial" pitchFamily="34" charset="-122"/>
-                <a:cs typeface="Arial" pitchFamily="34" charset="-120"/>
-              </a:rPr>
-              <a:t>– If we subtract each digit </a:t>
-            </a:r>
-            <a:pPr algn="l" indent="0" marL="0">
-              <a:lnSpc>
-                <a:spcPts val="1680"/>
-              </a:lnSpc>
-              <a:spcBef>
-                <a:spcPts val="300"/>
-              </a:spcBef>
-              <a:spcAft>
-                <a:spcPts val="300"/>
-              </a:spcAft>
-              <a:buNone/>
-            </a:pPr>
-            <a:r>
-              <a:rPr lang="en-US" sz="1200" i="1" dirty="0">
-                <a:solidFill>
-                  <a:srgbClr val="1C2833"/>
-                </a:solidFill>
-                <a:latin typeface="Arial" pitchFamily="34" charset="0"/>
-                <a:ea typeface="Arial" pitchFamily="34" charset="-122"/>
-                <a:cs typeface="Arial" pitchFamily="34" charset="-120"/>
-              </a:rPr>
-              <a:t>from 9</a:t>
-            </a:r>
-            <a:pPr algn="l" indent="0" marL="0">
-              <a:lnSpc>
-                <a:spcPts val="1680"/>
-              </a:lnSpc>
-              <a:spcBef>
-                <a:spcPts val="300"/>
-              </a:spcBef>
-              <a:spcAft>
-                <a:spcPts val="300"/>
-              </a:spcAft>
-              <a:buNone/>
-            </a:pPr>
-            <a:r>
-              <a:rPr lang="en-US" sz="1200" dirty="0">
-                <a:solidFill>
-                  <a:srgbClr val="1C2833"/>
-                </a:solidFill>
-                <a:latin typeface="Arial" pitchFamily="34" charset="0"/>
-                <a:ea typeface="Arial" pitchFamily="34" charset="-122"/>
-                <a:cs typeface="Arial" pitchFamily="34" charset="-120"/>
-              </a:rPr>
-              <a:t> we get the complement to </a:t>
-            </a:r>
-            <a:pPr algn="l" indent="0" marL="0">
-              <a:lnSpc>
-                <a:spcPts val="1680"/>
-              </a:lnSpc>
-              <a:spcBef>
-                <a:spcPts val="300"/>
-              </a:spcBef>
-              <a:spcAft>
-                <a:spcPts val="300"/>
-              </a:spcAft>
-              <a:buNone/>
-            </a:pPr>
-            <a:r>
-              <a:rPr lang="en-US" sz="1200" b="1" dirty="0">
-                <a:solidFill>
-                  <a:srgbClr val="1C2833"/>
-                </a:solidFill>
-                <a:latin typeface="Arial" pitchFamily="34" charset="0"/>
-                <a:ea typeface="Arial" pitchFamily="34" charset="-122"/>
-                <a:cs typeface="Arial" pitchFamily="34" charset="-120"/>
-              </a:rPr>
-              <a:t>99</a:t>
-            </a:r>
-            <a:pPr algn="l" indent="0" marL="0">
-              <a:lnSpc>
-                <a:spcPts val="1680"/>
-              </a:lnSpc>
-              <a:spcBef>
-                <a:spcPts val="300"/>
-              </a:spcBef>
-              <a:spcAft>
-                <a:spcPts val="300"/>
-              </a:spcAft>
-              <a:buNone/>
-            </a:pPr>
-            <a:r>
-              <a:rPr lang="en-US" sz="1200" dirty="0">
-                <a:solidFill>
-                  <a:srgbClr val="1C2833"/>
-                </a:solidFill>
-                <a:latin typeface="Arial" pitchFamily="34" charset="0"/>
-                <a:ea typeface="Arial" pitchFamily="34" charset="-122"/>
-                <a:cs typeface="Arial" pitchFamily="34" charset="-120"/>
-              </a:rPr>
-              <a:t>, not 100. – The "+1" needed to bridge 99 → 100 is exactly what "the last from 10" provides: </a:t>
-            </a:r>
-            <a:pPr algn="l" indent="0" marL="0">
-              <a:lnSpc>
-                <a:spcPts val="1680"/>
-              </a:lnSpc>
-              <a:spcBef>
-                <a:spcPts val="300"/>
-              </a:spcBef>
-              <a:spcAft>
-                <a:spcPts val="300"/>
-              </a:spcAft>
-              <a:buNone/>
-            </a:pPr>
-            <a:r>
-              <a:rPr lang="en-US" sz="1200" dirty="0">
-                <a:solidFill>
-                  <a:srgbClr val="1C2833"/>
-                </a:solidFill>
-                <a:latin typeface="Arial" pitchFamily="34" charset="0"/>
-                <a:ea typeface="Arial" pitchFamily="34" charset="-122"/>
-                <a:cs typeface="Arial" pitchFamily="34" charset="-120"/>
-              </a:rPr>
-              <a:t>10 − x</a:t>
-            </a:r>
-            <a:pPr algn="l" indent="0" marL="0">
-              <a:lnSpc>
-                <a:spcPts val="1680"/>
-              </a:lnSpc>
-              <a:spcBef>
-                <a:spcPts val="300"/>
-              </a:spcBef>
-              <a:spcAft>
-                <a:spcPts val="300"/>
-              </a:spcAft>
-              <a:buNone/>
-            </a:pPr>
-            <a:r>
-              <a:rPr lang="en-US" sz="1200" dirty="0">
-                <a:solidFill>
-                  <a:srgbClr val="1C2833"/>
-                </a:solidFill>
-                <a:latin typeface="Arial" pitchFamily="34" charset="0"/>
-                <a:ea typeface="Arial" pitchFamily="34" charset="-122"/>
-                <a:cs typeface="Arial" pitchFamily="34" charset="-120"/>
-              </a:rPr>
-              <a:t> is the same as </a:t>
-            </a:r>
-            <a:pPr algn="l" indent="0" marL="0">
-              <a:lnSpc>
-                <a:spcPts val="1680"/>
-              </a:lnSpc>
-              <a:spcBef>
-                <a:spcPts val="300"/>
-              </a:spcBef>
-              <a:spcAft>
-                <a:spcPts val="300"/>
-              </a:spcAft>
-              <a:buNone/>
-            </a:pPr>
-            <a:r>
-              <a:rPr lang="en-US" sz="1200" dirty="0">
-                <a:solidFill>
-                  <a:srgbClr val="1C2833"/>
-                </a:solidFill>
-                <a:latin typeface="Arial" pitchFamily="34" charset="0"/>
-                <a:ea typeface="Arial" pitchFamily="34" charset="-122"/>
-                <a:cs typeface="Arial" pitchFamily="34" charset="-120"/>
-              </a:rPr>
-              <a:t>(9 − x) + 1</a:t>
-            </a:r>
-            <a:pPr algn="l" indent="0" marL="0">
-              <a:lnSpc>
-                <a:spcPts val="1680"/>
-              </a:lnSpc>
-              <a:spcBef>
-                <a:spcPts val="300"/>
-              </a:spcBef>
-              <a:spcAft>
-                <a:spcPts val="300"/>
-              </a:spcAft>
-              <a:buNone/>
-            </a:pPr>
-            <a:r>
-              <a:rPr lang="en-US" sz="1200" dirty="0">
-                <a:solidFill>
-                  <a:srgbClr val="1C2833"/>
-                </a:solidFill>
-                <a:latin typeface="Arial" pitchFamily="34" charset="0"/>
-                <a:ea typeface="Arial" pitchFamily="34" charset="-122"/>
-                <a:cs typeface="Arial" pitchFamily="34" charset="-120"/>
-              </a:rPr>
-              <a:t>. – That's the whole trick. The last digit absorbs the "+1." Every other digit just goes "from 9."</a:t>
-            </a:r>
-            <a:endParaRPr lang="en-US" sz="1200" dirty="0"/>
-          </a:p>
-        </p:txBody>
-      </p:sp>
-      <p:sp>
-        <p:nvSpPr>
-          <p:cNvPr id="16" name="Text 14"/>
-          <p:cNvSpPr/>
-          <p:nvPr/>
-        </p:nvSpPr>
-        <p:spPr>
-          <a:xfrm>
-            <a:off x="634901" y="4318248"/>
-            <a:ext cx="8102798" cy="281880"/>
-          </a:xfrm>
-          <a:prstGeom prst="rect">
-            <a:avLst/>
-          </a:prstGeom>
-          <a:noFill/>
-          <a:ln/>
-        </p:spPr>
-        <p:txBody>
-          <a:bodyPr wrap="square" lIns="0" tIns="0" rIns="0" bIns="0" rtlCol="0" anchor="t"/>
-          <a:lstStyle/>
-          <a:p>
-            <a:pPr algn="l" marL="342900" indent="-342900">
-              <a:lnSpc>
-                <a:spcPts val="1620"/>
-              </a:lnSpc>
-              <a:spcAft>
-                <a:spcPts val="300"/>
-              </a:spcAft>
-              <a:buSzPct val="100000"/>
-              <a:buChar char="•"/>
-            </a:pPr>
-            <a:r>
-              <a:rPr lang="en-US" sz="1200" b="1" dirty="0">
-                <a:solidFill>
-                  <a:srgbClr val="1C2833"/>
-                </a:solidFill>
-                <a:latin typeface="Arial" pitchFamily="34" charset="0"/>
-                <a:ea typeface="Arial" pitchFamily="34" charset="-122"/>
-                <a:cs typeface="Arial" pitchFamily="34" charset="-120"/>
-              </a:rPr>
-              <a:t>Demo 4 more, quickly, with the class chanting along:</a:t>
-            </a:r>
-            <a:endParaRPr lang="en-US" sz="1200" dirty="0"/>
-          </a:p>
-        </p:txBody>
-      </p:sp>
-      <p:sp>
-        <p:nvSpPr>
-          <p:cNvPr id="17" name="Text 15"/>
-          <p:cNvSpPr/>
-          <p:nvPr/>
-        </p:nvSpPr>
-        <p:spPr>
-          <a:xfrm>
-            <a:off x="406301" y="4688979"/>
-            <a:ext cx="8498026" cy="213271"/>
-          </a:xfrm>
-          <a:prstGeom prst="rect">
-            <a:avLst/>
-          </a:prstGeom>
-          <a:noFill/>
-          <a:ln/>
-        </p:spPr>
-        <p:txBody>
-          <a:bodyPr wrap="square" lIns="0" tIns="0" rIns="0" bIns="0" rtlCol="0" anchor="t"/>
-          <a:lstStyle/>
-          <a:p>
-            <a:pPr algn="l" indent="0" marL="0">
-              <a:lnSpc>
-                <a:spcPts val="1680"/>
-              </a:lnSpc>
-              <a:spcBef>
-                <a:spcPts val="300"/>
-              </a:spcBef>
-              <a:spcAft>
-                <a:spcPts val="300"/>
-              </a:spcAft>
-              <a:buNone/>
-            </a:pPr>
-            <a:r>
-              <a:rPr lang="en-US" sz="1200" i="1" dirty="0">
-                <a:solidFill>
-                  <a:srgbClr val="1C2833"/>
-                </a:solidFill>
-                <a:latin typeface="Arial" pitchFamily="34" charset="0"/>
-                <a:ea typeface="Arial" pitchFamily="34" charset="-122"/>
-                <a:cs typeface="Arial" pitchFamily="34" charset="-120"/>
-              </a:rPr>
-              <a:t>Each row: Number · First digit · Last digit · Complement · Check.</a:t>
-            </a:r>
-            <a:endParaRPr lang="en-US" sz="1200" dirty="0"/>
-          </a:p>
-        </p:txBody>
-      </p:sp>
-      <p:sp>
-        <p:nvSpPr>
-          <p:cNvPr id="18" name="Text 16"/>
-          <p:cNvSpPr/>
-          <p:nvPr/>
-        </p:nvSpPr>
-        <p:spPr>
-          <a:xfrm>
-            <a:off x="634901" y="4991100"/>
-            <a:ext cx="8102798" cy="1013222"/>
-          </a:xfrm>
-          <a:prstGeom prst="rect">
-            <a:avLst/>
-          </a:prstGeom>
-          <a:noFill/>
-          <a:ln/>
-        </p:spPr>
-        <p:txBody>
-          <a:bodyPr wrap="square" lIns="0" tIns="0" rIns="0" bIns="0" rtlCol="0" anchor="t"/>
-          <a:lstStyle/>
-          <a:p>
-            <a:pPr algn="l" marL="342900" indent="-342900">
-              <a:lnSpc>
-                <a:spcPts val="1620"/>
-              </a:lnSpc>
-              <a:spcAft>
-                <a:spcPts val="300"/>
-              </a:spcAft>
-              <a:buSzPct val="100000"/>
-              <a:buChar char="•"/>
-            </a:pPr>
-            <a:r>
-              <a:rPr lang="en-US" sz="1200" b="1" dirty="0">
-                <a:solidFill>
-                  <a:srgbClr val="1C2833"/>
-                </a:solidFill>
-                <a:latin typeface="Arial" pitchFamily="34" charset="0"/>
-                <a:ea typeface="Arial" pitchFamily="34" charset="-122"/>
-                <a:cs typeface="Arial" pitchFamily="34" charset="-120"/>
-              </a:rPr>
-              <a:t>41</a:t>
-            </a:r>
-            <a:pPr algn="l" indent="0" marL="0">
-              <a:lnSpc>
-                <a:spcPts val="1620"/>
-              </a:lnSpc>
-              <a:spcAft>
-                <a:spcPts val="300"/>
-              </a:spcAft>
-              <a:buNone/>
-            </a:pPr>
-            <a:r>
-              <a:rPr lang="en-US" sz="1200" dirty="0">
-                <a:solidFill>
-                  <a:srgbClr val="1C2833"/>
-                </a:solidFill>
-                <a:latin typeface="Arial" pitchFamily="34" charset="0"/>
-                <a:ea typeface="Arial" pitchFamily="34" charset="-122"/>
-                <a:cs typeface="Arial" pitchFamily="34" charset="-120"/>
-              </a:rPr>
-              <a:t> — 9 − 4 = 5 · 10 − 1 = 9 · </a:t>
-            </a:r>
-            <a:pPr algn="l" indent="0" marL="0">
-              <a:lnSpc>
-                <a:spcPts val="1620"/>
-              </a:lnSpc>
-              <a:spcAft>
-                <a:spcPts val="300"/>
-              </a:spcAft>
-              <a:buNone/>
-            </a:pPr>
-            <a:r>
-              <a:rPr lang="en-US" sz="1200" b="1" dirty="0">
-                <a:solidFill>
-                  <a:srgbClr val="1C2833"/>
-                </a:solidFill>
-                <a:latin typeface="Arial" pitchFamily="34" charset="0"/>
-                <a:ea typeface="Arial" pitchFamily="34" charset="-122"/>
-                <a:cs typeface="Arial" pitchFamily="34" charset="-120"/>
-              </a:rPr>
-              <a:t>59</a:t>
-            </a:r>
-            <a:pPr algn="l" indent="0" marL="0">
-              <a:lnSpc>
-                <a:spcPts val="1620"/>
-              </a:lnSpc>
-              <a:spcAft>
-                <a:spcPts val="300"/>
-              </a:spcAft>
-              <a:buNone/>
-            </a:pPr>
-            <a:r>
-              <a:rPr lang="en-US" sz="1200" dirty="0">
-                <a:solidFill>
-                  <a:srgbClr val="1C2833"/>
-                </a:solidFill>
-                <a:latin typeface="Arial" pitchFamily="34" charset="0"/>
-                <a:ea typeface="Arial" pitchFamily="34" charset="-122"/>
-                <a:cs typeface="Arial" pitchFamily="34" charset="-120"/>
-              </a:rPr>
-              <a:t> · 41 + 59 = 100 ✓</a:t>
-            </a:r>
-            <a:endParaRPr lang="en-US" sz="1200" dirty="0"/>
-          </a:p>
-          <a:p>
-            <a:pPr algn="l" marL="342900" indent="-342900">
-              <a:lnSpc>
-                <a:spcPts val="1620"/>
-              </a:lnSpc>
-              <a:spcAft>
-                <a:spcPts val="300"/>
-              </a:spcAft>
-              <a:buSzPct val="100000"/>
-              <a:buChar char="•"/>
-            </a:pPr>
-            <a:r>
-              <a:rPr lang="en-US" sz="1200" b="1" dirty="0">
-                <a:solidFill>
-                  <a:srgbClr val="1C2833"/>
-                </a:solidFill>
-                <a:latin typeface="Arial" pitchFamily="34" charset="0"/>
-                <a:ea typeface="Arial" pitchFamily="34" charset="-122"/>
-                <a:cs typeface="Arial" pitchFamily="34" charset="-120"/>
-              </a:rPr>
-              <a:t>28</a:t>
-            </a:r>
-            <a:pPr algn="l" indent="0" marL="0">
-              <a:lnSpc>
-                <a:spcPts val="1620"/>
-              </a:lnSpc>
-              <a:spcAft>
-                <a:spcPts val="300"/>
-              </a:spcAft>
-              <a:buNone/>
-            </a:pPr>
-            <a:r>
-              <a:rPr lang="en-US" sz="1200" dirty="0">
-                <a:solidFill>
-                  <a:srgbClr val="1C2833"/>
-                </a:solidFill>
-                <a:latin typeface="Arial" pitchFamily="34" charset="0"/>
-                <a:ea typeface="Arial" pitchFamily="34" charset="-122"/>
-                <a:cs typeface="Arial" pitchFamily="34" charset="-120"/>
-              </a:rPr>
-              <a:t> — 9 − 2 = 7 · 10 − 8 = 2 · </a:t>
-            </a:r>
-            <a:pPr algn="l" indent="0" marL="0">
-              <a:lnSpc>
-                <a:spcPts val="1620"/>
-              </a:lnSpc>
-              <a:spcAft>
-                <a:spcPts val="300"/>
-              </a:spcAft>
-              <a:buNone/>
-            </a:pPr>
-            <a:r>
-              <a:rPr lang="en-US" sz="1200" b="1" dirty="0">
-                <a:solidFill>
-                  <a:srgbClr val="1C2833"/>
-                </a:solidFill>
-                <a:latin typeface="Arial" pitchFamily="34" charset="0"/>
-                <a:ea typeface="Arial" pitchFamily="34" charset="-122"/>
-                <a:cs typeface="Arial" pitchFamily="34" charset="-120"/>
-              </a:rPr>
-              <a:t>72</a:t>
-            </a:r>
-            <a:pPr algn="l" indent="0" marL="0">
-              <a:lnSpc>
-                <a:spcPts val="1620"/>
-              </a:lnSpc>
-              <a:spcAft>
-                <a:spcPts val="300"/>
-              </a:spcAft>
-              <a:buNone/>
-            </a:pPr>
-            <a:r>
-              <a:rPr lang="en-US" sz="1200" dirty="0">
-                <a:solidFill>
-                  <a:srgbClr val="1C2833"/>
-                </a:solidFill>
-                <a:latin typeface="Arial" pitchFamily="34" charset="0"/>
-                <a:ea typeface="Arial" pitchFamily="34" charset="-122"/>
-                <a:cs typeface="Arial" pitchFamily="34" charset="-120"/>
-              </a:rPr>
-              <a:t> · 28 + 72 = 100 ✓</a:t>
-            </a:r>
-            <a:endParaRPr lang="en-US" sz="1200" dirty="0"/>
-          </a:p>
-          <a:p>
-            <a:pPr algn="l" marL="342900" indent="-342900">
-              <a:lnSpc>
-                <a:spcPts val="1620"/>
-              </a:lnSpc>
-              <a:spcAft>
-                <a:spcPts val="300"/>
-              </a:spcAft>
-              <a:buSzPct val="100000"/>
-              <a:buChar char="•"/>
-            </a:pPr>
-            <a:r>
-              <a:rPr lang="en-US" sz="1200" b="1" dirty="0">
-                <a:solidFill>
-                  <a:srgbClr val="1C2833"/>
-                </a:solidFill>
-                <a:latin typeface="Arial" pitchFamily="34" charset="0"/>
-                <a:ea typeface="Arial" pitchFamily="34" charset="-122"/>
-                <a:cs typeface="Arial" pitchFamily="34" charset="-120"/>
-              </a:rPr>
-              <a:t>86</a:t>
-            </a:r>
-            <a:pPr algn="l" indent="0" marL="0">
-              <a:lnSpc>
-                <a:spcPts val="1620"/>
-              </a:lnSpc>
-              <a:spcAft>
-                <a:spcPts val="300"/>
-              </a:spcAft>
-              <a:buNone/>
-            </a:pPr>
-            <a:r>
-              <a:rPr lang="en-US" sz="1200" dirty="0">
-                <a:solidFill>
-                  <a:srgbClr val="1C2833"/>
-                </a:solidFill>
-                <a:latin typeface="Arial" pitchFamily="34" charset="0"/>
-                <a:ea typeface="Arial" pitchFamily="34" charset="-122"/>
-                <a:cs typeface="Arial" pitchFamily="34" charset="-120"/>
-              </a:rPr>
-              <a:t> — 9 − 8 = 1 · 10 − 6 = 4 · </a:t>
-            </a:r>
-            <a:pPr algn="l" indent="0" marL="0">
-              <a:lnSpc>
-                <a:spcPts val="1620"/>
-              </a:lnSpc>
-              <a:spcAft>
-                <a:spcPts val="300"/>
-              </a:spcAft>
-              <a:buNone/>
-            </a:pPr>
-            <a:r>
-              <a:rPr lang="en-US" sz="1200" b="1" dirty="0">
-                <a:solidFill>
-                  <a:srgbClr val="1C2833"/>
-                </a:solidFill>
-                <a:latin typeface="Arial" pitchFamily="34" charset="0"/>
-                <a:ea typeface="Arial" pitchFamily="34" charset="-122"/>
-                <a:cs typeface="Arial" pitchFamily="34" charset="-120"/>
-              </a:rPr>
-              <a:t>14</a:t>
-            </a:r>
-            <a:pPr algn="l" indent="0" marL="0">
-              <a:lnSpc>
-                <a:spcPts val="1620"/>
-              </a:lnSpc>
-              <a:spcAft>
-                <a:spcPts val="300"/>
-              </a:spcAft>
-              <a:buNone/>
-            </a:pPr>
-            <a:r>
-              <a:rPr lang="en-US" sz="1200" dirty="0">
-                <a:solidFill>
-                  <a:srgbClr val="1C2833"/>
-                </a:solidFill>
-                <a:latin typeface="Arial" pitchFamily="34" charset="0"/>
-                <a:ea typeface="Arial" pitchFamily="34" charset="-122"/>
-                <a:cs typeface="Arial" pitchFamily="34" charset="-120"/>
-              </a:rPr>
-              <a:t> · 86 + 14 = 100 ✓</a:t>
-            </a:r>
-            <a:endParaRPr lang="en-US" sz="1200" dirty="0"/>
-          </a:p>
-          <a:p>
-            <a:pPr algn="l" marL="342900" indent="-342900">
-              <a:lnSpc>
-                <a:spcPts val="1620"/>
-              </a:lnSpc>
-              <a:spcAft>
-                <a:spcPts val="300"/>
-              </a:spcAft>
-              <a:buSzPct val="100000"/>
-              <a:buChar char="•"/>
-            </a:pPr>
-            <a:r>
-              <a:rPr lang="en-US" sz="1200" b="1" dirty="0">
-                <a:solidFill>
-                  <a:srgbClr val="1C2833"/>
-                </a:solidFill>
-                <a:latin typeface="Arial" pitchFamily="34" charset="0"/>
-                <a:ea typeface="Arial" pitchFamily="34" charset="-122"/>
-                <a:cs typeface="Arial" pitchFamily="34" charset="-120"/>
-              </a:rPr>
-              <a:t>95</a:t>
-            </a:r>
-            <a:pPr algn="l" indent="0" marL="0">
-              <a:lnSpc>
-                <a:spcPts val="1620"/>
-              </a:lnSpc>
-              <a:spcAft>
-                <a:spcPts val="300"/>
-              </a:spcAft>
-              <a:buNone/>
-            </a:pPr>
-            <a:r>
-              <a:rPr lang="en-US" sz="1200" dirty="0">
-                <a:solidFill>
-                  <a:srgbClr val="1C2833"/>
-                </a:solidFill>
-                <a:latin typeface="Arial" pitchFamily="34" charset="0"/>
-                <a:ea typeface="Arial" pitchFamily="34" charset="-122"/>
-                <a:cs typeface="Arial" pitchFamily="34" charset="-120"/>
-              </a:rPr>
-              <a:t> — 9 − 9 = 0 · 10 − 5 = 5 · </a:t>
-            </a:r>
-            <a:pPr algn="l" indent="0" marL="0">
-              <a:lnSpc>
-                <a:spcPts val="1620"/>
-              </a:lnSpc>
-              <a:spcAft>
-                <a:spcPts val="300"/>
-              </a:spcAft>
-              <a:buNone/>
-            </a:pPr>
-            <a:r>
-              <a:rPr lang="en-US" sz="1200" b="1" dirty="0">
-                <a:solidFill>
-                  <a:srgbClr val="1C2833"/>
-                </a:solidFill>
-                <a:latin typeface="Arial" pitchFamily="34" charset="0"/>
-                <a:ea typeface="Arial" pitchFamily="34" charset="-122"/>
-                <a:cs typeface="Arial" pitchFamily="34" charset="-120"/>
-              </a:rPr>
-              <a:t>05</a:t>
-            </a:r>
-            <a:pPr algn="l" indent="0" marL="0">
-              <a:lnSpc>
-                <a:spcPts val="1620"/>
-              </a:lnSpc>
-              <a:spcAft>
-                <a:spcPts val="300"/>
-              </a:spcAft>
-              <a:buNone/>
-            </a:pPr>
-            <a:r>
-              <a:rPr lang="en-US" sz="1200" dirty="0">
-                <a:solidFill>
-                  <a:srgbClr val="1C2833"/>
-                </a:solidFill>
-                <a:latin typeface="Arial" pitchFamily="34" charset="0"/>
-                <a:ea typeface="Arial" pitchFamily="34" charset="-122"/>
-                <a:cs typeface="Arial" pitchFamily="34" charset="-120"/>
-              </a:rPr>
-              <a:t> = 5 · 95 + 5 = 100 ✓</a:t>
-            </a:r>
-            <a:endParaRPr lang="en-US" sz="1200" dirty="0"/>
-          </a:p>
-        </p:txBody>
-      </p:sp>
-      <p:sp>
-        <p:nvSpPr>
-          <p:cNvPr id="19" name="Text 17"/>
-          <p:cNvSpPr/>
-          <p:nvPr/>
-        </p:nvSpPr>
-        <p:spPr>
-          <a:xfrm>
-            <a:off x="634901" y="6105823"/>
-            <a:ext cx="8102798" cy="712291"/>
-          </a:xfrm>
-          <a:prstGeom prst="rect">
-            <a:avLst/>
-          </a:prstGeom>
-          <a:noFill/>
-          <a:ln/>
-        </p:spPr>
-        <p:txBody>
-          <a:bodyPr wrap="square" lIns="0" tIns="0" rIns="0" bIns="0" rtlCol="0" anchor="t"/>
-          <a:lstStyle/>
-          <a:p>
-            <a:pPr algn="l" marL="342900" indent="-342900">
-              <a:lnSpc>
-                <a:spcPts val="1620"/>
-              </a:lnSpc>
-              <a:spcAft>
-                <a:spcPts val="300"/>
-              </a:spcAft>
-              <a:buSzPct val="100000"/>
-              <a:buChar char="•"/>
-            </a:pPr>
-            <a:r>
-              <a:rPr lang="en-US" sz="1200" b="1" dirty="0">
-                <a:solidFill>
-                  <a:srgbClr val="1C2833"/>
-                </a:solidFill>
-                <a:latin typeface="Arial" pitchFamily="34" charset="0"/>
-                <a:ea typeface="Arial" pitchFamily="34" charset="-122"/>
-                <a:cs typeface="Arial" pitchFamily="34" charset="-120"/>
-              </a:rPr>
-              <a:t>Edge case: trailing zero.</a:t>
-            </a:r>
-            <a:pPr algn="l" indent="0" marL="0">
-              <a:lnSpc>
-                <a:spcPts val="1620"/>
-              </a:lnSpc>
-              <a:spcAft>
-                <a:spcPts val="300"/>
-              </a:spcAft>
-              <a:buNone/>
-            </a:pPr>
-            <a:r>
-              <a:rPr lang="en-US" sz="1200" dirty="0">
-                <a:solidFill>
-                  <a:srgbClr val="1C2833"/>
-                </a:solidFill>
-                <a:latin typeface="Arial" pitchFamily="34" charset="0"/>
-                <a:ea typeface="Arial" pitchFamily="34" charset="-122"/>
-                <a:cs typeface="Arial" pitchFamily="34" charset="-120"/>
-              </a:rPr>
-              <a:t> What is the complement of 30? Apply the rule: 9 − 3 = 6 (for tens), 10 − 0 = 10 (for units). But 10 isn't a digit — it carries. So you get </a:t>
-            </a:r>
-            <a:pPr algn="l" indent="0" marL="0">
-              <a:lnSpc>
-                <a:spcPts val="1620"/>
-              </a:lnSpc>
-              <a:spcAft>
-                <a:spcPts val="300"/>
-              </a:spcAft>
-              <a:buNone/>
-            </a:pPr>
-            <a:r>
-              <a:rPr lang="en-US" sz="1200" dirty="0">
-                <a:solidFill>
-                  <a:srgbClr val="1C2833"/>
-                </a:solidFill>
-                <a:latin typeface="Arial" pitchFamily="34" charset="0"/>
-                <a:ea typeface="Arial" pitchFamily="34" charset="-122"/>
-                <a:cs typeface="Arial" pitchFamily="34" charset="-120"/>
-              </a:rPr>
-              <a:t>6 | 10</a:t>
-            </a:r>
-            <a:pPr algn="l" indent="0" marL="0">
-              <a:lnSpc>
-                <a:spcPts val="1620"/>
-              </a:lnSpc>
-              <a:spcAft>
-                <a:spcPts val="300"/>
-              </a:spcAft>
-              <a:buNone/>
-            </a:pPr>
-            <a:r>
-              <a:rPr lang="en-US" sz="1200" dirty="0">
-                <a:solidFill>
-                  <a:srgbClr val="1C2833"/>
-                </a:solidFill>
-                <a:latin typeface="Arial" pitchFamily="34" charset="0"/>
-                <a:ea typeface="Arial" pitchFamily="34" charset="-122"/>
-                <a:cs typeface="Arial" pitchFamily="34" charset="-120"/>
-              </a:rPr>
-              <a:t> → </a:t>
-            </a:r>
-            <a:pPr algn="l" indent="0" marL="0">
-              <a:lnSpc>
-                <a:spcPts val="1620"/>
-              </a:lnSpc>
-              <a:spcAft>
-                <a:spcPts val="300"/>
-              </a:spcAft>
-              <a:buNone/>
-            </a:pPr>
-            <a:r>
-              <a:rPr lang="en-US" sz="1200" dirty="0">
-                <a:solidFill>
-                  <a:srgbClr val="1C2833"/>
-                </a:solidFill>
-                <a:latin typeface="Arial" pitchFamily="34" charset="0"/>
-                <a:ea typeface="Arial" pitchFamily="34" charset="-122"/>
-                <a:cs typeface="Arial" pitchFamily="34" charset="-120"/>
-              </a:rPr>
-              <a:t>70</a:t>
-            </a:r>
-            <a:pPr algn="l" indent="0" marL="0">
-              <a:lnSpc>
-                <a:spcPts val="1620"/>
-              </a:lnSpc>
-              <a:spcAft>
-                <a:spcPts val="300"/>
-              </a:spcAft>
-              <a:buNone/>
-            </a:pPr>
-            <a:r>
-              <a:rPr lang="en-US" sz="1200" dirty="0">
-                <a:solidFill>
-                  <a:srgbClr val="1C2833"/>
-                </a:solidFill>
-                <a:latin typeface="Arial" pitchFamily="34" charset="0"/>
-                <a:ea typeface="Arial" pitchFamily="34" charset="-122"/>
-                <a:cs typeface="Arial" pitchFamily="34" charset="-120"/>
-              </a:rPr>
-              <a:t>. Easier: notice that the last </a:t>
-            </a:r>
-            <a:pPr algn="l" indent="0" marL="0">
-              <a:lnSpc>
-                <a:spcPts val="1620"/>
-              </a:lnSpc>
-              <a:spcAft>
-                <a:spcPts val="300"/>
-              </a:spcAft>
-              <a:buNone/>
-            </a:pPr>
-            <a:r>
-              <a:rPr lang="en-US" sz="1200" i="1" dirty="0">
-                <a:solidFill>
-                  <a:srgbClr val="1C2833"/>
-                </a:solidFill>
-                <a:latin typeface="Arial" pitchFamily="34" charset="0"/>
-                <a:ea typeface="Arial" pitchFamily="34" charset="-122"/>
-                <a:cs typeface="Arial" pitchFamily="34" charset="-120"/>
-              </a:rPr>
-              <a:t>non-zero</a:t>
-            </a:r>
-            <a:pPr algn="l" indent="0" marL="0">
-              <a:lnSpc>
-                <a:spcPts val="1620"/>
-              </a:lnSpc>
-              <a:spcAft>
-                <a:spcPts val="300"/>
-              </a:spcAft>
-              <a:buNone/>
-            </a:pPr>
-            <a:r>
-              <a:rPr lang="en-US" sz="1200" dirty="0">
-                <a:solidFill>
-                  <a:srgbClr val="1C2833"/>
-                </a:solidFill>
-                <a:latin typeface="Arial" pitchFamily="34" charset="0"/>
-                <a:ea typeface="Arial" pitchFamily="34" charset="-122"/>
-                <a:cs typeface="Arial" pitchFamily="34" charset="-120"/>
-              </a:rPr>
-              <a:t> digit gets the "from 10" treatment; trailing zeros stay as zeros.</a:t>
-            </a:r>
-            <a:endParaRPr lang="en-US" sz="1200" dirty="0"/>
-          </a:p>
-        </p:txBody>
-      </p:sp>
-      <p:sp>
-        <p:nvSpPr>
-          <p:cNvPr id="20" name="Text 18"/>
-          <p:cNvSpPr/>
-          <p:nvPr/>
-        </p:nvSpPr>
-        <p:spPr>
-          <a:xfrm>
-            <a:off x="406301" y="6906964"/>
-            <a:ext cx="8498026" cy="213271"/>
-          </a:xfrm>
-          <a:prstGeom prst="rect">
-            <a:avLst/>
-          </a:prstGeom>
-          <a:noFill/>
-          <a:ln/>
-        </p:spPr>
-        <p:txBody>
-          <a:bodyPr wrap="square" lIns="0" tIns="0" rIns="0" bIns="0" rtlCol="0" anchor="t"/>
-          <a:lstStyle/>
-          <a:p>
-            <a:pPr algn="l" indent="0" marL="0">
-              <a:lnSpc>
-                <a:spcPts val="1680"/>
-              </a:lnSpc>
-              <a:spcBef>
-                <a:spcPts val="300"/>
-              </a:spcBef>
-              <a:spcAft>
-                <a:spcPts val="300"/>
-              </a:spcAft>
-              <a:buNone/>
-            </a:pPr>
-            <a:r>
-              <a:rPr lang="en-US" sz="1200" dirty="0">
-                <a:solidFill>
-                  <a:srgbClr val="1C2833"/>
-                </a:solidFill>
-                <a:latin typeface="Arial" pitchFamily="34" charset="0"/>
-                <a:ea typeface="Arial" pitchFamily="34" charset="-122"/>
-                <a:cs typeface="Arial" pitchFamily="34" charset="-120"/>
-              </a:rPr>
-              <a:t>Or more simply: 30 + 70 = 100, so complement of 30 is 70. The rule still works, you just respect place value.</a:t>
-            </a:r>
-            <a:endParaRPr lang="en-US" sz="1200" dirty="0"/>
-          </a:p>
-        </p:txBody>
-      </p:sp>
-      <p:sp>
-        <p:nvSpPr>
-          <p:cNvPr id="21" name="Text 19"/>
-          <p:cNvSpPr/>
-          <p:nvPr/>
-        </p:nvSpPr>
-        <p:spPr>
-          <a:xfrm>
-            <a:off x="406301" y="7272635"/>
+            <a:off x="406301" y="4434929"/>
             <a:ext cx="8498026" cy="213271"/>
           </a:xfrm>
           <a:prstGeom prst="rect">
@@ -5816,7 +8119,7 @@
                 <a:ea typeface="Georgia" pitchFamily="34" charset="-122"/>
                 <a:cs typeface="Georgia" pitchFamily="34" charset="-120"/>
               </a:rPr>
-              <a:t>Activity (20 min) — Paired drill</a:t>
+              <a:t>Core (15 min) — The pattern</a:t>
             </a:r>
             <a:endParaRPr lang="en-US" sz="1800" dirty="0"/>
           </a:p>
@@ -5830,8 +8133,8 @@
         </p:nvSpPr>
         <p:spPr>
           <a:xfrm>
-            <a:off x="406301" y="870942"/>
-            <a:ext cx="8498026" cy="639812"/>
+            <a:off x="634901" y="883593"/>
+            <a:ext cx="8102798" cy="525661"/>
           </a:xfrm>
           <a:prstGeom prst="rect">
             <a:avLst/>
@@ -5843,13 +8146,31 @@
           <a:bodyPr wrap="square" lIns="0" tIns="0" rIns="0" bIns="0" rtlCol="0" anchor="t"/>
           <a:lstStyle/>
           <a:p>
-            <a:pPr algn="l" indent="0" marL="0">
-              <a:lnSpc>
-                <a:spcPts val="1680"/>
-              </a:lnSpc>
-              <a:spcBef>
-                <a:spcPts val="300"/>
-              </a:spcBef>
+            <a:pPr algn="l" marL="342900" indent="-342900">
+              <a:lnSpc>
+                <a:spcPts val="1620"/>
+              </a:lnSpc>
+              <a:spcAft>
+                <a:spcPts val="300"/>
+              </a:spcAft>
+              <a:buSzPct val="100000"/>
+              <a:buChar char="•"/>
+            </a:pPr>
+            <a:r>
+              <a:rPr lang="en-US" sz="1200" b="1" dirty="0">
+                <a:solidFill>
+                  <a:srgbClr val="1C2833"/>
+                </a:solidFill>
+                <a:latin typeface="Arial" pitchFamily="34" charset="0"/>
+                <a:ea typeface="Arial" pitchFamily="34" charset="-122"/>
+                <a:cs typeface="Arial" pitchFamily="34" charset="-120"/>
+              </a:rPr>
+              <a:t>Pose:</a:t>
+            </a:r>
+            <a:pPr algn="l" indent="0" marL="0">
+              <a:lnSpc>
+                <a:spcPts val="1620"/>
+              </a:lnSpc>
               <a:spcAft>
                 <a:spcPts val="300"/>
               </a:spcAft>
@@ -5864,15 +8185,258 @@
                 <a:ea typeface="Arial" pitchFamily="34" charset="-122"/>
                 <a:cs typeface="Arial" pitchFamily="34" charset="-120"/>
               </a:rPr>
-              <a:t>– Pairs face each other across desks. One holds the drill sheet (20 two-digit numbers); the other says complements out loud. – Round 1: 60 seconds. Count correct answers. – Swap roles. Round 2. – Round 3: swap to a new sheet (different numbers). Aim to beat your Round 1 count.</a:t>
+              <a:t> </a:t>
+            </a:r>
+            <a:pPr algn="l" indent="0" marL="0">
+              <a:lnSpc>
+                <a:spcPts val="1620"/>
+              </a:lnSpc>
+              <a:spcAft>
+                <a:spcPts val="300"/>
+              </a:spcAft>
+              <a:buNone/>
+            </a:pPr>
+            <a:r>
+              <a:rPr lang="en-US" sz="1200" i="1" dirty="0">
+                <a:solidFill>
+                  <a:srgbClr val="1C2833"/>
+                </a:solidFill>
+                <a:latin typeface="Arial" pitchFamily="34" charset="0"/>
+                <a:ea typeface="Arial" pitchFamily="34" charset="-122"/>
+                <a:cs typeface="Arial" pitchFamily="34" charset="-120"/>
+              </a:rPr>
+              <a:t>"What's the complement of 73 to 100?"</a:t>
+            </a:r>
+            <a:pPr algn="l" indent="0" marL="0">
+              <a:lnSpc>
+                <a:spcPts val="1620"/>
+              </a:lnSpc>
+              <a:spcAft>
+                <a:spcPts val="300"/>
+              </a:spcAft>
+              <a:buNone/>
+            </a:pPr>
+            <a:r>
+              <a:rPr lang="en-US" sz="1200" dirty="0">
+                <a:solidFill>
+                  <a:srgbClr val="1C2833"/>
+                </a:solidFill>
+                <a:latin typeface="Arial" pitchFamily="34" charset="0"/>
+                <a:ea typeface="Arial" pitchFamily="34" charset="-122"/>
+                <a:cs typeface="Arial" pitchFamily="34" charset="-120"/>
+              </a:rPr>
+              <a:t> Take guesses.</a:t>
             </a:r>
             <a:endParaRPr lang="en-US" sz="1200" dirty="0"/>
           </a:p>
+          <a:p>
+            <a:pPr algn="l" marL="342900" indent="-342900">
+              <a:lnSpc>
+                <a:spcPts val="1620"/>
+              </a:lnSpc>
+              <a:spcAft>
+                <a:spcPts val="300"/>
+              </a:spcAft>
+              <a:buSzPct val="100000"/>
+              <a:buChar char="•"/>
+            </a:pPr>
+            <a:r>
+              <a:rPr lang="en-US" sz="1200" dirty="0">
+                <a:solidFill>
+                  <a:srgbClr val="1C2833"/>
+                </a:solidFill>
+                <a:latin typeface="Arial" pitchFamily="34" charset="0"/>
+                <a:ea typeface="Arial" pitchFamily="34" charset="-122"/>
+                <a:cs typeface="Arial" pitchFamily="34" charset="-120"/>
+              </a:rPr>
+              <a:t>Walk through it the Nikhilam way:</a:t>
+            </a:r>
+            <a:endParaRPr lang="en-US" sz="1200" dirty="0"/>
+          </a:p>
         </p:txBody>
       </p:sp>
       <p:sp>
         <p:nvSpPr>
           <p:cNvPr id="5" name="Text 3"/>
+          <p:cNvSpPr/>
+          <p:nvPr/>
+        </p:nvSpPr>
+        <p:spPr>
+          <a:xfrm>
+            <a:off x="406301" y="1510754"/>
+            <a:ext cx="8331398" cy="777627"/>
+          </a:xfrm>
+          <a:prstGeom prst="rect">
+            <a:avLst/>
+          </a:prstGeom>
+          <a:solidFill>
+            <a:srgbClr val="F4F8F9"/>
+          </a:solidFill>
+          <a:ln/>
+        </p:spPr>
+        <p:txBody>
+          <a:bodyPr wrap="square" rtlCol="0" anchor="ctr"/>
+          <a:lstStyle/>
+          <a:p>
+            <a:pPr indent="0" marL="0">
+              <a:buNone/>
+            </a:pPr>
+            <a:endParaRPr lang="en-US" dirty="0"/>
+          </a:p>
+        </p:txBody>
+      </p:sp>
+      <p:sp>
+        <p:nvSpPr>
+          <p:cNvPr id="6" name="Shape 4"/>
+          <p:cNvSpPr/>
+          <p:nvPr/>
+        </p:nvSpPr>
+        <p:spPr>
+          <a:xfrm>
+            <a:off x="430113" y="1510754"/>
+            <a:ext cx="0" cy="777627"/>
+          </a:xfrm>
+          <a:prstGeom prst="line">
+            <a:avLst/>
+          </a:prstGeom>
+          <a:noFill/>
+          <a:ln w="47625">
+            <a:solidFill>
+              <a:srgbClr val="277884"/>
+            </a:solidFill>
+            <a:prstDash val="solid"/>
+          </a:ln>
+        </p:spPr>
+      </p:sp>
+      <p:sp>
+        <p:nvSpPr>
+          <p:cNvPr id="7" name="Text 5"/>
+          <p:cNvSpPr/>
+          <p:nvPr/>
+        </p:nvSpPr>
+        <p:spPr>
+          <a:xfrm>
+            <a:off x="631627" y="1637705"/>
+            <a:ext cx="8086939" cy="174575"/>
+          </a:xfrm>
+          <a:prstGeom prst="rect">
+            <a:avLst/>
+          </a:prstGeom>
+          <a:noFill/>
+          <a:ln/>
+        </p:spPr>
+        <p:txBody>
+          <a:bodyPr wrap="square" lIns="0" tIns="0" rIns="0" bIns="0" rtlCol="0" anchor="t"/>
+          <a:lstStyle/>
+          <a:p>
+            <a:pPr algn="l" indent="0" marL="0">
+              <a:lnSpc>
+                <a:spcPts val="1375"/>
+              </a:lnSpc>
+              <a:buNone/>
+            </a:pPr>
+            <a:r>
+              <a:rPr lang="en-US" sz="1100" dirty="0">
+                <a:solidFill>
+                  <a:srgbClr val="1C2833"/>
+                </a:solidFill>
+                <a:latin typeface="Courier New" pitchFamily="34" charset="0"/>
+                <a:ea typeface="Courier New" pitchFamily="34" charset="-122"/>
+                <a:cs typeface="Courier New" pitchFamily="34" charset="-120"/>
+              </a:rPr>
+              <a:t>100</a:t>
+            </a:r>
+            <a:endParaRPr lang="en-US" sz="1100" dirty="0"/>
+          </a:p>
+        </p:txBody>
+      </p:sp>
+      <p:sp>
+        <p:nvSpPr>
+          <p:cNvPr id="8" name="Text 6"/>
+          <p:cNvSpPr/>
+          <p:nvPr/>
+        </p:nvSpPr>
+        <p:spPr>
+          <a:xfrm>
+            <a:off x="631627" y="1812280"/>
+            <a:ext cx="8086939" cy="174575"/>
+          </a:xfrm>
+          <a:prstGeom prst="rect">
+            <a:avLst/>
+          </a:prstGeom>
+          <a:noFill/>
+          <a:ln/>
+        </p:spPr>
+        <p:txBody>
+          <a:bodyPr wrap="square" lIns="0" tIns="0" rIns="0" bIns="0" rtlCol="0" anchor="t"/>
+          <a:lstStyle/>
+          <a:p>
+            <a:pPr algn="l" indent="0" marL="0">
+              <a:lnSpc>
+                <a:spcPts val="1375"/>
+              </a:lnSpc>
+              <a:buNone/>
+            </a:pPr>
+            <a:r>
+              <a:rPr lang="en-US" sz="1100" dirty="0">
+                <a:solidFill>
+                  <a:srgbClr val="1C2833"/>
+                </a:solidFill>
+                <a:latin typeface="Courier New" pitchFamily="34" charset="0"/>
+                <a:ea typeface="Courier New" pitchFamily="34" charset="-122"/>
+                <a:cs typeface="Courier New" pitchFamily="34" charset="-120"/>
+              </a:rPr>
+              <a:t>−     73</a:t>
+            </a:r>
+            <a:endParaRPr lang="en-US" sz="1100" dirty="0"/>
+          </a:p>
+        </p:txBody>
+      </p:sp>
+      <p:sp>
+        <p:nvSpPr>
+          <p:cNvPr id="9" name="Text 7"/>
+          <p:cNvSpPr/>
+          <p:nvPr/>
+        </p:nvSpPr>
+        <p:spPr>
+          <a:xfrm>
+            <a:off x="631627" y="1986855"/>
+            <a:ext cx="8086939" cy="174575"/>
+          </a:xfrm>
+          <a:prstGeom prst="rect">
+            <a:avLst/>
+          </a:prstGeom>
+          <a:noFill/>
+          <a:ln/>
+        </p:spPr>
+        <p:txBody>
+          <a:bodyPr wrap="square" lIns="0" tIns="0" rIns="0" bIns="0" rtlCol="0" anchor="t"/>
+          <a:lstStyle/>
+          <a:p>
+            <a:pPr algn="l" indent="0" marL="0">
+              <a:lnSpc>
+                <a:spcPts val="1375"/>
+              </a:lnSpc>
+              <a:buNone/>
+            </a:pPr>
+            <a:r>
+              <a:rPr lang="en-US" sz="1100" dirty="0">
+                <a:solidFill>
+                  <a:srgbClr val="1C2833"/>
+                </a:solidFill>
+                <a:latin typeface="Courier New" pitchFamily="34" charset="0"/>
+                <a:ea typeface="Courier New" pitchFamily="34" charset="-122"/>
+                <a:cs typeface="Courier New" pitchFamily="34" charset="-120"/>
+              </a:rPr>
+              <a:t>———————</a:t>
+            </a:r>
+            <a:endParaRPr lang="en-US" sz="1100" dirty="0"/>
+          </a:p>
+        </p:txBody>
+      </p:sp>
+      <p:sp>
+        <p:nvSpPr>
+          <p:cNvPr id="10" name="Text 8"/>
           <p:cNvSpPr/>
           <p:nvPr/>
         </p:nvSpPr>
@@ -6022,7 +8586,7 @@
                 <a:ea typeface="Georgia" pitchFamily="34" charset="-122"/>
                 <a:cs typeface="Georgia" pitchFamily="34" charset="-120"/>
               </a:rPr>
-              <a:t>Wrap-up (5 min)</a:t>
+              <a:t>Core (15 min) — The pattern (cont.)</a:t>
             </a:r>
             <a:endParaRPr lang="en-US" sz="1800" dirty="0"/>
           </a:p>
@@ -6036,8 +8600,8 @@
         </p:nvSpPr>
         <p:spPr>
           <a:xfrm>
-            <a:off x="406301" y="870942"/>
-            <a:ext cx="8498026" cy="426541"/>
+            <a:off x="634901" y="883593"/>
+            <a:ext cx="8102798" cy="1013222"/>
           </a:xfrm>
           <a:prstGeom prst="rect">
             <a:avLst/>
@@ -6049,17 +8613,15 @@
           <a:bodyPr wrap="square" lIns="0" tIns="0" rIns="0" bIns="0" rtlCol="0" anchor="t"/>
           <a:lstStyle/>
           <a:p>
-            <a:pPr algn="l" indent="0" marL="0">
-              <a:lnSpc>
-                <a:spcPts val="1680"/>
-              </a:lnSpc>
-              <a:spcBef>
-                <a:spcPts val="300"/>
-              </a:spcBef>
-              <a:spcAft>
-                <a:spcPts val="300"/>
-              </a:spcAft>
-              <a:buNone/>
+            <a:pPr algn="l" marL="342900" indent="-342900">
+              <a:lnSpc>
+                <a:spcPts val="1620"/>
+              </a:lnSpc>
+              <a:spcAft>
+                <a:spcPts val="300"/>
+              </a:spcAft>
+              <a:buSzPct val="100000"/>
+              <a:buChar char="•"/>
             </a:pPr>
             <a:r>
               <a:rPr lang="en-US" sz="1200" dirty="0">
@@ -6070,42 +8632,40 @@
                 <a:ea typeface="Arial" pitchFamily="34" charset="-122"/>
                 <a:cs typeface="Arial" pitchFamily="34" charset="-120"/>
               </a:rPr>
-              <a:t>– Quick poll: who got 15+ in 60 sec? 18+? 20? – Recall paraphrase: </a:t>
-            </a:r>
-            <a:pPr algn="l" indent="0" marL="0">
-              <a:lnSpc>
-                <a:spcPts val="1680"/>
-              </a:lnSpc>
-              <a:spcBef>
-                <a:spcPts val="300"/>
-              </a:spcBef>
-              <a:spcAft>
-                <a:spcPts val="300"/>
-              </a:spcAft>
-              <a:buNone/>
-            </a:pPr>
-            <a:r>
-              <a:rPr lang="en-US" sz="1200" i="1" dirty="0">
-                <a:solidFill>
-                  <a:srgbClr val="1C2833"/>
-                </a:solidFill>
-                <a:latin typeface="Arial" pitchFamily="34" charset="0"/>
-                <a:ea typeface="Arial" pitchFamily="34" charset="-122"/>
-                <a:cs typeface="Arial" pitchFamily="34" charset="-120"/>
-              </a:rPr>
-              <a:t>"To complete to 100, take each digit from 9; the last digit takes from 10."</a:t>
-            </a:r>
-            <a:pPr algn="l" indent="0" marL="0">
-              <a:lnSpc>
-                <a:spcPts val="1680"/>
-              </a:lnSpc>
-              <a:spcBef>
-                <a:spcPts val="300"/>
-              </a:spcBef>
-              <a:spcAft>
-                <a:spcPts val="300"/>
-              </a:spcAft>
-              <a:buNone/>
+              <a:t>First digit (7): 9 − 7 = </a:t>
+            </a:r>
+            <a:pPr algn="l" indent="0" marL="0">
+              <a:lnSpc>
+                <a:spcPts val="1620"/>
+              </a:lnSpc>
+              <a:spcAft>
+                <a:spcPts val="300"/>
+              </a:spcAft>
+              <a:buNone/>
+            </a:pPr>
+            <a:r>
+              <a:rPr lang="en-US" sz="1200" b="1" dirty="0">
+                <a:solidFill>
+                  <a:srgbClr val="1C2833"/>
+                </a:solidFill>
+                <a:latin typeface="Arial" pitchFamily="34" charset="0"/>
+                <a:ea typeface="Arial" pitchFamily="34" charset="-122"/>
+                <a:cs typeface="Arial" pitchFamily="34" charset="-120"/>
+              </a:rPr>
+              <a:t>2</a:t>
+            </a:r>
+            <a:endParaRPr lang="en-US" sz="1200" dirty="0"/>
+          </a:p>
+          <a:p>
+            <a:pPr algn="l" marL="342900" indent="-342900">
+              <a:lnSpc>
+                <a:spcPts val="1620"/>
+              </a:lnSpc>
+              <a:spcAft>
+                <a:spcPts val="300"/>
+              </a:spcAft>
+              <a:buSzPct val="100000"/>
+              <a:buChar char="•"/>
             </a:pPr>
             <a:r>
               <a:rPr lang="en-US" sz="1200" dirty="0">
@@ -6116,38 +8676,189 @@
                 <a:ea typeface="Arial" pitchFamily="34" charset="-122"/>
                 <a:cs typeface="Arial" pitchFamily="34" charset="-120"/>
               </a:rPr>
-              <a:t> – Preview Day 3: </a:t>
-            </a:r>
-            <a:pPr algn="l" indent="0" marL="0">
-              <a:lnSpc>
-                <a:spcPts val="1680"/>
-              </a:lnSpc>
-              <a:spcBef>
-                <a:spcPts val="300"/>
-              </a:spcBef>
-              <a:spcAft>
-                <a:spcPts val="300"/>
-              </a:spcAft>
-              <a:buNone/>
-            </a:pPr>
-            <a:r>
-              <a:rPr lang="en-US" sz="1200" i="1" dirty="0">
-                <a:solidFill>
-                  <a:srgbClr val="1C2833"/>
-                </a:solidFill>
-                <a:latin typeface="Arial" pitchFamily="34" charset="0"/>
-                <a:ea typeface="Arial" pitchFamily="34" charset="-122"/>
-                <a:cs typeface="Arial" pitchFamily="34" charset="-120"/>
-              </a:rPr>
-              <a:t>"Tomorrow — same idea, but complement to 1000."</a:t>
+              <a:t>Last digit (3): 10 − 3 = </a:t>
+            </a:r>
+            <a:pPr algn="l" indent="0" marL="0">
+              <a:lnSpc>
+                <a:spcPts val="1620"/>
+              </a:lnSpc>
+              <a:spcAft>
+                <a:spcPts val="300"/>
+              </a:spcAft>
+              <a:buNone/>
+            </a:pPr>
+            <a:r>
+              <a:rPr lang="en-US" sz="1200" b="1" dirty="0">
+                <a:solidFill>
+                  <a:srgbClr val="1C2833"/>
+                </a:solidFill>
+                <a:latin typeface="Arial" pitchFamily="34" charset="0"/>
+                <a:ea typeface="Arial" pitchFamily="34" charset="-122"/>
+                <a:cs typeface="Arial" pitchFamily="34" charset="-120"/>
+              </a:rPr>
+              <a:t>7</a:t>
             </a:r>
             <a:endParaRPr lang="en-US" sz="1200" dirty="0"/>
           </a:p>
+          <a:p>
+            <a:pPr algn="l" marL="342900" indent="-342900">
+              <a:lnSpc>
+                <a:spcPts val="1620"/>
+              </a:lnSpc>
+              <a:spcAft>
+                <a:spcPts val="300"/>
+              </a:spcAft>
+              <a:buSzPct val="100000"/>
+              <a:buChar char="•"/>
+            </a:pPr>
+            <a:r>
+              <a:rPr lang="en-US" sz="1200" dirty="0">
+                <a:solidFill>
+                  <a:srgbClr val="1C2833"/>
+                </a:solidFill>
+                <a:latin typeface="Arial" pitchFamily="34" charset="0"/>
+                <a:ea typeface="Arial" pitchFamily="34" charset="-122"/>
+                <a:cs typeface="Arial" pitchFamily="34" charset="-120"/>
+              </a:rPr>
+              <a:t>Answer: </a:t>
+            </a:r>
+            <a:pPr algn="l" indent="0" marL="0">
+              <a:lnSpc>
+                <a:spcPts val="1620"/>
+              </a:lnSpc>
+              <a:spcAft>
+                <a:spcPts val="300"/>
+              </a:spcAft>
+              <a:buNone/>
+            </a:pPr>
+            <a:r>
+              <a:rPr lang="en-US" sz="1200" b="1" dirty="0">
+                <a:solidFill>
+                  <a:srgbClr val="1C2833"/>
+                </a:solidFill>
+                <a:latin typeface="Arial" pitchFamily="34" charset="0"/>
+                <a:ea typeface="Arial" pitchFamily="34" charset="-122"/>
+                <a:cs typeface="Arial" pitchFamily="34" charset="-120"/>
+              </a:rPr>
+              <a:t>27</a:t>
+            </a:r>
+            <a:pPr algn="l" indent="0" marL="0">
+              <a:lnSpc>
+                <a:spcPts val="1620"/>
+              </a:lnSpc>
+              <a:spcAft>
+                <a:spcPts val="300"/>
+              </a:spcAft>
+              <a:buNone/>
+            </a:pPr>
+            <a:r>
+              <a:rPr lang="en-US" sz="1200" dirty="0">
+                <a:solidFill>
+                  <a:srgbClr val="1C2833"/>
+                </a:solidFill>
+                <a:latin typeface="Arial" pitchFamily="34" charset="0"/>
+                <a:ea typeface="Arial" pitchFamily="34" charset="-122"/>
+                <a:cs typeface="Arial" pitchFamily="34" charset="-120"/>
+              </a:rPr>
+              <a:t>.</a:t>
+            </a:r>
+            <a:endParaRPr lang="en-US" sz="1200" dirty="0"/>
+          </a:p>
+          <a:p>
+            <a:pPr algn="l" marL="342900" indent="-342900">
+              <a:lnSpc>
+                <a:spcPts val="1620"/>
+              </a:lnSpc>
+              <a:spcAft>
+                <a:spcPts val="300"/>
+              </a:spcAft>
+              <a:buSzPct val="100000"/>
+              <a:buChar char="•"/>
+            </a:pPr>
+            <a:r>
+              <a:rPr lang="en-US" sz="1200" dirty="0">
+                <a:solidFill>
+                  <a:srgbClr val="1C2833"/>
+                </a:solidFill>
+                <a:latin typeface="Arial" pitchFamily="34" charset="0"/>
+                <a:ea typeface="Arial" pitchFamily="34" charset="-122"/>
+                <a:cs typeface="Arial" pitchFamily="34" charset="-120"/>
+              </a:rPr>
+              <a:t>Verify: 73 + 27 = 100. ✓</a:t>
+            </a:r>
+            <a:endParaRPr lang="en-US" sz="1200" dirty="0"/>
+          </a:p>
         </p:txBody>
       </p:sp>
       <p:sp>
         <p:nvSpPr>
           <p:cNvPr id="5" name="Text 3"/>
+          <p:cNvSpPr/>
+          <p:nvPr/>
+        </p:nvSpPr>
+        <p:spPr>
+          <a:xfrm>
+            <a:off x="634901" y="1998315"/>
+            <a:ext cx="8102798" cy="281880"/>
+          </a:xfrm>
+          <a:prstGeom prst="rect">
+            <a:avLst/>
+          </a:prstGeom>
+          <a:noFill/>
+          <a:ln/>
+        </p:spPr>
+        <p:txBody>
+          <a:bodyPr wrap="square" lIns="0" tIns="0" rIns="0" bIns="0" rtlCol="0" anchor="t"/>
+          <a:lstStyle/>
+          <a:p>
+            <a:pPr algn="l" marL="342900" indent="-342900">
+              <a:lnSpc>
+                <a:spcPts val="1620"/>
+              </a:lnSpc>
+              <a:spcAft>
+                <a:spcPts val="300"/>
+              </a:spcAft>
+              <a:buSzPct val="100000"/>
+              <a:buChar char="•"/>
+            </a:pPr>
+            <a:r>
+              <a:rPr lang="en-US" sz="1200" b="1" dirty="0">
+                <a:solidFill>
+                  <a:srgbClr val="1C2833"/>
+                </a:solidFill>
+                <a:latin typeface="Arial" pitchFamily="34" charset="0"/>
+                <a:ea typeface="Arial" pitchFamily="34" charset="-122"/>
+                <a:cs typeface="Arial" pitchFamily="34" charset="-120"/>
+              </a:rPr>
+              <a:t>Why "all from 9, last from 10"?</a:t>
+            </a:r>
+            <a:pPr algn="l" indent="0" marL="0">
+              <a:lnSpc>
+                <a:spcPts val="1620"/>
+              </a:lnSpc>
+              <a:spcAft>
+                <a:spcPts val="300"/>
+              </a:spcAft>
+              <a:buNone/>
+            </a:pPr>
+            <a:r>
+              <a:rPr lang="en-US" sz="1200" dirty="0">
+                <a:solidFill>
+                  <a:srgbClr val="1C2833"/>
+                </a:solidFill>
+                <a:latin typeface="Arial" pitchFamily="34" charset="0"/>
+                <a:ea typeface="Arial" pitchFamily="34" charset="-122"/>
+                <a:cs typeface="Arial" pitchFamily="34" charset="-120"/>
+              </a:rPr>
+              <a:t> Show on the board:</a:t>
+            </a:r>
+            <a:endParaRPr lang="en-US" sz="1200" dirty="0"/>
+          </a:p>
+        </p:txBody>
+      </p:sp>
+      <p:sp>
+        <p:nvSpPr>
+          <p:cNvPr id="6" name="Text 4"/>
           <p:cNvSpPr/>
           <p:nvPr/>
         </p:nvSpPr>
@@ -6297,7 +9008,7 @@
                 <a:ea typeface="Georgia" pitchFamily="34" charset="-122"/>
                 <a:cs typeface="Georgia" pitchFamily="34" charset="-120"/>
               </a:rPr>
-              <a:t>Homework</a:t>
+              <a:t>Core (15 min) — The pattern (cont.)</a:t>
             </a:r>
             <a:endParaRPr lang="en-US" sz="1800" dirty="0"/>
           </a:p>
@@ -6311,13 +9022,66 @@
         </p:nvSpPr>
         <p:spPr>
           <a:xfrm>
-            <a:off x="406301" y="870942"/>
-            <a:ext cx="8498026" cy="426541"/>
-          </a:xfrm>
-          <a:prstGeom prst="rect">
+            <a:off x="406301" y="883593"/>
+            <a:ext cx="8331398" cy="428476"/>
+          </a:xfrm>
+          <a:prstGeom prst="rect">
+            <a:avLst/>
+          </a:prstGeom>
+          <a:solidFill>
+            <a:srgbClr val="F4F8F9"/>
+          </a:solidFill>
+          <a:ln/>
+        </p:spPr>
+        <p:txBody>
+          <a:bodyPr wrap="square" rtlCol="0" anchor="ctr"/>
+          <a:lstStyle/>
+          <a:p>
+            <a:pPr indent="0" marL="0">
+              <a:buNone/>
+            </a:pPr>
+            <a:endParaRPr lang="en-US" dirty="0"/>
+          </a:p>
+        </p:txBody>
+      </p:sp>
+      <p:sp>
+        <p:nvSpPr>
+          <p:cNvPr id="5" name="Shape 3"/>
+          <p:cNvSpPr/>
+          <p:nvPr/>
+        </p:nvSpPr>
+        <p:spPr>
+          <a:xfrm>
+            <a:off x="430113" y="883593"/>
+            <a:ext cx="0" cy="428476"/>
+          </a:xfrm>
+          <a:prstGeom prst="line">
             <a:avLst/>
           </a:prstGeom>
           <a:noFill/>
+          <a:ln w="47625">
+            <a:solidFill>
+              <a:srgbClr val="277884"/>
+            </a:solidFill>
+            <a:prstDash val="solid"/>
+          </a:ln>
+        </p:spPr>
+      </p:sp>
+      <p:sp>
+        <p:nvSpPr>
+          <p:cNvPr id="6" name="Text 4"/>
+          <p:cNvSpPr/>
+          <p:nvPr/>
+        </p:nvSpPr>
+        <p:spPr>
+          <a:xfrm>
+            <a:off x="631627" y="1010543"/>
+            <a:ext cx="8086939" cy="174575"/>
+          </a:xfrm>
+          <a:prstGeom prst="rect">
+            <a:avLst/>
+          </a:prstGeom>
+          <a:noFill/>
           <a:ln/>
         </p:spPr>
         <p:txBody>
@@ -6326,34 +9090,28 @@
           <a:p>
             <a:pPr algn="l" indent="0" marL="0">
               <a:lnSpc>
-                <a:spcPts val="1680"/>
-              </a:lnSpc>
-              <a:spcBef>
-                <a:spcPts val="300"/>
-              </a:spcBef>
-              <a:spcAft>
-                <a:spcPts val="300"/>
-              </a:spcAft>
-              <a:buNone/>
-            </a:pPr>
-            <a:r>
-              <a:rPr lang="en-US" sz="1200" dirty="0">
-                <a:solidFill>
-                  <a:srgbClr val="1C2833"/>
-                </a:solidFill>
-                <a:latin typeface="Arial" pitchFamily="34" charset="0"/>
-                <a:ea typeface="Arial" pitchFamily="34" charset="-122"/>
-                <a:cs typeface="Arial" pitchFamily="34" charset="-120"/>
-              </a:rPr>
-              <a:t>– Memorise complements to 100 of the multiples of 5: 5, 10, 15, 20, 25, 30, 35, 40, 45, 50, 55, 60, 65, 70, 75, 80, 85, 90, 95. These should become automatic. – Time yourself: 20 random complements in under 60 seconds. Practise twice.</a:t>
-            </a:r>
-            <a:endParaRPr lang="en-US" sz="1200" dirty="0"/>
-          </a:p>
-        </p:txBody>
-      </p:sp>
-      <p:sp>
-        <p:nvSpPr>
-          <p:cNvPr id="5" name="Text 3"/>
+                <a:spcPts val="1375"/>
+              </a:lnSpc>
+              <a:buNone/>
+            </a:pPr>
+            <a:r>
+              <a:rPr lang="en-US" sz="1100" dirty="0">
+                <a:solidFill>
+                  <a:srgbClr val="1C2833"/>
+                </a:solidFill>
+                <a:latin typeface="Courier New" pitchFamily="34" charset="0"/>
+                <a:ea typeface="Courier New" pitchFamily="34" charset="-122"/>
+                <a:cs typeface="Courier New" pitchFamily="34" charset="-120"/>
+              </a:rPr>
+              <a:t>99  +  1  = 100</a:t>
+            </a:r>
+            <a:endParaRPr lang="en-US" sz="1100" dirty="0"/>
+          </a:p>
+        </p:txBody>
+      </p:sp>
+      <p:sp>
+        <p:nvSpPr>
+          <p:cNvPr id="7" name="Text 5"/>
           <p:cNvSpPr/>
           <p:nvPr/>
         </p:nvSpPr>
